--- a/NORTH_CENTRAL_SECURITY_20SLIDE_FAILSAFE.pptx
+++ b/NORTH_CENTRAL_SECURITY_20SLIDE_FAILSAFE.pptx
@@ -8,6 +8,8 @@
     <p:sldId id="256" r:id="rId7"/>
     <p:sldId id="257" r:id="rId8"/>
     <p:sldId id="258" r:id="rId9"/>
+    <p:sldId id="277" r:id="rId28"/>
+    <p:sldId id="278" r:id="rId29"/>
     <p:sldId id="259" r:id="rId10"/>
     <p:sldId id="260" r:id="rId11"/>
     <p:sldId id="261" r:id="rId12"/>
@@ -3146,7 +3148,7 @@
                 </a:solidFill>
                 <a:latin typeface="Segoe UI"/>
               </a:rPr>
-              <a:t>01 / 21</a:t>
+              <a:t>01 / 23</a:t>
             </a:r>
           </a:p>
         </p:txBody>
@@ -3382,7 +3384,7 @@
                 </a:solidFill>
                 <a:latin typeface="Segoe UI"/>
               </a:rPr>
-              <a:t>10 / 21</a:t>
+              <a:t>10 / 23</a:t>
             </a:r>
           </a:p>
         </p:txBody>
@@ -3413,11 +3415,11 @@
             <a:r>
               <a:rPr sz="1300" b="0" i="0">
                 <a:solidFill>
-                  <a:srgbClr val="2FD8C9"/>
-                </a:solidFill>
-                <a:latin typeface="Segoe UI"/>
-              </a:rPr>
-              <a:t>NEW SECURITY ARCHITECTURE · PART 1</a:t>
+                  <a:srgbClr val="9FBFA9"/>
+                </a:solidFill>
+                <a:latin typeface="Segoe UI"/>
+              </a:rPr>
+              <a:t>UNDERSTANDING THE THREAT</a:t>
             </a:r>
           </a:p>
         </p:txBody>
@@ -3448,339 +3450,25 @@
             <a:r>
               <a:rPr sz="3200" b="1" i="0">
                 <a:solidFill>
-                  <a:srgbClr val="2FD8C9"/>
-                </a:solidFill>
-                <a:latin typeface="Segoe UI"/>
-              </a:rPr>
-              <a:t>One Threat Picture</a:t>
-            </a:r>
-          </a:p>
-        </p:txBody>
-      </p:sp>
-      <p:graphicFrame>
-        <p:nvGraphicFramePr>
-          <p:cNvPr id="5" name="Table 4"/>
-          <p:cNvGraphicFramePr>
-            <a:graphicFrameLocks noGrp="1"/>
-          </p:cNvGraphicFramePr>
-          <p:nvPr/>
-        </p:nvGraphicFramePr>
-        <p:xfrm>
-          <a:off x="731520" y="2286000"/>
-          <a:ext cx="9692639" cy="2743200"/>
-        </p:xfrm>
-        <a:graphic>
-          <a:graphicData uri="http://schemas.openxmlformats.org/drawingml/2006/table">
-            <a:tbl>
-              <a:tblPr firstRow="1" bandRow="1">
-                <a:tableStyleId>{5C22544A-7EE6-4342-B048-85BDC9FD1C3A}</a:tableStyleId>
-              </a:tblPr>
-              <a:tblGrid>
-                <a:gridCol w="2643447"/>
-                <a:gridCol w="7049192"/>
-              </a:tblGrid>
-              <a:tr h="457200">
-                <a:tc>
-                  <a:txBody>
-                    <a:bodyPr/>
-                    <a:lstStyle/>
-                    <a:p>
-                      <a:pPr algn="ctr"/>
-                      <a:r>
-                        <a:rPr b="1" sz="1100">
-                          <a:solidFill>
-                            <a:srgbClr val="C9A24B"/>
-                          </a:solidFill>
-                          <a:latin typeface="Segoe UI"/>
-                        </a:rPr>
-                        <a:t>Discipline</a:t>
-                      </a:r>
-                    </a:p>
-                  </a:txBody>
-                  <a:tcPr>
-                    <a:solidFill>
-                      <a:srgbClr val="1B3A2B"/>
-                    </a:solidFill>
-                  </a:tcPr>
-                </a:tc>
-                <a:tc>
-                  <a:txBody>
-                    <a:bodyPr/>
-                    <a:lstStyle/>
-                    <a:p>
-                      <a:pPr algn="ctr"/>
-                      <a:r>
-                        <a:rPr b="1" sz="1100">
-                          <a:solidFill>
-                            <a:srgbClr val="C9A24B"/>
-                          </a:solidFill>
-                          <a:latin typeface="Segoe UI"/>
-                        </a:rPr>
-                        <a:t>Action</a:t>
-                      </a:r>
-                    </a:p>
-                  </a:txBody>
-                  <a:tcPr>
-                    <a:solidFill>
-                      <a:srgbClr val="1B3A2B"/>
-                    </a:solidFill>
-                  </a:tcPr>
-                </a:tc>
-              </a:tr>
-              <a:tr h="457200">
-                <a:tc>
-                  <a:txBody>
-                    <a:bodyPr/>
-                    <a:lstStyle/>
-                    <a:p>
-                      <a:pPr algn="l"/>
-                      <a:r>
-                        <a:rPr sz="1000">
-                          <a:solidFill>
-                            <a:srgbClr val="F2EFE6"/>
-                          </a:solidFill>
-                          <a:latin typeface="Segoe UI"/>
-                        </a:rPr>
-                        <a:t>SEE</a:t>
-                      </a:r>
-                    </a:p>
-                  </a:txBody>
-                  <a:tcPr>
-                    <a:solidFill>
-                      <a:srgbClr val="16241C"/>
-                    </a:solidFill>
-                  </a:tcPr>
-                </a:tc>
-                <a:tc>
-                  <a:txBody>
-                    <a:bodyPr/>
-                    <a:lstStyle/>
-                    <a:p>
-                      <a:pPr algn="l"/>
-                      <a:r>
-                        <a:rPr sz="1000">
-                          <a:solidFill>
-                            <a:srgbClr val="F2EFE6"/>
-                          </a:solidFill>
-                          <a:latin typeface="Segoe UI"/>
-                        </a:rPr>
-                        <a:t>Collect information</a:t>
-                      </a:r>
-                    </a:p>
-                  </a:txBody>
-                  <a:tcPr>
-                    <a:solidFill>
-                      <a:srgbClr val="16241C"/>
-                    </a:solidFill>
-                  </a:tcPr>
-                </a:tc>
-              </a:tr>
-              <a:tr h="457200">
-                <a:tc>
-                  <a:txBody>
-                    <a:bodyPr/>
-                    <a:lstStyle/>
-                    <a:p>
-                      <a:pPr algn="l"/>
-                      <a:r>
-                        <a:rPr sz="1000">
-                          <a:solidFill>
-                            <a:srgbClr val="F2EFE6"/>
-                          </a:solidFill>
-                          <a:latin typeface="Segoe UI"/>
-                        </a:rPr>
-                        <a:t>SHARE</a:t>
-                      </a:r>
-                    </a:p>
-                  </a:txBody>
-                  <a:tcPr>
-                    <a:solidFill>
-                      <a:srgbClr val="16241C"/>
-                    </a:solidFill>
-                  </a:tcPr>
-                </a:tc>
-                <a:tc>
-                  <a:txBody>
-                    <a:bodyPr/>
-                    <a:lstStyle/>
-                    <a:p>
-                      <a:pPr algn="l"/>
-                      <a:r>
-                        <a:rPr sz="1000">
-                          <a:solidFill>
-                            <a:srgbClr val="F2EFE6"/>
-                          </a:solidFill>
-                          <a:latin typeface="Segoe UI"/>
-                        </a:rPr>
-                        <a:t>Move it fast to who needs it</a:t>
-                      </a:r>
-                    </a:p>
-                  </a:txBody>
-                  <a:tcPr>
-                    <a:solidFill>
-                      <a:srgbClr val="16241C"/>
-                    </a:solidFill>
-                  </a:tcPr>
-                </a:tc>
-              </a:tr>
-              <a:tr h="457200">
-                <a:tc>
-                  <a:txBody>
-                    <a:bodyPr/>
-                    <a:lstStyle/>
-                    <a:p>
-                      <a:pPr algn="l"/>
-                      <a:r>
-                        <a:rPr sz="1000">
-                          <a:solidFill>
-                            <a:srgbClr val="F2EFE6"/>
-                          </a:solidFill>
-                          <a:latin typeface="Segoe UI"/>
-                        </a:rPr>
-                        <a:t>DECIDE</a:t>
-                      </a:r>
-                    </a:p>
-                  </a:txBody>
-                  <a:tcPr>
-                    <a:solidFill>
-                      <a:srgbClr val="16241C"/>
-                    </a:solidFill>
-                  </a:tcPr>
-                </a:tc>
-                <a:tc>
-                  <a:txBody>
-                    <a:bodyPr/>
-                    <a:lstStyle/>
-                    <a:p>
-                      <a:pPr algn="l"/>
-                      <a:r>
-                        <a:rPr sz="1000">
-                          <a:solidFill>
-                            <a:srgbClr val="F2EFE6"/>
-                          </a:solidFill>
-                          <a:latin typeface="Segoe UI"/>
-                        </a:rPr>
-                        <a:t>Clear command &amp; responsibility</a:t>
-                      </a:r>
-                    </a:p>
-                  </a:txBody>
-                  <a:tcPr>
-                    <a:solidFill>
-                      <a:srgbClr val="16241C"/>
-                    </a:solidFill>
-                  </a:tcPr>
-                </a:tc>
-              </a:tr>
-              <a:tr h="457200">
-                <a:tc>
-                  <a:txBody>
-                    <a:bodyPr/>
-                    <a:lstStyle/>
-                    <a:p>
-                      <a:pPr algn="l"/>
-                      <a:r>
-                        <a:rPr sz="1000">
-                          <a:solidFill>
-                            <a:srgbClr val="F2EFE6"/>
-                          </a:solidFill>
-                          <a:latin typeface="Segoe UI"/>
-                        </a:rPr>
-                        <a:t>ACT</a:t>
-                      </a:r>
-                    </a:p>
-                  </a:txBody>
-                  <a:tcPr>
-                    <a:solidFill>
-                      <a:srgbClr val="16241C"/>
-                    </a:solidFill>
-                  </a:tcPr>
-                </a:tc>
-                <a:tc>
-                  <a:txBody>
-                    <a:bodyPr/>
-                    <a:lstStyle/>
-                    <a:p>
-                      <a:pPr algn="l"/>
-                      <a:r>
-                        <a:rPr sz="1000">
-                          <a:solidFill>
-                            <a:srgbClr val="F2EFE6"/>
-                          </a:solidFill>
-                          <a:latin typeface="Segoe UI"/>
-                        </a:rPr>
-                        <a:t>Respond fast &amp; proportionately</a:t>
-                      </a:r>
-                    </a:p>
-                  </a:txBody>
-                  <a:tcPr>
-                    <a:solidFill>
-                      <a:srgbClr val="16241C"/>
-                    </a:solidFill>
-                  </a:tcPr>
-                </a:tc>
-              </a:tr>
-              <a:tr h="457200">
-                <a:tc>
-                  <a:txBody>
-                    <a:bodyPr/>
-                    <a:lstStyle/>
-                    <a:p>
-                      <a:pPr algn="l"/>
-                      <a:r>
-                        <a:rPr sz="1000">
-                          <a:solidFill>
-                            <a:srgbClr val="F2EFE6"/>
-                          </a:solidFill>
-                          <a:latin typeface="Segoe UI"/>
-                        </a:rPr>
-                        <a:t>LEARN</a:t>
-                      </a:r>
-                    </a:p>
-                  </a:txBody>
-                  <a:tcPr>
-                    <a:solidFill>
-                      <a:srgbClr val="16241C"/>
-                    </a:solidFill>
-                  </a:tcPr>
-                </a:tc>
-                <a:tc>
-                  <a:txBody>
-                    <a:bodyPr/>
-                    <a:lstStyle/>
-                    <a:p>
-                      <a:pPr algn="l"/>
-                      <a:r>
-                        <a:rPr sz="1000">
-                          <a:solidFill>
-                            <a:srgbClr val="F2EFE6"/>
-                          </a:solidFill>
-                          <a:latin typeface="Segoe UI"/>
-                        </a:rPr>
-                        <a:t>Prevent repetition</a:t>
-                      </a:r>
-                    </a:p>
-                  </a:txBody>
-                  <a:tcPr>
-                    <a:solidFill>
-                      <a:srgbClr val="16241C"/>
-                    </a:solidFill>
-                  </a:tcPr>
-                </a:tc>
-              </a:tr>
-            </a:tbl>
-          </a:graphicData>
-        </a:graphic>
-      </p:graphicFrame>
-      <p:sp>
-        <p:nvSpPr>
-          <p:cNvPr id="6" name="TextBox 5"/>
+                  <a:srgbClr val="C9A24B"/>
+                </a:solidFill>
+                <a:latin typeface="Segoe UI"/>
+              </a:rPr>
+              <a:t>The Ransom Economy Self-Funds</a:t>
+            </a:r>
+          </a:p>
+        </p:txBody>
+      </p:sp>
+      <p:sp>
+        <p:nvSpPr>
+          <p:cNvPr id="5" name="TextBox 4"/>
           <p:cNvSpPr txBox="1"/>
           <p:nvPr/>
         </p:nvSpPr>
         <p:spPr>
           <a:xfrm>
-            <a:off x="822960" y="5806440"/>
-            <a:ext cx="9509760" cy="685800"/>
+            <a:off x="822960" y="2651760"/>
+            <a:ext cx="9509760" cy="1371600"/>
           </a:xfrm>
           <a:prstGeom prst="rect">
             <a:avLst/>
@@ -3795,13 +3483,48 @@
           <a:p>
             <a:pPr algn="ctr"/>
             <a:r>
+              <a:rPr sz="1800" b="1" i="0">
+                <a:solidFill>
+                  <a:srgbClr val="B23A3A"/>
+                </a:solidFill>
+                <a:latin typeface="Segoe UI"/>
+              </a:rPr>
+              <a:t>1. Abduct → 2. Hold → 3. Collect (₦7.78bn/12mo) → 4. Reinvest (weapons, transport, recruits) → 5. Repeat, stronger</a:t>
+            </a:r>
+          </a:p>
+        </p:txBody>
+      </p:sp>
+      <p:sp>
+        <p:nvSpPr>
+          <p:cNvPr id="6" name="TextBox 5"/>
+          <p:cNvSpPr txBox="1"/>
+          <p:nvPr/>
+        </p:nvSpPr>
+        <p:spPr>
+          <a:xfrm>
+            <a:off x="822960" y="5806440"/>
+            <a:ext cx="9509760" cy="685800"/>
+          </a:xfrm>
+          <a:prstGeom prst="rect">
+            <a:avLst/>
+          </a:prstGeom>
+          <a:noFill/>
+        </p:spPr>
+        <p:txBody>
+          <a:bodyPr wrap="square">
+            <a:spAutoFit/>
+          </a:bodyPr>
+          <a:lstStyle/>
+          <a:p>
+            <a:pPr algn="ctr"/>
+            <a:r>
               <a:rPr sz="1500" b="1" i="0">
                 <a:solidFill>
                   <a:srgbClr val="C9A24B"/>
                 </a:solidFill>
                 <a:latin typeface="Segoe UI"/>
               </a:rPr>
-              <a:t>SAY: No single agency can do everything — together, fused, our agencies can know almost everything that matters.</a:t>
+              <a:t>SAY: Every naira paid in ransom funds the next attack. It's a business model.</a:t>
             </a:r>
           </a:p>
         </p:txBody>
@@ -3862,7 +3585,7 @@
                 </a:solidFill>
                 <a:latin typeface="Segoe UI"/>
               </a:rPr>
-              <a:t>11 / 21</a:t>
+              <a:t>11 / 23</a:t>
             </a:r>
           </a:p>
         </p:txBody>
@@ -3875,8 +3598,8 @@
         </p:nvSpPr>
         <p:spPr>
           <a:xfrm>
-            <a:off x="822960" y="1051560"/>
-            <a:ext cx="9509760" cy="365760"/>
+            <a:off x="640080" y="2011680"/>
+            <a:ext cx="9875520" cy="914400"/>
           </a:xfrm>
           <a:prstGeom prst="rect">
             <a:avLst/>
@@ -3891,13 +3614,13 @@
           <a:p>
             <a:pPr algn="ctr"/>
             <a:r>
-              <a:rPr sz="1300" b="0" i="0">
-                <a:solidFill>
-                  <a:srgbClr val="2FD8C9"/>
-                </a:solidFill>
-                <a:latin typeface="Segoe UI"/>
-              </a:rPr>
-              <a:t>NEW SECURITY ARCHITECTURE · PART 2</a:t>
+              <a:rPr sz="3000" b="1" i="0">
+                <a:solidFill>
+                  <a:srgbClr val="B23A3A"/>
+                </a:solidFill>
+                <a:latin typeface="Segoe UI"/>
+              </a:rPr>
+              <a:t>THIS IS A DEVELOPMENT EMERGENCY</a:t>
             </a:r>
           </a:p>
         </p:txBody>
@@ -3910,8 +3633,8 @@
         </p:nvSpPr>
         <p:spPr>
           <a:xfrm>
-            <a:off x="640080" y="1417320"/>
-            <a:ext cx="9875520" cy="914400"/>
+            <a:off x="822960" y="3017520"/>
+            <a:ext cx="9509760" cy="1371600"/>
           </a:xfrm>
           <a:prstGeom prst="rect">
             <a:avLst/>
@@ -3926,13 +3649,13 @@
           <a:p>
             <a:pPr algn="ctr"/>
             <a:r>
-              <a:rPr sz="2600" b="1" i="0">
-                <a:solidFill>
-                  <a:srgbClr val="2FD8C9"/>
-                </a:solidFill>
-                <a:latin typeface="Segoe UI"/>
-              </a:rPr>
-              <a:t>Regional Security Intelligence &amp; Fusion Centre</a:t>
+              <a:rPr sz="1800" b="0" i="1">
+                <a:solidFill>
+                  <a:srgbClr val="F2EFE6"/>
+                </a:solidFill>
+                <a:latin typeface="Segoe UI"/>
+              </a:rPr>
+              <a:t>Not merely a law-and-order problem. Lost harvests. Interrupted schooling. A generation growing up distrustful of the state.</a:t>
             </a:r>
           </a:p>
         </p:txBody>
@@ -3945,8 +3668,8 @@
         </p:nvSpPr>
         <p:spPr>
           <a:xfrm>
-            <a:off x="822960" y="2377440"/>
-            <a:ext cx="9509760" cy="1188720"/>
+            <a:off x="822960" y="5806440"/>
+            <a:ext cx="9509760" cy="685800"/>
           </a:xfrm>
           <a:prstGeom prst="rect">
             <a:avLst/>
@@ -3961,83 +3684,13 @@
           <a:p>
             <a:pPr algn="ctr"/>
             <a:r>
-              <a:rPr sz="1500" b="0" i="0">
-                <a:solidFill>
-                  <a:srgbClr val="F2EFE6"/>
-                </a:solidFill>
-                <a:latin typeface="Segoe UI"/>
-              </a:rPr>
-              <a:t>Answers five questions continuously: where is the threat, who is responsible, what is their capability, what will they do next, what resource responds fastest.</a:t>
-            </a:r>
-          </a:p>
-        </p:txBody>
-      </p:sp>
-      <p:sp>
-        <p:nvSpPr>
-          <p:cNvPr id="6" name="TextBox 5"/>
-          <p:cNvSpPr txBox="1"/>
-          <p:nvPr/>
-        </p:nvSpPr>
-        <p:spPr>
-          <a:xfrm>
-            <a:off x="822960" y="3657600"/>
-            <a:ext cx="9509760" cy="548640"/>
-          </a:xfrm>
-          <a:prstGeom prst="rect">
-            <a:avLst/>
-          </a:prstGeom>
-          <a:noFill/>
-        </p:spPr>
-        <p:txBody>
-          <a:bodyPr wrap="square">
-            <a:spAutoFit/>
-          </a:bodyPr>
-          <a:lstStyle/>
-          <a:p>
-            <a:pPr algn="ctr"/>
-            <a:r>
               <a:rPr sz="1500" b="1" i="0">
                 <a:solidFill>
-                  <a:srgbClr val="2FD8C9"/>
-                </a:solidFill>
-                <a:latin typeface="Segoe UI"/>
-              </a:rPr>
-              <a:t>Precedents: UK JTAC · US NCTC · India's MAC (post-2008 Mumbai)</a:t>
-            </a:r>
-          </a:p>
-        </p:txBody>
-      </p:sp>
-      <p:sp>
-        <p:nvSpPr>
-          <p:cNvPr id="7" name="TextBox 6"/>
-          <p:cNvSpPr txBox="1"/>
-          <p:nvPr/>
-        </p:nvSpPr>
-        <p:spPr>
-          <a:xfrm>
-            <a:off x="822960" y="5806440"/>
-            <a:ext cx="9509760" cy="685800"/>
-          </a:xfrm>
-          <a:prstGeom prst="rect">
-            <a:avLst/>
-          </a:prstGeom>
-          <a:noFill/>
-        </p:spPr>
-        <p:txBody>
-          <a:bodyPr wrap="square">
-            <a:spAutoFit/>
-          </a:bodyPr>
-          <a:lstStyle/>
-          <a:p>
-            <a:pPr algn="ctr"/>
-            <a:r>
-              <a:rPr sz="1500" b="1" i="0">
-                <a:solidFill>
                   <a:srgbClr val="C9A24B"/>
                 </a:solidFill>
                 <a:latin typeface="Segoe UI"/>
               </a:rPr>
-              <a:t>SAY: Fragmented agencies, however capable, lose to threats that move faster than their information.</a:t>
+              <a:t>SAY: Say it plainly: we are losing a generation, not just a security statistic.</a:t>
             </a:r>
           </a:p>
         </p:txBody>
@@ -4098,7 +3751,7 @@
                 </a:solidFill>
                 <a:latin typeface="Segoe UI"/>
               </a:rPr>
-              <a:t>12 / 21</a:t>
+              <a:t>12 / 23</a:t>
             </a:r>
           </a:p>
         </p:txBody>
@@ -4133,7 +3786,7 @@
                 </a:solidFill>
                 <a:latin typeface="Segoe UI"/>
               </a:rPr>
-              <a:t>NEW SECURITY ARCHITECTURE · PART 3</a:t>
+              <a:t>NEW SECURITY ARCHITECTURE · PART 1</a:t>
             </a:r>
           </a:p>
         </p:txBody>
@@ -4162,27 +3815,341 @@
           <a:p>
             <a:pPr algn="ctr"/>
             <a:r>
-              <a:rPr sz="2200" b="1" i="0">
+              <a:rPr sz="3200" b="1" i="0">
                 <a:solidFill>
                   <a:srgbClr val="2FD8C9"/>
                 </a:solidFill>
                 <a:latin typeface="Segoe UI"/>
               </a:rPr>
-              <a:t>Community Early Warning &amp; Early Response Network</a:t>
-            </a:r>
-          </a:p>
-        </p:txBody>
-      </p:sp>
-      <p:sp>
-        <p:nvSpPr>
-          <p:cNvPr id="5" name="TextBox 4"/>
+              <a:t>One Threat Picture</a:t>
+            </a:r>
+          </a:p>
+        </p:txBody>
+      </p:sp>
+      <p:graphicFrame>
+        <p:nvGraphicFramePr>
+          <p:cNvPr id="5" name="Table 4"/>
+          <p:cNvGraphicFramePr>
+            <a:graphicFrameLocks noGrp="1"/>
+          </p:cNvGraphicFramePr>
+          <p:nvPr/>
+        </p:nvGraphicFramePr>
+        <p:xfrm>
+          <a:off x="731520" y="2286000"/>
+          <a:ext cx="9692639" cy="2743200"/>
+        </p:xfrm>
+        <a:graphic>
+          <a:graphicData uri="http://schemas.openxmlformats.org/drawingml/2006/table">
+            <a:tbl>
+              <a:tblPr firstRow="1" bandRow="1">
+                <a:tableStyleId>{5C22544A-7EE6-4342-B048-85BDC9FD1C3A}</a:tableStyleId>
+              </a:tblPr>
+              <a:tblGrid>
+                <a:gridCol w="2643447"/>
+                <a:gridCol w="7049192"/>
+              </a:tblGrid>
+              <a:tr h="457200">
+                <a:tc>
+                  <a:txBody>
+                    <a:bodyPr/>
+                    <a:lstStyle/>
+                    <a:p>
+                      <a:pPr algn="ctr"/>
+                      <a:r>
+                        <a:rPr b="1" sz="1100">
+                          <a:solidFill>
+                            <a:srgbClr val="C9A24B"/>
+                          </a:solidFill>
+                          <a:latin typeface="Segoe UI"/>
+                        </a:rPr>
+                        <a:t>Discipline</a:t>
+                      </a:r>
+                    </a:p>
+                  </a:txBody>
+                  <a:tcPr>
+                    <a:solidFill>
+                      <a:srgbClr val="1B3A2B"/>
+                    </a:solidFill>
+                  </a:tcPr>
+                </a:tc>
+                <a:tc>
+                  <a:txBody>
+                    <a:bodyPr/>
+                    <a:lstStyle/>
+                    <a:p>
+                      <a:pPr algn="ctr"/>
+                      <a:r>
+                        <a:rPr b="1" sz="1100">
+                          <a:solidFill>
+                            <a:srgbClr val="C9A24B"/>
+                          </a:solidFill>
+                          <a:latin typeface="Segoe UI"/>
+                        </a:rPr>
+                        <a:t>Action</a:t>
+                      </a:r>
+                    </a:p>
+                  </a:txBody>
+                  <a:tcPr>
+                    <a:solidFill>
+                      <a:srgbClr val="1B3A2B"/>
+                    </a:solidFill>
+                  </a:tcPr>
+                </a:tc>
+              </a:tr>
+              <a:tr h="457200">
+                <a:tc>
+                  <a:txBody>
+                    <a:bodyPr/>
+                    <a:lstStyle/>
+                    <a:p>
+                      <a:pPr algn="l"/>
+                      <a:r>
+                        <a:rPr sz="1000">
+                          <a:solidFill>
+                            <a:srgbClr val="F2EFE6"/>
+                          </a:solidFill>
+                          <a:latin typeface="Segoe UI"/>
+                        </a:rPr>
+                        <a:t>SEE</a:t>
+                      </a:r>
+                    </a:p>
+                  </a:txBody>
+                  <a:tcPr>
+                    <a:solidFill>
+                      <a:srgbClr val="16241C"/>
+                    </a:solidFill>
+                  </a:tcPr>
+                </a:tc>
+                <a:tc>
+                  <a:txBody>
+                    <a:bodyPr/>
+                    <a:lstStyle/>
+                    <a:p>
+                      <a:pPr algn="l"/>
+                      <a:r>
+                        <a:rPr sz="1000">
+                          <a:solidFill>
+                            <a:srgbClr val="F2EFE6"/>
+                          </a:solidFill>
+                          <a:latin typeface="Segoe UI"/>
+                        </a:rPr>
+                        <a:t>Collect information</a:t>
+                      </a:r>
+                    </a:p>
+                  </a:txBody>
+                  <a:tcPr>
+                    <a:solidFill>
+                      <a:srgbClr val="16241C"/>
+                    </a:solidFill>
+                  </a:tcPr>
+                </a:tc>
+              </a:tr>
+              <a:tr h="457200">
+                <a:tc>
+                  <a:txBody>
+                    <a:bodyPr/>
+                    <a:lstStyle/>
+                    <a:p>
+                      <a:pPr algn="l"/>
+                      <a:r>
+                        <a:rPr sz="1000">
+                          <a:solidFill>
+                            <a:srgbClr val="F2EFE6"/>
+                          </a:solidFill>
+                          <a:latin typeface="Segoe UI"/>
+                        </a:rPr>
+                        <a:t>SHARE</a:t>
+                      </a:r>
+                    </a:p>
+                  </a:txBody>
+                  <a:tcPr>
+                    <a:solidFill>
+                      <a:srgbClr val="16241C"/>
+                    </a:solidFill>
+                  </a:tcPr>
+                </a:tc>
+                <a:tc>
+                  <a:txBody>
+                    <a:bodyPr/>
+                    <a:lstStyle/>
+                    <a:p>
+                      <a:pPr algn="l"/>
+                      <a:r>
+                        <a:rPr sz="1000">
+                          <a:solidFill>
+                            <a:srgbClr val="F2EFE6"/>
+                          </a:solidFill>
+                          <a:latin typeface="Segoe UI"/>
+                        </a:rPr>
+                        <a:t>Move it fast to who needs it</a:t>
+                      </a:r>
+                    </a:p>
+                  </a:txBody>
+                  <a:tcPr>
+                    <a:solidFill>
+                      <a:srgbClr val="16241C"/>
+                    </a:solidFill>
+                  </a:tcPr>
+                </a:tc>
+              </a:tr>
+              <a:tr h="457200">
+                <a:tc>
+                  <a:txBody>
+                    <a:bodyPr/>
+                    <a:lstStyle/>
+                    <a:p>
+                      <a:pPr algn="l"/>
+                      <a:r>
+                        <a:rPr sz="1000">
+                          <a:solidFill>
+                            <a:srgbClr val="F2EFE6"/>
+                          </a:solidFill>
+                          <a:latin typeface="Segoe UI"/>
+                        </a:rPr>
+                        <a:t>DECIDE</a:t>
+                      </a:r>
+                    </a:p>
+                  </a:txBody>
+                  <a:tcPr>
+                    <a:solidFill>
+                      <a:srgbClr val="16241C"/>
+                    </a:solidFill>
+                  </a:tcPr>
+                </a:tc>
+                <a:tc>
+                  <a:txBody>
+                    <a:bodyPr/>
+                    <a:lstStyle/>
+                    <a:p>
+                      <a:pPr algn="l"/>
+                      <a:r>
+                        <a:rPr sz="1000">
+                          <a:solidFill>
+                            <a:srgbClr val="F2EFE6"/>
+                          </a:solidFill>
+                          <a:latin typeface="Segoe UI"/>
+                        </a:rPr>
+                        <a:t>Clear command &amp; responsibility</a:t>
+                      </a:r>
+                    </a:p>
+                  </a:txBody>
+                  <a:tcPr>
+                    <a:solidFill>
+                      <a:srgbClr val="16241C"/>
+                    </a:solidFill>
+                  </a:tcPr>
+                </a:tc>
+              </a:tr>
+              <a:tr h="457200">
+                <a:tc>
+                  <a:txBody>
+                    <a:bodyPr/>
+                    <a:lstStyle/>
+                    <a:p>
+                      <a:pPr algn="l"/>
+                      <a:r>
+                        <a:rPr sz="1000">
+                          <a:solidFill>
+                            <a:srgbClr val="F2EFE6"/>
+                          </a:solidFill>
+                          <a:latin typeface="Segoe UI"/>
+                        </a:rPr>
+                        <a:t>ACT</a:t>
+                      </a:r>
+                    </a:p>
+                  </a:txBody>
+                  <a:tcPr>
+                    <a:solidFill>
+                      <a:srgbClr val="16241C"/>
+                    </a:solidFill>
+                  </a:tcPr>
+                </a:tc>
+                <a:tc>
+                  <a:txBody>
+                    <a:bodyPr/>
+                    <a:lstStyle/>
+                    <a:p>
+                      <a:pPr algn="l"/>
+                      <a:r>
+                        <a:rPr sz="1000">
+                          <a:solidFill>
+                            <a:srgbClr val="F2EFE6"/>
+                          </a:solidFill>
+                          <a:latin typeface="Segoe UI"/>
+                        </a:rPr>
+                        <a:t>Respond fast &amp; proportionately</a:t>
+                      </a:r>
+                    </a:p>
+                  </a:txBody>
+                  <a:tcPr>
+                    <a:solidFill>
+                      <a:srgbClr val="16241C"/>
+                    </a:solidFill>
+                  </a:tcPr>
+                </a:tc>
+              </a:tr>
+              <a:tr h="457200">
+                <a:tc>
+                  <a:txBody>
+                    <a:bodyPr/>
+                    <a:lstStyle/>
+                    <a:p>
+                      <a:pPr algn="l"/>
+                      <a:r>
+                        <a:rPr sz="1000">
+                          <a:solidFill>
+                            <a:srgbClr val="F2EFE6"/>
+                          </a:solidFill>
+                          <a:latin typeface="Segoe UI"/>
+                        </a:rPr>
+                        <a:t>LEARN</a:t>
+                      </a:r>
+                    </a:p>
+                  </a:txBody>
+                  <a:tcPr>
+                    <a:solidFill>
+                      <a:srgbClr val="16241C"/>
+                    </a:solidFill>
+                  </a:tcPr>
+                </a:tc>
+                <a:tc>
+                  <a:txBody>
+                    <a:bodyPr/>
+                    <a:lstStyle/>
+                    <a:p>
+                      <a:pPr algn="l"/>
+                      <a:r>
+                        <a:rPr sz="1000">
+                          <a:solidFill>
+                            <a:srgbClr val="F2EFE6"/>
+                          </a:solidFill>
+                          <a:latin typeface="Segoe UI"/>
+                        </a:rPr>
+                        <a:t>Prevent repetition</a:t>
+                      </a:r>
+                    </a:p>
+                  </a:txBody>
+                  <a:tcPr>
+                    <a:solidFill>
+                      <a:srgbClr val="16241C"/>
+                    </a:solidFill>
+                  </a:tcPr>
+                </a:tc>
+              </a:tr>
+            </a:tbl>
+          </a:graphicData>
+        </a:graphic>
+      </p:graphicFrame>
+      <p:sp>
+        <p:nvSpPr>
+          <p:cNvPr id="6" name="TextBox 5"/>
           <p:cNvSpPr txBox="1"/>
           <p:nvPr/>
         </p:nvSpPr>
         <p:spPr>
           <a:xfrm>
-            <a:off x="822960" y="2468880"/>
-            <a:ext cx="9509760" cy="1280160"/>
+            <a:off x="822960" y="5806440"/>
+            <a:ext cx="9509760" cy="685800"/>
           </a:xfrm>
           <a:prstGeom prst="rect">
             <a:avLst/>
@@ -4197,83 +4164,13 @@
           <a:p>
             <a:pPr algn="ctr"/>
             <a:r>
-              <a:rPr sz="1500" b="0" i="0">
-                <a:solidFill>
-                  <a:srgbClr val="F2EFE6"/>
-                </a:solidFill>
-                <a:latin typeface="Segoe UI"/>
-              </a:rPr>
-              <a:t>Farmers, hunters, teachers, traditional rulers, transporters, market women see things no satellite or patrol ever will. A disciplined, legally-governed network — not a vigilante system.</a:t>
-            </a:r>
-          </a:p>
-        </p:txBody>
-      </p:sp>
-      <p:sp>
-        <p:nvSpPr>
-          <p:cNvPr id="6" name="TextBox 5"/>
-          <p:cNvSpPr txBox="1"/>
-          <p:nvPr/>
-        </p:nvSpPr>
-        <p:spPr>
-          <a:xfrm>
-            <a:off x="822960" y="3794760"/>
-            <a:ext cx="9509760" cy="548640"/>
-          </a:xfrm>
-          <a:prstGeom prst="rect">
-            <a:avLst/>
-          </a:prstGeom>
-          <a:noFill/>
-        </p:spPr>
-        <p:txBody>
-          <a:bodyPr wrap="square">
-            <a:spAutoFit/>
-          </a:bodyPr>
-          <a:lstStyle/>
-          <a:p>
-            <a:pPr algn="ctr"/>
-            <a:r>
               <a:rPr sz="1500" b="1" i="0">
                 <a:solidFill>
-                  <a:srgbClr val="2FD8C9"/>
-                </a:solidFill>
-                <a:latin typeface="Segoe UI"/>
-              </a:rPr>
-              <a:t>Precedents: Kenya's Nyumba Kumi · Philippines' Barangay Peacekeeping</a:t>
-            </a:r>
-          </a:p>
-        </p:txBody>
-      </p:sp>
-      <p:sp>
-        <p:nvSpPr>
-          <p:cNvPr id="7" name="TextBox 6"/>
-          <p:cNvSpPr txBox="1"/>
-          <p:nvPr/>
-        </p:nvSpPr>
-        <p:spPr>
-          <a:xfrm>
-            <a:off x="822960" y="5806440"/>
-            <a:ext cx="9509760" cy="685800"/>
-          </a:xfrm>
-          <a:prstGeom prst="rect">
-            <a:avLst/>
-          </a:prstGeom>
-          <a:noFill/>
-        </p:spPr>
-        <p:txBody>
-          <a:bodyPr wrap="square">
-            <a:spAutoFit/>
-          </a:bodyPr>
-          <a:lstStyle/>
-          <a:p>
-            <a:pPr algn="ctr"/>
-            <a:r>
-              <a:rPr sz="1500" b="1" i="0">
-                <a:solidFill>
                   <a:srgbClr val="C9A24B"/>
                 </a:solidFill>
                 <a:latin typeface="Segoe UI"/>
               </a:rPr>
-              <a:t>SAY: Formal, well-governed community structures outperform informal vigilantism on accuracy and accountability.</a:t>
+              <a:t>SAY: No single agency can do everything — together, fused, our agencies can know almost everything that matters.</a:t>
             </a:r>
           </a:p>
         </p:txBody>
@@ -4334,7 +4231,7 @@
                 </a:solidFill>
                 <a:latin typeface="Segoe UI"/>
               </a:rPr>
-              <a:t>13 / 21</a:t>
+              <a:t>13 / 23</a:t>
             </a:r>
           </a:p>
         </p:txBody>
@@ -4369,7 +4266,7 @@
                 </a:solidFill>
                 <a:latin typeface="Segoe UI"/>
               </a:rPr>
-              <a:t>NEW SECURITY ARCHITECTURE · PART 4</a:t>
+              <a:t>NEW SECURITY ARCHITECTURE · PART 2</a:t>
             </a:r>
           </a:p>
         </p:txBody>
@@ -4398,13 +4295,13 @@
           <a:p>
             <a:pPr algn="ctr"/>
             <a:r>
-              <a:rPr sz="2400" b="1" i="0">
+              <a:rPr sz="2600" b="1" i="0">
                 <a:solidFill>
                   <a:srgbClr val="2FD8C9"/>
                 </a:solidFill>
                 <a:latin typeface="Segoe UI"/>
               </a:rPr>
-              <a:t>Traditional Rulers in the Security Architecture</a:t>
+              <a:t>Regional Security Intelligence &amp; Fusion Centre</a:t>
             </a:r>
           </a:p>
         </p:txBody>
@@ -4417,8 +4314,8 @@
         </p:nvSpPr>
         <p:spPr>
           <a:xfrm>
-            <a:off x="822960" y="2743200"/>
-            <a:ext cx="9509760" cy="914400"/>
+            <a:off x="822960" y="2377440"/>
+            <a:ext cx="9509760" cy="1188720"/>
           </a:xfrm>
           <a:prstGeom prst="rect">
             <a:avLst/>
@@ -4433,13 +4330,13 @@
           <a:p>
             <a:pPr algn="ctr"/>
             <a:r>
-              <a:rPr sz="1600" b="1" i="0">
+              <a:rPr sz="1500" b="0" i="0">
                 <a:solidFill>
                   <a:srgbClr val="F2EFE6"/>
                 </a:solidFill>
                 <a:latin typeface="Segoe UI"/>
               </a:rPr>
-              <a:t>Traditional Council  →  Police/DSS  →  Military Liaison  →  Local Govt  →  Community Reps</a:t>
+              <a:t>Answers five questions continuously: where is the threat, who is responsible, what is their capability, what will they do next, what resource responds fastest.</a:t>
             </a:r>
           </a:p>
         </p:txBody>
@@ -4452,8 +4349,8 @@
         </p:nvSpPr>
         <p:spPr>
           <a:xfrm>
-            <a:off x="822960" y="5806440"/>
-            <a:ext cx="9509760" cy="685800"/>
+            <a:off x="822960" y="3657600"/>
+            <a:ext cx="9509760" cy="548640"/>
           </a:xfrm>
           <a:prstGeom prst="rect">
             <a:avLst/>
@@ -4470,11 +4367,46 @@
             <a:r>
               <a:rPr sz="1500" b="1" i="0">
                 <a:solidFill>
+                  <a:srgbClr val="2FD8C9"/>
+                </a:solidFill>
+                <a:latin typeface="Segoe UI"/>
+              </a:rPr>
+              <a:t>Precedents: UK JTAC · US NCTC · India's MAC (post-2008 Mumbai)</a:t>
+            </a:r>
+          </a:p>
+        </p:txBody>
+      </p:sp>
+      <p:sp>
+        <p:nvSpPr>
+          <p:cNvPr id="7" name="TextBox 6"/>
+          <p:cNvSpPr txBox="1"/>
+          <p:nvPr/>
+        </p:nvSpPr>
+        <p:spPr>
+          <a:xfrm>
+            <a:off x="822960" y="5806440"/>
+            <a:ext cx="9509760" cy="685800"/>
+          </a:xfrm>
+          <a:prstGeom prst="rect">
+            <a:avLst/>
+          </a:prstGeom>
+          <a:noFill/>
+        </p:spPr>
+        <p:txBody>
+          <a:bodyPr wrap="square">
+            <a:spAutoFit/>
+          </a:bodyPr>
+          <a:lstStyle/>
+          <a:p>
+            <a:pPr algn="ctr"/>
+            <a:r>
+              <a:rPr sz="1500" b="1" i="0">
+                <a:solidFill>
                   <a:srgbClr val="C9A24B"/>
                 </a:solidFill>
                 <a:latin typeface="Segoe UI"/>
               </a:rPr>
-              <a:t>SAY: Today rulers are consulted mostly after violence — a standing table, not an emergency meeting.</a:t>
+              <a:t>SAY: Fragmented agencies, however capable, lose to threats that move faster than their information.</a:t>
             </a:r>
           </a:p>
         </p:txBody>
@@ -4535,7 +4467,7 @@
                 </a:solidFill>
                 <a:latin typeface="Segoe UI"/>
               </a:rPr>
-              <a:t>14 / 21</a:t>
+              <a:t>14 / 23</a:t>
             </a:r>
           </a:p>
         </p:txBody>
@@ -4570,7 +4502,7 @@
                 </a:solidFill>
                 <a:latin typeface="Segoe UI"/>
               </a:rPr>
-              <a:t>NEW SECURITY ARCHITECTURE · PART 5</a:t>
+              <a:t>NEW SECURITY ARCHITECTURE · PART 3</a:t>
             </a:r>
           </a:p>
         </p:txBody>
@@ -4605,7 +4537,7 @@
                 </a:solidFill>
                 <a:latin typeface="Segoe UI"/>
               </a:rPr>
-              <a:t>Security Corridors, Not Administrative Boundaries</a:t>
+              <a:t>Community Early Warning &amp; Early Response Network</a:t>
             </a:r>
           </a:p>
         </p:txBody>
@@ -4618,8 +4550,8 @@
         </p:nvSpPr>
         <p:spPr>
           <a:xfrm>
-            <a:off x="822960" y="2560320"/>
-            <a:ext cx="9509760" cy="1371600"/>
+            <a:off x="822960" y="2468880"/>
+            <a:ext cx="9509760" cy="1280160"/>
           </a:xfrm>
           <a:prstGeom prst="rect">
             <a:avLst/>
@@ -4640,7 +4572,7 @@
                 </a:solidFill>
                 <a:latin typeface="Segoe UI"/>
               </a:rPr>
-              <a:t>Kwara-Niger-Kainji · Niger-Kaduna-FCT · Benue-Nasarawa · Benue-Taraba · Plateau-Bauchi · Kogi-Nasarawa-Benue — the actual routes threats move today.</a:t>
+              <a:t>Farmers, hunters, teachers, traditional rulers, transporters, market women see things no satellite or patrol ever will. A disciplined, legally-governed network — not a vigilante system.</a:t>
             </a:r>
           </a:p>
         </p:txBody>
@@ -4653,8 +4585,8 @@
         </p:nvSpPr>
         <p:spPr>
           <a:xfrm>
-            <a:off x="822960" y="5806440"/>
-            <a:ext cx="9509760" cy="685800"/>
+            <a:off x="822960" y="3794760"/>
+            <a:ext cx="9509760" cy="548640"/>
           </a:xfrm>
           <a:prstGeom prst="rect">
             <a:avLst/>
@@ -4671,11 +4603,46 @@
             <a:r>
               <a:rPr sz="1500" b="1" i="0">
                 <a:solidFill>
+                  <a:srgbClr val="2FD8C9"/>
+                </a:solidFill>
+                <a:latin typeface="Segoe UI"/>
+              </a:rPr>
+              <a:t>Precedents: Kenya's Nyumba Kumi · Philippines' Barangay Peacekeeping</a:t>
+            </a:r>
+          </a:p>
+        </p:txBody>
+      </p:sp>
+      <p:sp>
+        <p:nvSpPr>
+          <p:cNvPr id="7" name="TextBox 6"/>
+          <p:cNvSpPr txBox="1"/>
+          <p:nvPr/>
+        </p:nvSpPr>
+        <p:spPr>
+          <a:xfrm>
+            <a:off x="822960" y="5806440"/>
+            <a:ext cx="9509760" cy="685800"/>
+          </a:xfrm>
+          <a:prstGeom prst="rect">
+            <a:avLst/>
+          </a:prstGeom>
+          <a:noFill/>
+        </p:spPr>
+        <p:txBody>
+          <a:bodyPr wrap="square">
+            <a:spAutoFit/>
+          </a:bodyPr>
+          <a:lstStyle/>
+          <a:p>
+            <a:pPr algn="ctr"/>
+            <a:r>
+              <a:rPr sz="1500" b="1" i="0">
+                <a:solidFill>
                   <a:srgbClr val="C9A24B"/>
                 </a:solidFill>
                 <a:latin typeface="Segoe UI"/>
               </a:rPr>
-              <a:t>SAY: Governors agreed on joint corridor operations in 2025. The next step is institutionalisation.</a:t>
+              <a:t>SAY: Formal, well-governed community structures outperform informal vigilantism on accuracy and accountability.</a:t>
             </a:r>
           </a:p>
         </p:txBody>
@@ -4736,7 +4703,7 @@
                 </a:solidFill>
                 <a:latin typeface="Segoe UI"/>
               </a:rPr>
-              <a:t>15 / 21</a:t>
+              <a:t>15 / 23</a:t>
             </a:r>
           </a:p>
         </p:txBody>
@@ -4771,7 +4738,7 @@
                 </a:solidFill>
                 <a:latin typeface="Segoe UI"/>
               </a:rPr>
-              <a:t>NEW SECURITY ARCHITECTURE · PART 6</a:t>
+              <a:t>NEW SECURITY ARCHITECTURE · PART 4</a:t>
             </a:r>
           </a:p>
         </p:txBody>
@@ -4806,7 +4773,7 @@
                 </a:solidFill>
                 <a:latin typeface="Segoe UI"/>
               </a:rPr>
-              <a:t>Rapid Response: The 30-60 Minute Window</a:t>
+              <a:t>Traditional Rulers in the Security Architecture</a:t>
             </a:r>
           </a:p>
         </p:txBody>
@@ -4819,8 +4786,8 @@
         </p:nvSpPr>
         <p:spPr>
           <a:xfrm>
-            <a:off x="822960" y="2560320"/>
-            <a:ext cx="9509760" cy="1371600"/>
+            <a:off x="822960" y="2743200"/>
+            <a:ext cx="9509760" cy="914400"/>
           </a:xfrm>
           <a:prstGeom prst="rect">
             <a:avLst/>
@@ -4835,13 +4802,13 @@
           <a:p>
             <a:pPr algn="ctr"/>
             <a:r>
-              <a:rPr sz="1600" b="0" i="0">
+              <a:rPr sz="1600" b="1" i="0">
                 <a:solidFill>
                   <a:srgbClr val="F2EFE6"/>
                 </a:solidFill>
                 <a:latin typeface="Segoe UI"/>
               </a:rPr>
-              <a:t>Police rapid response units, military QRF, mobile teams, medical evacuation, aviation support, community liaison — all pre-positioned, not reactive.</a:t>
+              <a:t>Traditional Council  →  Police/DSS  →  Military Liaison  →  Local Govt  →  Community Reps</a:t>
             </a:r>
           </a:p>
         </p:txBody>
@@ -4876,7 +4843,7 @@
                 </a:solidFill>
                 <a:latin typeface="Segoe UI"/>
               </a:rPr>
-              <a:t>SAY: Israel's civil defence doctrine proves what a well-rehearsed short window achieves.</a:t>
+              <a:t>SAY: Today rulers are consulted mostly after violence — a standing table, not an emergency meeting.</a:t>
             </a:r>
           </a:p>
         </p:txBody>
@@ -4937,7 +4904,7 @@
                 </a:solidFill>
                 <a:latin typeface="Segoe UI"/>
               </a:rPr>
-              <a:t>16 / 21</a:t>
+              <a:t>16 / 23</a:t>
             </a:r>
           </a:p>
         </p:txBody>
@@ -4968,11 +4935,11 @@
             <a:r>
               <a:rPr sz="1300" b="0" i="0">
                 <a:solidFill>
-                  <a:srgbClr val="9FBFA9"/>
-                </a:solidFill>
-                <a:latin typeface="Segoe UI"/>
-              </a:rPr>
-              <a:t>THE SOLUTION · BOTTOM-UP SECURITY ARCHITECTURE</a:t>
+                  <a:srgbClr val="2FD8C9"/>
+                </a:solidFill>
+                <a:latin typeface="Segoe UI"/>
+              </a:rPr>
+              <a:t>NEW SECURITY ARCHITECTURE · PART 5</a:t>
             </a:r>
           </a:p>
         </p:txBody>
@@ -5001,13 +4968,13 @@
           <a:p>
             <a:pPr algn="ctr"/>
             <a:r>
-              <a:rPr sz="2600" b="1" i="0">
-                <a:solidFill>
-                  <a:srgbClr val="C9A24B"/>
-                </a:solidFill>
-                <a:latin typeface="Segoe UI"/>
-              </a:rPr>
-              <a:t>Financially Autonomous Local Governments</a:t>
+              <a:rPr sz="2200" b="1" i="0">
+                <a:solidFill>
+                  <a:srgbClr val="2FD8C9"/>
+                </a:solidFill>
+                <a:latin typeface="Segoe UI"/>
+              </a:rPr>
+              <a:t>Security Corridors, Not Administrative Boundaries</a:t>
             </a:r>
           </a:p>
         </p:txBody>
@@ -5020,8 +4987,8 @@
         </p:nvSpPr>
         <p:spPr>
           <a:xfrm>
-            <a:off x="822960" y="2743200"/>
-            <a:ext cx="9509760" cy="914400"/>
+            <a:off x="822960" y="2560320"/>
+            <a:ext cx="9509760" cy="1371600"/>
           </a:xfrm>
           <a:prstGeom prst="rect">
             <a:avLst/>
@@ -5036,13 +5003,13 @@
           <a:p>
             <a:pPr algn="ctr"/>
             <a:r>
-              <a:rPr sz="1700" b="1" i="0">
+              <a:rPr sz="1500" b="0" i="0">
                 <a:solidFill>
                   <a:srgbClr val="F2EFE6"/>
                 </a:solidFill>
                 <a:latin typeface="Segoe UI"/>
               </a:rPr>
-              <a:t>Federal  →  State  →  Accountable LG  →  Community  →  Security</a:t>
+              <a:t>Kwara-Niger-Kainji · Niger-Kaduna-FCT · Benue-Nasarawa · Benue-Taraba · Plateau-Bauchi · Kogi-Nasarawa-Benue — the actual routes threats move today.</a:t>
             </a:r>
           </a:p>
         </p:txBody>
@@ -5077,7 +5044,7 @@
                 </a:solidFill>
                 <a:latin typeface="Segoe UI"/>
               </a:rPr>
-              <a:t>SAY: Push power and money down to the LG — that's where the threat actually lives.</a:t>
+              <a:t>SAY: Governors agreed on joint corridor operations in 2025. The next step is institutionalisation.</a:t>
             </a:r>
           </a:p>
         </p:txBody>
@@ -5138,7 +5105,7 @@
                 </a:solidFill>
                 <a:latin typeface="Segoe UI"/>
               </a:rPr>
-              <a:t>17 / 21</a:t>
+              <a:t>17 / 23</a:t>
             </a:r>
           </a:p>
         </p:txBody>
@@ -5169,11 +5136,11 @@
             <a:r>
               <a:rPr sz="1300" b="0" i="0">
                 <a:solidFill>
-                  <a:srgbClr val="9FBFA9"/>
-                </a:solidFill>
-                <a:latin typeface="Segoe UI"/>
-              </a:rPr>
-              <a:t>THE FORMULA</a:t>
+                  <a:srgbClr val="2FD8C9"/>
+                </a:solidFill>
+                <a:latin typeface="Segoe UI"/>
+              </a:rPr>
+              <a:t>NEW SECURITY ARCHITECTURE · PART 6</a:t>
             </a:r>
           </a:p>
         </p:txBody>
@@ -5186,8 +5153,8 @@
         </p:nvSpPr>
         <p:spPr>
           <a:xfrm>
-            <a:off x="822960" y="2286000"/>
-            <a:ext cx="9509760" cy="1371600"/>
+            <a:off x="640080" y="1417320"/>
+            <a:ext cx="9875520" cy="914400"/>
           </a:xfrm>
           <a:prstGeom prst="rect">
             <a:avLst/>
@@ -5202,13 +5169,13 @@
           <a:p>
             <a:pPr algn="ctr"/>
             <a:r>
-              <a:rPr sz="1800" b="1" i="0">
-                <a:solidFill>
-                  <a:srgbClr val="C9A24B"/>
-                </a:solidFill>
-                <a:latin typeface="Segoe UI"/>
-              </a:rPr>
-              <a:t>Financial Autonomy + Accountability + Local Intelligence + Responsive Governance + Professional Coordination</a:t>
+              <a:rPr sz="2400" b="1" i="0">
+                <a:solidFill>
+                  <a:srgbClr val="2FD8C9"/>
+                </a:solidFill>
+                <a:latin typeface="Segoe UI"/>
+              </a:rPr>
+              <a:t>Rapid Response: The 30-60 Minute Window</a:t>
             </a:r>
           </a:p>
         </p:txBody>
@@ -5221,8 +5188,8 @@
         </p:nvSpPr>
         <p:spPr>
           <a:xfrm>
-            <a:off x="822960" y="3749039"/>
-            <a:ext cx="9509760" cy="640080"/>
+            <a:off x="822960" y="2560320"/>
+            <a:ext cx="9509760" cy="1371600"/>
           </a:xfrm>
           <a:prstGeom prst="rect">
             <a:avLst/>
@@ -5237,13 +5204,13 @@
           <a:p>
             <a:pPr algn="ctr"/>
             <a:r>
-              <a:rPr sz="2200" b="1" i="0">
-                <a:solidFill>
-                  <a:srgbClr val="C9A24B"/>
-                </a:solidFill>
-                <a:latin typeface="Segoe UI"/>
-              </a:rPr>
-              <a:t>= Stronger Grassroots Security</a:t>
+              <a:rPr sz="1600" b="0" i="0">
+                <a:solidFill>
+                  <a:srgbClr val="F2EFE6"/>
+                </a:solidFill>
+                <a:latin typeface="Segoe UI"/>
+              </a:rPr>
+              <a:t>Police rapid response units, military QRF, mobile teams, medical evacuation, aviation support, community liaison — all pre-positioned, not reactive.</a:t>
             </a:r>
           </a:p>
         </p:txBody>
@@ -5278,7 +5245,7 @@
                 </a:solidFill>
                 <a:latin typeface="Segoe UI"/>
               </a:rPr>
-              <a:t>SAY: Autonomy without audits just decentralises corruption — say this caveat out loud.</a:t>
+              <a:t>SAY: Israel's civil defence doctrine proves what a well-rehearsed short window achieves.</a:t>
             </a:r>
           </a:p>
         </p:txBody>
@@ -5339,7 +5306,7 @@
                 </a:solidFill>
                 <a:latin typeface="Segoe UI"/>
               </a:rPr>
-              <a:t>18 / 21</a:t>
+              <a:t>18 / 23</a:t>
             </a:r>
           </a:p>
         </p:txBody>
@@ -5370,11 +5337,11 @@
             <a:r>
               <a:rPr sz="1300" b="0" i="0">
                 <a:solidFill>
-                  <a:srgbClr val="2FD8C9"/>
-                </a:solidFill>
-                <a:latin typeface="Segoe UI"/>
-              </a:rPr>
-              <a:t>EVALUATION ROADMAP</a:t>
+                  <a:srgbClr val="9FBFA9"/>
+                </a:solidFill>
+                <a:latin typeface="Segoe UI"/>
+              </a:rPr>
+              <a:t>THE SOLUTION · BOTTOM-UP SECURITY ARCHITECTURE</a:t>
             </a:r>
           </a:p>
         </p:txBody>
@@ -5403,409 +5370,27 @@
           <a:p>
             <a:pPr algn="ctr"/>
             <a:r>
-              <a:rPr sz="2400" b="1" i="0">
-                <a:solidFill>
-                  <a:srgbClr val="2FD8C9"/>
-                </a:solidFill>
-                <a:latin typeface="Segoe UI"/>
-              </a:rPr>
-              <a:t>5-Year Metrics &amp; Evaluation Roadmap</a:t>
-            </a:r>
-          </a:p>
-        </p:txBody>
-      </p:sp>
-      <p:graphicFrame>
-        <p:nvGraphicFramePr>
-          <p:cNvPr id="5" name="Table 4"/>
-          <p:cNvGraphicFramePr>
-            <a:graphicFrameLocks noGrp="1"/>
-          </p:cNvGraphicFramePr>
-          <p:nvPr/>
-        </p:nvGraphicFramePr>
-        <p:xfrm>
-          <a:off x="731520" y="2148840"/>
-          <a:ext cx="9692638" cy="3291840"/>
-        </p:xfrm>
-        <a:graphic>
-          <a:graphicData uri="http://schemas.openxmlformats.org/drawingml/2006/table">
-            <a:tbl>
-              <a:tblPr firstRow="1" bandRow="1">
-                <a:tableStyleId>{5C22544A-7EE6-4342-B048-85BDC9FD1C3A}</a:tableStyleId>
-              </a:tblPr>
-              <a:tblGrid>
-                <a:gridCol w="1723136"/>
-                <a:gridCol w="969263"/>
-                <a:gridCol w="7000239"/>
-              </a:tblGrid>
-              <a:tr h="658368">
-                <a:tc>
-                  <a:txBody>
-                    <a:bodyPr/>
-                    <a:lstStyle/>
-                    <a:p>
-                      <a:pPr algn="ctr"/>
-                      <a:r>
-                        <a:rPr b="1" sz="1100">
-                          <a:solidFill>
-                            <a:srgbClr val="C9A24B"/>
-                          </a:solidFill>
-                          <a:latin typeface="Segoe UI"/>
-                        </a:rPr>
-                        <a:t>Phase</a:t>
-                      </a:r>
-                    </a:p>
-                  </a:txBody>
-                  <a:tcPr>
-                    <a:solidFill>
-                      <a:srgbClr val="1B3A2B"/>
-                    </a:solidFill>
-                  </a:tcPr>
-                </a:tc>
-                <a:tc>
-                  <a:txBody>
-                    <a:bodyPr/>
-                    <a:lstStyle/>
-                    <a:p>
-                      <a:pPr algn="ctr"/>
-                      <a:r>
-                        <a:rPr b="1" sz="1100">
-                          <a:solidFill>
-                            <a:srgbClr val="C9A24B"/>
-                          </a:solidFill>
-                          <a:latin typeface="Segoe UI"/>
-                        </a:rPr>
-                        <a:t>Years</a:t>
-                      </a:r>
-                    </a:p>
-                  </a:txBody>
-                  <a:tcPr>
-                    <a:solidFill>
-                      <a:srgbClr val="1B3A2B"/>
-                    </a:solidFill>
-                  </a:tcPr>
-                </a:tc>
-                <a:tc>
-                  <a:txBody>
-                    <a:bodyPr/>
-                    <a:lstStyle/>
-                    <a:p>
-                      <a:pPr algn="ctr"/>
-                      <a:r>
-                        <a:rPr b="1" sz="1100">
-                          <a:solidFill>
-                            <a:srgbClr val="C9A24B"/>
-                          </a:solidFill>
-                          <a:latin typeface="Segoe UI"/>
-                        </a:rPr>
-                        <a:t>Key Evaluation Targets</a:t>
-                      </a:r>
-                    </a:p>
-                  </a:txBody>
-                  <a:tcPr>
-                    <a:solidFill>
-                      <a:srgbClr val="1B3A2B"/>
-                    </a:solidFill>
-                  </a:tcPr>
-                </a:tc>
-              </a:tr>
-              <a:tr h="658368">
-                <a:tc>
-                  <a:txBody>
-                    <a:bodyPr/>
-                    <a:lstStyle/>
-                    <a:p>
-                      <a:pPr algn="l"/>
-                      <a:r>
-                        <a:rPr sz="1000">
-                          <a:solidFill>
-                            <a:srgbClr val="F2EFE6"/>
-                          </a:solidFill>
-                          <a:latin typeface="Segoe UI"/>
-                        </a:rPr>
-                        <a:t>I - Foundation</a:t>
-                      </a:r>
-                    </a:p>
-                  </a:txBody>
-                  <a:tcPr>
-                    <a:solidFill>
-                      <a:srgbClr val="16241C"/>
-                    </a:solidFill>
-                  </a:tcPr>
-                </a:tc>
-                <a:tc>
-                  <a:txBody>
-                    <a:bodyPr/>
-                    <a:lstStyle/>
-                    <a:p>
-                      <a:pPr algn="l"/>
-                      <a:r>
-                        <a:rPr sz="1000">
-                          <a:solidFill>
-                            <a:srgbClr val="F2EFE6"/>
-                          </a:solidFill>
-                          <a:latin typeface="Segoe UI"/>
-                        </a:rPr>
-                        <a:t>1-5</a:t>
-                      </a:r>
-                    </a:p>
-                  </a:txBody>
-                  <a:tcPr>
-                    <a:solidFill>
-                      <a:srgbClr val="16241C"/>
-                    </a:solidFill>
-                  </a:tcPr>
-                </a:tc>
-                <a:tc>
-                  <a:txBody>
-                    <a:bodyPr/>
-                    <a:lstStyle/>
-                    <a:p>
-                      <a:pPr algn="l"/>
-                      <a:r>
-                        <a:rPr sz="1000">
-                          <a:solidFill>
-                            <a:srgbClr val="F2EFE6"/>
-                          </a:solidFill>
-                          <a:latin typeface="Segoe UI"/>
-                        </a:rPr>
-                        <a:t>Fusion Centre in all 7 states/FCT; kidnapping down 30%; Early-Warning Network in 50% of high-risk LGAs; response &lt;90 min</a:t>
-                      </a:r>
-                    </a:p>
-                  </a:txBody>
-                  <a:tcPr>
-                    <a:solidFill>
-                      <a:srgbClr val="16241C"/>
-                    </a:solidFill>
-                  </a:tcPr>
-                </a:tc>
-              </a:tr>
-              <a:tr h="658368">
-                <a:tc>
-                  <a:txBody>
-                    <a:bodyPr/>
-                    <a:lstStyle/>
-                    <a:p>
-                      <a:pPr algn="l"/>
-                      <a:r>
-                        <a:rPr sz="1000">
-                          <a:solidFill>
-                            <a:srgbClr val="F2EFE6"/>
-                          </a:solidFill>
-                          <a:latin typeface="Segoe UI"/>
-                        </a:rPr>
-                        <a:t>II - Consolidation</a:t>
-                      </a:r>
-                    </a:p>
-                  </a:txBody>
-                  <a:tcPr>
-                    <a:solidFill>
-                      <a:srgbClr val="16241C"/>
-                    </a:solidFill>
-                  </a:tcPr>
-                </a:tc>
-                <a:tc>
-                  <a:txBody>
-                    <a:bodyPr/>
-                    <a:lstStyle/>
-                    <a:p>
-                      <a:pPr algn="l"/>
-                      <a:r>
-                        <a:rPr sz="1000">
-                          <a:solidFill>
-                            <a:srgbClr val="F2EFE6"/>
-                          </a:solidFill>
-                          <a:latin typeface="Segoe UI"/>
-                        </a:rPr>
-                        <a:t>6-10</a:t>
-                      </a:r>
-                    </a:p>
-                  </a:txBody>
-                  <a:tcPr>
-                    <a:solidFill>
-                      <a:srgbClr val="16241C"/>
-                    </a:solidFill>
-                  </a:tcPr>
-                </a:tc>
-                <a:tc>
-                  <a:txBody>
-                    <a:bodyPr/>
-                    <a:lstStyle/>
-                    <a:p>
-                      <a:pPr algn="l"/>
-                      <a:r>
-                        <a:rPr sz="1000">
-                          <a:solidFill>
-                            <a:srgbClr val="F2EFE6"/>
-                          </a:solidFill>
-                          <a:latin typeface="Segoe UI"/>
-                        </a:rPr>
-                        <a:t>Kidnapping down 60%; 100% LGAs fused; all 6 corridors institutionalised; return &gt;70%; audit compliance &gt;90%</a:t>
-                      </a:r>
-                    </a:p>
-                  </a:txBody>
-                  <a:tcPr>
-                    <a:solidFill>
-                      <a:srgbClr val="16241C"/>
-                    </a:solidFill>
-                  </a:tcPr>
-                </a:tc>
-              </a:tr>
-              <a:tr h="658368">
-                <a:tc>
-                  <a:txBody>
-                    <a:bodyPr/>
-                    <a:lstStyle/>
-                    <a:p>
-                      <a:pPr algn="l"/>
-                      <a:r>
-                        <a:rPr sz="1000">
-                          <a:solidFill>
-                            <a:srgbClr val="F2EFE6"/>
-                          </a:solidFill>
-                          <a:latin typeface="Segoe UI"/>
-                        </a:rPr>
-                        <a:t>III - Maturity</a:t>
-                      </a:r>
-                    </a:p>
-                  </a:txBody>
-                  <a:tcPr>
-                    <a:solidFill>
-                      <a:srgbClr val="16241C"/>
-                    </a:solidFill>
-                  </a:tcPr>
-                </a:tc>
-                <a:tc>
-                  <a:txBody>
-                    <a:bodyPr/>
-                    <a:lstStyle/>
-                    <a:p>
-                      <a:pPr algn="l"/>
-                      <a:r>
-                        <a:rPr sz="1000">
-                          <a:solidFill>
-                            <a:srgbClr val="F2EFE6"/>
-                          </a:solidFill>
-                          <a:latin typeface="Segoe UI"/>
-                        </a:rPr>
-                        <a:t>11-15</a:t>
-                      </a:r>
-                    </a:p>
-                  </a:txBody>
-                  <a:tcPr>
-                    <a:solidFill>
-                      <a:srgbClr val="16241C"/>
-                    </a:solidFill>
-                  </a:tcPr>
-                </a:tc>
-                <a:tc>
-                  <a:txBody>
-                    <a:bodyPr/>
-                    <a:lstStyle/>
-                    <a:p>
-                      <a:pPr algn="l"/>
-                      <a:r>
-                        <a:rPr sz="1000">
-                          <a:solidFill>
-                            <a:srgbClr val="F2EFE6"/>
-                          </a:solidFill>
-                          <a:latin typeface="Segoe UI"/>
-                        </a:rPr>
-                        <a:t>Kidnapping down 85%; response &lt;45 min region-wide; rising prosecutions; trust index &gt;75%; farms fully reactivated</a:t>
-                      </a:r>
-                    </a:p>
-                  </a:txBody>
-                  <a:tcPr>
-                    <a:solidFill>
-                      <a:srgbClr val="16241C"/>
-                    </a:solidFill>
-                  </a:tcPr>
-                </a:tc>
-              </a:tr>
-              <a:tr h="658368">
-                <a:tc>
-                  <a:txBody>
-                    <a:bodyPr/>
-                    <a:lstStyle/>
-                    <a:p>
-                      <a:pPr algn="l"/>
-                      <a:r>
-                        <a:rPr sz="1000">
-                          <a:solidFill>
-                            <a:srgbClr val="F2EFE6"/>
-                          </a:solidFill>
-                          <a:latin typeface="Segoe UI"/>
-                        </a:rPr>
-                        <a:t>IV - Sustained Peace</a:t>
-                      </a:r>
-                    </a:p>
-                  </a:txBody>
-                  <a:tcPr>
-                    <a:solidFill>
-                      <a:srgbClr val="16241C"/>
-                    </a:solidFill>
-                  </a:tcPr>
-                </a:tc>
-                <a:tc>
-                  <a:txBody>
-                    <a:bodyPr/>
-                    <a:lstStyle/>
-                    <a:p>
-                      <a:pPr algn="l"/>
-                      <a:r>
-                        <a:rPr sz="1000">
-                          <a:solidFill>
-                            <a:srgbClr val="F2EFE6"/>
-                          </a:solidFill>
-                          <a:latin typeface="Segoe UI"/>
-                        </a:rPr>
-                        <a:t>16-20</a:t>
-                      </a:r>
-                    </a:p>
-                  </a:txBody>
-                  <a:tcPr>
-                    <a:solidFill>
-                      <a:srgbClr val="16241C"/>
-                    </a:solidFill>
-                  </a:tcPr>
-                </a:tc>
-                <a:tc>
-                  <a:txBody>
-                    <a:bodyPr/>
-                    <a:lstStyle/>
-                    <a:p>
-                      <a:pPr algn="l"/>
-                      <a:r>
-                        <a:rPr sz="1000">
-                          <a:solidFill>
-                            <a:srgbClr val="F2EFE6"/>
-                          </a:solidFill>
-                          <a:latin typeface="Segoe UI"/>
-                        </a:rPr>
-                        <a:t>Kidnapping industry &lt;5% of baseline; region exports best practice; full corridor integration; self-sustaining LG financing</a:t>
-                      </a:r>
-                    </a:p>
-                  </a:txBody>
-                  <a:tcPr>
-                    <a:solidFill>
-                      <a:srgbClr val="16241C"/>
-                    </a:solidFill>
-                  </a:tcPr>
-                </a:tc>
-              </a:tr>
-            </a:tbl>
-          </a:graphicData>
-        </a:graphic>
-      </p:graphicFrame>
-      <p:sp>
-        <p:nvSpPr>
-          <p:cNvPr id="6" name="TextBox 5"/>
+              <a:rPr sz="2600" b="1" i="0">
+                <a:solidFill>
+                  <a:srgbClr val="C9A24B"/>
+                </a:solidFill>
+                <a:latin typeface="Segoe UI"/>
+              </a:rPr>
+              <a:t>Financially Autonomous Local Governments</a:t>
+            </a:r>
+          </a:p>
+        </p:txBody>
+      </p:sp>
+      <p:sp>
+        <p:nvSpPr>
+          <p:cNvPr id="5" name="TextBox 4"/>
           <p:cNvSpPr txBox="1"/>
           <p:nvPr/>
         </p:nvSpPr>
         <p:spPr>
           <a:xfrm>
-            <a:off x="822960" y="5806440"/>
-            <a:ext cx="9509760" cy="685800"/>
+            <a:off x="822960" y="2743200"/>
+            <a:ext cx="9509760" cy="914400"/>
           </a:xfrm>
           <a:prstGeom prst="rect">
             <a:avLst/>
@@ -5820,13 +5405,48 @@
           <a:p>
             <a:pPr algn="ctr"/>
             <a:r>
+              <a:rPr sz="1700" b="1" i="0">
+                <a:solidFill>
+                  <a:srgbClr val="F2EFE6"/>
+                </a:solidFill>
+                <a:latin typeface="Segoe UI"/>
+              </a:rPr>
+              <a:t>Federal  →  State  →  Accountable LG  →  Community  →  Security</a:t>
+            </a:r>
+          </a:p>
+        </p:txBody>
+      </p:sp>
+      <p:sp>
+        <p:nvSpPr>
+          <p:cNvPr id="6" name="TextBox 5"/>
+          <p:cNvSpPr txBox="1"/>
+          <p:nvPr/>
+        </p:nvSpPr>
+        <p:spPr>
+          <a:xfrm>
+            <a:off x="822960" y="5806440"/>
+            <a:ext cx="9509760" cy="685800"/>
+          </a:xfrm>
+          <a:prstGeom prst="rect">
+            <a:avLst/>
+          </a:prstGeom>
+          <a:noFill/>
+        </p:spPr>
+        <p:txBody>
+          <a:bodyPr wrap="square">
+            <a:spAutoFit/>
+          </a:bodyPr>
+          <a:lstStyle/>
+          <a:p>
+            <a:pPr algn="ctr"/>
+            <a:r>
               <a:rPr sz="1500" b="1" i="0">
                 <a:solidFill>
                   <a:srgbClr val="C9A24B"/>
                 </a:solidFill>
                 <a:latin typeface="Segoe UI"/>
               </a:rPr>
-              <a:t>SAY: A twenty-year plan without five-year checkpoints is just a hope.</a:t>
+              <a:t>SAY: Push power and money down to the LG — that's where the threat actually lives.</a:t>
             </a:r>
           </a:p>
         </p:txBody>
@@ -5887,7 +5507,7 @@
                 </a:solidFill>
                 <a:latin typeface="Segoe UI"/>
               </a:rPr>
-              <a:t>19 / 21</a:t>
+              <a:t>19 / 23</a:t>
             </a:r>
           </a:p>
         </p:txBody>
@@ -5922,7 +5542,7 @@
                 </a:solidFill>
                 <a:latin typeface="Segoe UI"/>
               </a:rPr>
-              <a:t>THE NORTH-CENTRAL SECURITY COMPACT</a:t>
+              <a:t>THE FORMULA</a:t>
             </a:r>
           </a:p>
         </p:txBody>
@@ -5935,8 +5555,8 @@
         </p:nvSpPr>
         <p:spPr>
           <a:xfrm>
-            <a:off x="640080" y="1417320"/>
-            <a:ext cx="9875520" cy="914400"/>
+            <a:off x="822960" y="2286000"/>
+            <a:ext cx="9509760" cy="1371600"/>
           </a:xfrm>
           <a:prstGeom prst="rect">
             <a:avLst/>
@@ -5951,13 +5571,13 @@
           <a:p>
             <a:pPr algn="ctr"/>
             <a:r>
-              <a:rPr sz="2800" b="1" i="0">
+              <a:rPr sz="1800" b="1" i="0">
                 <a:solidFill>
                   <a:srgbClr val="C9A24B"/>
                 </a:solidFill>
                 <a:latin typeface="Segoe UI"/>
               </a:rPr>
-              <a:t>Seven Commitments</a:t>
+              <a:t>Financial Autonomy + Accountability + Local Intelligence + Responsive Governance + Professional Coordination</a:t>
             </a:r>
           </a:p>
         </p:txBody>
@@ -5970,8 +5590,8 @@
         </p:nvSpPr>
         <p:spPr>
           <a:xfrm>
-            <a:off x="822960" y="2286000"/>
-            <a:ext cx="9509760" cy="3291840"/>
+            <a:off x="822960" y="3749039"/>
+            <a:ext cx="9509760" cy="640080"/>
           </a:xfrm>
           <a:prstGeom prst="rect">
             <a:avLst/>
@@ -5984,115 +5604,15 @@
           </a:bodyPr>
           <a:lstStyle/>
           <a:p>
-            <a:pPr>
-              <a:spcAft>
-                <a:spcPts val="600"/>
-              </a:spcAft>
-            </a:pPr>
-            <a:r>
-              <a:rPr sz="1500">
-                <a:solidFill>
-                  <a:srgbClr val="F2EFE6"/>
-                </a:solidFill>
-                <a:latin typeface="Segoe UI"/>
-              </a:rPr>
-              <a:t>1. One Threat Picture — we share intelligence</a:t>
-            </a:r>
-          </a:p>
-          <a:p>
-            <a:pPr>
-              <a:spcAft>
-                <a:spcPts val="600"/>
-              </a:spcAft>
-            </a:pPr>
-            <a:r>
-              <a:rPr sz="1500">
-                <a:solidFill>
-                  <a:srgbClr val="F2EFE6"/>
-                </a:solidFill>
-                <a:latin typeface="Segoe UI"/>
-              </a:rPr>
-              <a:t>2. One Early-Warning System — we listen to communities</a:t>
-            </a:r>
-          </a:p>
-          <a:p>
-            <a:pPr>
-              <a:spcAft>
-                <a:spcPts val="600"/>
-              </a:spcAft>
-            </a:pPr>
-            <a:r>
-              <a:rPr sz="1500">
-                <a:solidFill>
-                  <a:srgbClr val="F2EFE6"/>
-                </a:solidFill>
-                <a:latin typeface="Segoe UI"/>
-              </a:rPr>
-              <a:t>3. One Rapid-Response Philosophy — before massacres, not after</a:t>
-            </a:r>
-          </a:p>
-          <a:p>
-            <a:pPr>
-              <a:spcAft>
-                <a:spcPts val="600"/>
-              </a:spcAft>
-            </a:pPr>
-            <a:r>
-              <a:rPr sz="1500">
-                <a:solidFill>
-                  <a:srgbClr val="F2EFE6"/>
-                </a:solidFill>
-                <a:latin typeface="Segoe UI"/>
-              </a:rPr>
-              <a:t>4. One Professional Standard — discipline, law, dignity</a:t>
-            </a:r>
-          </a:p>
-          <a:p>
-            <a:pPr>
-              <a:spcAft>
-                <a:spcPts val="600"/>
-              </a:spcAft>
-            </a:pPr>
-            <a:r>
-              <a:rPr sz="1500">
-                <a:solidFill>
-                  <a:srgbClr val="F2EFE6"/>
-                </a:solidFill>
-                <a:latin typeface="Segoe UI"/>
-              </a:rPr>
-              <a:t>5. One Regional Approach — no state-border cover</a:t>
-            </a:r>
-          </a:p>
-          <a:p>
-            <a:pPr>
-              <a:spcAft>
-                <a:spcPts val="600"/>
-              </a:spcAft>
-            </a:pPr>
-            <a:r>
-              <a:rPr sz="1500">
-                <a:solidFill>
-                  <a:srgbClr val="F2EFE6"/>
-                </a:solidFill>
-                <a:latin typeface="Segoe UI"/>
-              </a:rPr>
-              <a:t>6. One Development Agenda — secure and rebuild together</a:t>
-            </a:r>
-          </a:p>
-          <a:p>
-            <a:pPr>
-              <a:spcAft>
-                <a:spcPts val="600"/>
-              </a:spcAft>
-            </a:pPr>
-            <a:r>
-              <a:rPr sz="1500">
-                <a:solidFill>
-                  <a:srgbClr val="F2EFE6"/>
-                </a:solidFill>
-                <a:latin typeface="Segoe UI"/>
-              </a:rPr>
-              <a:t>7. One Measure of Success — the safety and dignity of the citizen</a:t>
+            <a:pPr algn="ctr"/>
+            <a:r>
+              <a:rPr sz="2200" b="1" i="0">
+                <a:solidFill>
+                  <a:srgbClr val="C9A24B"/>
+                </a:solidFill>
+                <a:latin typeface="Segoe UI"/>
+              </a:rPr>
+              <a:t>= Stronger Grassroots Security</a:t>
             </a:r>
           </a:p>
         </p:txBody>
@@ -6127,7 +5647,7 @@
                 </a:solidFill>
                 <a:latin typeface="Segoe UI"/>
               </a:rPr>
-              <a:t>SAY: Ask the summit to adopt all seven, together, as one compact.</a:t>
+              <a:t>SAY: Autonomy without audits just decentralises corruption — say this caveat out loud.</a:t>
             </a:r>
           </a:p>
         </p:txBody>
@@ -6188,7 +5708,7 @@
                 </a:solidFill>
                 <a:latin typeface="Segoe UI"/>
               </a:rPr>
-              <a:t>02 / 21</a:t>
+              <a:t>02 / 23</a:t>
             </a:r>
           </a:p>
         </p:txBody>
@@ -7237,7 +6757,7 @@
                 </a:solidFill>
                 <a:latin typeface="Segoe UI"/>
               </a:rPr>
-              <a:t>20 / 21</a:t>
+              <a:t>20 / 23</a:t>
             </a:r>
           </a:p>
         </p:txBody>
@@ -7268,11 +6788,11 @@
             <a:r>
               <a:rPr sz="1300" b="0" i="0">
                 <a:solidFill>
-                  <a:srgbClr val="9FBFA9"/>
-                </a:solidFill>
-                <a:latin typeface="Segoe UI"/>
-              </a:rPr>
-              <a:t>CLOSING</a:t>
+                  <a:srgbClr val="2FD8C9"/>
+                </a:solidFill>
+                <a:latin typeface="Segoe UI"/>
+              </a:rPr>
+              <a:t>EVALUATION ROADMAP</a:t>
             </a:r>
           </a:p>
         </p:txBody>
@@ -7285,8 +6805,8 @@
         </p:nvSpPr>
         <p:spPr>
           <a:xfrm>
-            <a:off x="822960" y="2011680"/>
-            <a:ext cx="9509760" cy="1463040"/>
+            <a:off x="640080" y="1417320"/>
+            <a:ext cx="9875520" cy="914400"/>
           </a:xfrm>
           <a:prstGeom prst="rect">
             <a:avLst/>
@@ -7301,27 +6821,409 @@
           <a:p>
             <a:pPr algn="ctr"/>
             <a:r>
-              <a:rPr sz="1900" b="0" i="1">
-                <a:solidFill>
-                  <a:srgbClr val="F2EFE6"/>
-                </a:solidFill>
-                <a:latin typeface="Segoe UI"/>
-              </a:rPr>
-              <a:t>"If every local government across the North-Central states is empowered, accountable and connected — we begin to build a regional security shield."</a:t>
-            </a:r>
-          </a:p>
-        </p:txBody>
-      </p:sp>
-      <p:sp>
-        <p:nvSpPr>
-          <p:cNvPr id="5" name="TextBox 4"/>
+              <a:rPr sz="2400" b="1" i="0">
+                <a:solidFill>
+                  <a:srgbClr val="2FD8C9"/>
+                </a:solidFill>
+                <a:latin typeface="Segoe UI"/>
+              </a:rPr>
+              <a:t>5-Year Metrics &amp; Evaluation Roadmap</a:t>
+            </a:r>
+          </a:p>
+        </p:txBody>
+      </p:sp>
+      <p:graphicFrame>
+        <p:nvGraphicFramePr>
+          <p:cNvPr id="5" name="Table 4"/>
+          <p:cNvGraphicFramePr>
+            <a:graphicFrameLocks noGrp="1"/>
+          </p:cNvGraphicFramePr>
+          <p:nvPr/>
+        </p:nvGraphicFramePr>
+        <p:xfrm>
+          <a:off x="731520" y="2148840"/>
+          <a:ext cx="9692638" cy="3291840"/>
+        </p:xfrm>
+        <a:graphic>
+          <a:graphicData uri="http://schemas.openxmlformats.org/drawingml/2006/table">
+            <a:tbl>
+              <a:tblPr firstRow="1" bandRow="1">
+                <a:tableStyleId>{5C22544A-7EE6-4342-B048-85BDC9FD1C3A}</a:tableStyleId>
+              </a:tblPr>
+              <a:tblGrid>
+                <a:gridCol w="1723136"/>
+                <a:gridCol w="969263"/>
+                <a:gridCol w="7000239"/>
+              </a:tblGrid>
+              <a:tr h="658368">
+                <a:tc>
+                  <a:txBody>
+                    <a:bodyPr/>
+                    <a:lstStyle/>
+                    <a:p>
+                      <a:pPr algn="ctr"/>
+                      <a:r>
+                        <a:rPr b="1" sz="1100">
+                          <a:solidFill>
+                            <a:srgbClr val="C9A24B"/>
+                          </a:solidFill>
+                          <a:latin typeface="Segoe UI"/>
+                        </a:rPr>
+                        <a:t>Phase</a:t>
+                      </a:r>
+                    </a:p>
+                  </a:txBody>
+                  <a:tcPr>
+                    <a:solidFill>
+                      <a:srgbClr val="1B3A2B"/>
+                    </a:solidFill>
+                  </a:tcPr>
+                </a:tc>
+                <a:tc>
+                  <a:txBody>
+                    <a:bodyPr/>
+                    <a:lstStyle/>
+                    <a:p>
+                      <a:pPr algn="ctr"/>
+                      <a:r>
+                        <a:rPr b="1" sz="1100">
+                          <a:solidFill>
+                            <a:srgbClr val="C9A24B"/>
+                          </a:solidFill>
+                          <a:latin typeface="Segoe UI"/>
+                        </a:rPr>
+                        <a:t>Years</a:t>
+                      </a:r>
+                    </a:p>
+                  </a:txBody>
+                  <a:tcPr>
+                    <a:solidFill>
+                      <a:srgbClr val="1B3A2B"/>
+                    </a:solidFill>
+                  </a:tcPr>
+                </a:tc>
+                <a:tc>
+                  <a:txBody>
+                    <a:bodyPr/>
+                    <a:lstStyle/>
+                    <a:p>
+                      <a:pPr algn="ctr"/>
+                      <a:r>
+                        <a:rPr b="1" sz="1100">
+                          <a:solidFill>
+                            <a:srgbClr val="C9A24B"/>
+                          </a:solidFill>
+                          <a:latin typeface="Segoe UI"/>
+                        </a:rPr>
+                        <a:t>Key Evaluation Targets</a:t>
+                      </a:r>
+                    </a:p>
+                  </a:txBody>
+                  <a:tcPr>
+                    <a:solidFill>
+                      <a:srgbClr val="1B3A2B"/>
+                    </a:solidFill>
+                  </a:tcPr>
+                </a:tc>
+              </a:tr>
+              <a:tr h="658368">
+                <a:tc>
+                  <a:txBody>
+                    <a:bodyPr/>
+                    <a:lstStyle/>
+                    <a:p>
+                      <a:pPr algn="l"/>
+                      <a:r>
+                        <a:rPr sz="1000">
+                          <a:solidFill>
+                            <a:srgbClr val="F2EFE6"/>
+                          </a:solidFill>
+                          <a:latin typeface="Segoe UI"/>
+                        </a:rPr>
+                        <a:t>I - Foundation</a:t>
+                      </a:r>
+                    </a:p>
+                  </a:txBody>
+                  <a:tcPr>
+                    <a:solidFill>
+                      <a:srgbClr val="16241C"/>
+                    </a:solidFill>
+                  </a:tcPr>
+                </a:tc>
+                <a:tc>
+                  <a:txBody>
+                    <a:bodyPr/>
+                    <a:lstStyle/>
+                    <a:p>
+                      <a:pPr algn="l"/>
+                      <a:r>
+                        <a:rPr sz="1000">
+                          <a:solidFill>
+                            <a:srgbClr val="F2EFE6"/>
+                          </a:solidFill>
+                          <a:latin typeface="Segoe UI"/>
+                        </a:rPr>
+                        <a:t>1-5</a:t>
+                      </a:r>
+                    </a:p>
+                  </a:txBody>
+                  <a:tcPr>
+                    <a:solidFill>
+                      <a:srgbClr val="16241C"/>
+                    </a:solidFill>
+                  </a:tcPr>
+                </a:tc>
+                <a:tc>
+                  <a:txBody>
+                    <a:bodyPr/>
+                    <a:lstStyle/>
+                    <a:p>
+                      <a:pPr algn="l"/>
+                      <a:r>
+                        <a:rPr sz="1000">
+                          <a:solidFill>
+                            <a:srgbClr val="F2EFE6"/>
+                          </a:solidFill>
+                          <a:latin typeface="Segoe UI"/>
+                        </a:rPr>
+                        <a:t>Fusion Centre in all 7 states/FCT; kidnapping down 30%; Early-Warning Network in 50% of high-risk LGAs; response &lt;90 min</a:t>
+                      </a:r>
+                    </a:p>
+                  </a:txBody>
+                  <a:tcPr>
+                    <a:solidFill>
+                      <a:srgbClr val="16241C"/>
+                    </a:solidFill>
+                  </a:tcPr>
+                </a:tc>
+              </a:tr>
+              <a:tr h="658368">
+                <a:tc>
+                  <a:txBody>
+                    <a:bodyPr/>
+                    <a:lstStyle/>
+                    <a:p>
+                      <a:pPr algn="l"/>
+                      <a:r>
+                        <a:rPr sz="1000">
+                          <a:solidFill>
+                            <a:srgbClr val="F2EFE6"/>
+                          </a:solidFill>
+                          <a:latin typeface="Segoe UI"/>
+                        </a:rPr>
+                        <a:t>II - Consolidation</a:t>
+                      </a:r>
+                    </a:p>
+                  </a:txBody>
+                  <a:tcPr>
+                    <a:solidFill>
+                      <a:srgbClr val="16241C"/>
+                    </a:solidFill>
+                  </a:tcPr>
+                </a:tc>
+                <a:tc>
+                  <a:txBody>
+                    <a:bodyPr/>
+                    <a:lstStyle/>
+                    <a:p>
+                      <a:pPr algn="l"/>
+                      <a:r>
+                        <a:rPr sz="1000">
+                          <a:solidFill>
+                            <a:srgbClr val="F2EFE6"/>
+                          </a:solidFill>
+                          <a:latin typeface="Segoe UI"/>
+                        </a:rPr>
+                        <a:t>6-10</a:t>
+                      </a:r>
+                    </a:p>
+                  </a:txBody>
+                  <a:tcPr>
+                    <a:solidFill>
+                      <a:srgbClr val="16241C"/>
+                    </a:solidFill>
+                  </a:tcPr>
+                </a:tc>
+                <a:tc>
+                  <a:txBody>
+                    <a:bodyPr/>
+                    <a:lstStyle/>
+                    <a:p>
+                      <a:pPr algn="l"/>
+                      <a:r>
+                        <a:rPr sz="1000">
+                          <a:solidFill>
+                            <a:srgbClr val="F2EFE6"/>
+                          </a:solidFill>
+                          <a:latin typeface="Segoe UI"/>
+                        </a:rPr>
+                        <a:t>Kidnapping down 60%; 100% LGAs fused; all 6 corridors institutionalised; return &gt;70%; audit compliance &gt;90%</a:t>
+                      </a:r>
+                    </a:p>
+                  </a:txBody>
+                  <a:tcPr>
+                    <a:solidFill>
+                      <a:srgbClr val="16241C"/>
+                    </a:solidFill>
+                  </a:tcPr>
+                </a:tc>
+              </a:tr>
+              <a:tr h="658368">
+                <a:tc>
+                  <a:txBody>
+                    <a:bodyPr/>
+                    <a:lstStyle/>
+                    <a:p>
+                      <a:pPr algn="l"/>
+                      <a:r>
+                        <a:rPr sz="1000">
+                          <a:solidFill>
+                            <a:srgbClr val="F2EFE6"/>
+                          </a:solidFill>
+                          <a:latin typeface="Segoe UI"/>
+                        </a:rPr>
+                        <a:t>III - Maturity</a:t>
+                      </a:r>
+                    </a:p>
+                  </a:txBody>
+                  <a:tcPr>
+                    <a:solidFill>
+                      <a:srgbClr val="16241C"/>
+                    </a:solidFill>
+                  </a:tcPr>
+                </a:tc>
+                <a:tc>
+                  <a:txBody>
+                    <a:bodyPr/>
+                    <a:lstStyle/>
+                    <a:p>
+                      <a:pPr algn="l"/>
+                      <a:r>
+                        <a:rPr sz="1000">
+                          <a:solidFill>
+                            <a:srgbClr val="F2EFE6"/>
+                          </a:solidFill>
+                          <a:latin typeface="Segoe UI"/>
+                        </a:rPr>
+                        <a:t>11-15</a:t>
+                      </a:r>
+                    </a:p>
+                  </a:txBody>
+                  <a:tcPr>
+                    <a:solidFill>
+                      <a:srgbClr val="16241C"/>
+                    </a:solidFill>
+                  </a:tcPr>
+                </a:tc>
+                <a:tc>
+                  <a:txBody>
+                    <a:bodyPr/>
+                    <a:lstStyle/>
+                    <a:p>
+                      <a:pPr algn="l"/>
+                      <a:r>
+                        <a:rPr sz="1000">
+                          <a:solidFill>
+                            <a:srgbClr val="F2EFE6"/>
+                          </a:solidFill>
+                          <a:latin typeface="Segoe UI"/>
+                        </a:rPr>
+                        <a:t>Kidnapping down 85%; response &lt;45 min region-wide; rising prosecutions; trust index &gt;75%; farms fully reactivated</a:t>
+                      </a:r>
+                    </a:p>
+                  </a:txBody>
+                  <a:tcPr>
+                    <a:solidFill>
+                      <a:srgbClr val="16241C"/>
+                    </a:solidFill>
+                  </a:tcPr>
+                </a:tc>
+              </a:tr>
+              <a:tr h="658368">
+                <a:tc>
+                  <a:txBody>
+                    <a:bodyPr/>
+                    <a:lstStyle/>
+                    <a:p>
+                      <a:pPr algn="l"/>
+                      <a:r>
+                        <a:rPr sz="1000">
+                          <a:solidFill>
+                            <a:srgbClr val="F2EFE6"/>
+                          </a:solidFill>
+                          <a:latin typeface="Segoe UI"/>
+                        </a:rPr>
+                        <a:t>IV - Sustained Peace</a:t>
+                      </a:r>
+                    </a:p>
+                  </a:txBody>
+                  <a:tcPr>
+                    <a:solidFill>
+                      <a:srgbClr val="16241C"/>
+                    </a:solidFill>
+                  </a:tcPr>
+                </a:tc>
+                <a:tc>
+                  <a:txBody>
+                    <a:bodyPr/>
+                    <a:lstStyle/>
+                    <a:p>
+                      <a:pPr algn="l"/>
+                      <a:r>
+                        <a:rPr sz="1000">
+                          <a:solidFill>
+                            <a:srgbClr val="F2EFE6"/>
+                          </a:solidFill>
+                          <a:latin typeface="Segoe UI"/>
+                        </a:rPr>
+                        <a:t>16-20</a:t>
+                      </a:r>
+                    </a:p>
+                  </a:txBody>
+                  <a:tcPr>
+                    <a:solidFill>
+                      <a:srgbClr val="16241C"/>
+                    </a:solidFill>
+                  </a:tcPr>
+                </a:tc>
+                <a:tc>
+                  <a:txBody>
+                    <a:bodyPr/>
+                    <a:lstStyle/>
+                    <a:p>
+                      <a:pPr algn="l"/>
+                      <a:r>
+                        <a:rPr sz="1000">
+                          <a:solidFill>
+                            <a:srgbClr val="F2EFE6"/>
+                          </a:solidFill>
+                          <a:latin typeface="Segoe UI"/>
+                        </a:rPr>
+                        <a:t>Kidnapping industry &lt;5% of baseline; region exports best practice; full corridor integration; self-sustaining LG financing</a:t>
+                      </a:r>
+                    </a:p>
+                  </a:txBody>
+                  <a:tcPr>
+                    <a:solidFill>
+                      <a:srgbClr val="16241C"/>
+                    </a:solidFill>
+                  </a:tcPr>
+                </a:tc>
+              </a:tr>
+            </a:tbl>
+          </a:graphicData>
+        </a:graphic>
+      </p:graphicFrame>
+      <p:sp>
+        <p:nvSpPr>
+          <p:cNvPr id="6" name="TextBox 5"/>
           <p:cNvSpPr txBox="1"/>
           <p:nvPr/>
         </p:nvSpPr>
         <p:spPr>
           <a:xfrm>
-            <a:off x="822960" y="3657600"/>
-            <a:ext cx="9509760" cy="1188720"/>
+            <a:off x="822960" y="5806440"/>
+            <a:ext cx="9509760" cy="685800"/>
           </a:xfrm>
           <a:prstGeom prst="rect">
             <a:avLst/>
@@ -7336,48 +7238,13 @@
           <a:p>
             <a:pPr algn="ctr"/>
             <a:r>
-              <a:rPr sz="1800" b="1" i="0">
+              <a:rPr sz="1500" b="1" i="0">
                 <a:solidFill>
                   <a:srgbClr val="C9A24B"/>
                 </a:solidFill>
                 <a:latin typeface="Segoe UI"/>
               </a:rPr>
-              <a:t>He simply wants to arrive alive. That is the standard by which we must judge ourselves. And it is not beyond the capacity of Nigeria.</a:t>
-            </a:r>
-          </a:p>
-        </p:txBody>
-      </p:sp>
-      <p:sp>
-        <p:nvSpPr>
-          <p:cNvPr id="6" name="TextBox 5"/>
-          <p:cNvSpPr txBox="1"/>
-          <p:nvPr/>
-        </p:nvSpPr>
-        <p:spPr>
-          <a:xfrm>
-            <a:off x="822960" y="6126480"/>
-            <a:ext cx="9509760" cy="320040"/>
-          </a:xfrm>
-          <a:prstGeom prst="rect">
-            <a:avLst/>
-          </a:prstGeom>
-          <a:noFill/>
-        </p:spPr>
-        <p:txBody>
-          <a:bodyPr wrap="square">
-            <a:spAutoFit/>
-          </a:bodyPr>
-          <a:lstStyle/>
-          <a:p>
-            <a:pPr algn="ctr"/>
-            <a:r>
-              <a:rPr sz="900" b="0" i="0">
-                <a:solidFill>
-                  <a:srgbClr val="9FBFA9"/>
-                </a:solidFill>
-                <a:latin typeface="Segoe UI"/>
-              </a:rPr>
-              <a:t>AVM MONDAY RIKU MORGAN (RTD) · NORTH-CENTRAL SECURITY SUMMIT · 2026</a:t>
+              <a:t>SAY: A twenty-year plan without five-year checkpoints is just a hope.</a:t>
             </a:r>
           </a:p>
         </p:txBody>
@@ -7438,7 +7305,509 @@
                 </a:solidFill>
                 <a:latin typeface="Segoe UI"/>
               </a:rPr>
-              <a:t>21 / 21</a:t>
+              <a:t>21 / 23</a:t>
+            </a:r>
+          </a:p>
+        </p:txBody>
+      </p:sp>
+      <p:sp>
+        <p:nvSpPr>
+          <p:cNvPr id="3" name="TextBox 2"/>
+          <p:cNvSpPr txBox="1"/>
+          <p:nvPr/>
+        </p:nvSpPr>
+        <p:spPr>
+          <a:xfrm>
+            <a:off x="822960" y="1051560"/>
+            <a:ext cx="9509760" cy="365760"/>
+          </a:xfrm>
+          <a:prstGeom prst="rect">
+            <a:avLst/>
+          </a:prstGeom>
+          <a:noFill/>
+        </p:spPr>
+        <p:txBody>
+          <a:bodyPr wrap="square">
+            <a:spAutoFit/>
+          </a:bodyPr>
+          <a:lstStyle/>
+          <a:p>
+            <a:pPr algn="ctr"/>
+            <a:r>
+              <a:rPr sz="1300" b="0" i="0">
+                <a:solidFill>
+                  <a:srgbClr val="9FBFA9"/>
+                </a:solidFill>
+                <a:latin typeface="Segoe UI"/>
+              </a:rPr>
+              <a:t>THE NORTH-CENTRAL SECURITY COMPACT</a:t>
+            </a:r>
+          </a:p>
+        </p:txBody>
+      </p:sp>
+      <p:sp>
+        <p:nvSpPr>
+          <p:cNvPr id="4" name="TextBox 3"/>
+          <p:cNvSpPr txBox="1"/>
+          <p:nvPr/>
+        </p:nvSpPr>
+        <p:spPr>
+          <a:xfrm>
+            <a:off x="640080" y="1417320"/>
+            <a:ext cx="9875520" cy="914400"/>
+          </a:xfrm>
+          <a:prstGeom prst="rect">
+            <a:avLst/>
+          </a:prstGeom>
+          <a:noFill/>
+        </p:spPr>
+        <p:txBody>
+          <a:bodyPr wrap="square">
+            <a:spAutoFit/>
+          </a:bodyPr>
+          <a:lstStyle/>
+          <a:p>
+            <a:pPr algn="ctr"/>
+            <a:r>
+              <a:rPr sz="2800" b="1" i="0">
+                <a:solidFill>
+                  <a:srgbClr val="C9A24B"/>
+                </a:solidFill>
+                <a:latin typeface="Segoe UI"/>
+              </a:rPr>
+              <a:t>Seven Commitments</a:t>
+            </a:r>
+          </a:p>
+        </p:txBody>
+      </p:sp>
+      <p:sp>
+        <p:nvSpPr>
+          <p:cNvPr id="5" name="TextBox 4"/>
+          <p:cNvSpPr txBox="1"/>
+          <p:nvPr/>
+        </p:nvSpPr>
+        <p:spPr>
+          <a:xfrm>
+            <a:off x="822960" y="2286000"/>
+            <a:ext cx="9509760" cy="3291840"/>
+          </a:xfrm>
+          <a:prstGeom prst="rect">
+            <a:avLst/>
+          </a:prstGeom>
+          <a:noFill/>
+        </p:spPr>
+        <p:txBody>
+          <a:bodyPr wrap="square">
+            <a:spAutoFit/>
+          </a:bodyPr>
+          <a:lstStyle/>
+          <a:p>
+            <a:pPr>
+              <a:spcAft>
+                <a:spcPts val="600"/>
+              </a:spcAft>
+            </a:pPr>
+            <a:r>
+              <a:rPr sz="1500">
+                <a:solidFill>
+                  <a:srgbClr val="F2EFE6"/>
+                </a:solidFill>
+                <a:latin typeface="Segoe UI"/>
+              </a:rPr>
+              <a:t>1. One Threat Picture — we share intelligence</a:t>
+            </a:r>
+          </a:p>
+          <a:p>
+            <a:pPr>
+              <a:spcAft>
+                <a:spcPts val="600"/>
+              </a:spcAft>
+            </a:pPr>
+            <a:r>
+              <a:rPr sz="1500">
+                <a:solidFill>
+                  <a:srgbClr val="F2EFE6"/>
+                </a:solidFill>
+                <a:latin typeface="Segoe UI"/>
+              </a:rPr>
+              <a:t>2. One Early-Warning System — we listen to communities</a:t>
+            </a:r>
+          </a:p>
+          <a:p>
+            <a:pPr>
+              <a:spcAft>
+                <a:spcPts val="600"/>
+              </a:spcAft>
+            </a:pPr>
+            <a:r>
+              <a:rPr sz="1500">
+                <a:solidFill>
+                  <a:srgbClr val="F2EFE6"/>
+                </a:solidFill>
+                <a:latin typeface="Segoe UI"/>
+              </a:rPr>
+              <a:t>3. One Rapid-Response Philosophy — before massacres, not after</a:t>
+            </a:r>
+          </a:p>
+          <a:p>
+            <a:pPr>
+              <a:spcAft>
+                <a:spcPts val="600"/>
+              </a:spcAft>
+            </a:pPr>
+            <a:r>
+              <a:rPr sz="1500">
+                <a:solidFill>
+                  <a:srgbClr val="F2EFE6"/>
+                </a:solidFill>
+                <a:latin typeface="Segoe UI"/>
+              </a:rPr>
+              <a:t>4. One Professional Standard — discipline, law, dignity</a:t>
+            </a:r>
+          </a:p>
+          <a:p>
+            <a:pPr>
+              <a:spcAft>
+                <a:spcPts val="600"/>
+              </a:spcAft>
+            </a:pPr>
+            <a:r>
+              <a:rPr sz="1500">
+                <a:solidFill>
+                  <a:srgbClr val="F2EFE6"/>
+                </a:solidFill>
+                <a:latin typeface="Segoe UI"/>
+              </a:rPr>
+              <a:t>5. One Regional Approach — no state-border cover</a:t>
+            </a:r>
+          </a:p>
+          <a:p>
+            <a:pPr>
+              <a:spcAft>
+                <a:spcPts val="600"/>
+              </a:spcAft>
+            </a:pPr>
+            <a:r>
+              <a:rPr sz="1500">
+                <a:solidFill>
+                  <a:srgbClr val="F2EFE6"/>
+                </a:solidFill>
+                <a:latin typeface="Segoe UI"/>
+              </a:rPr>
+              <a:t>6. One Development Agenda — secure and rebuild together</a:t>
+            </a:r>
+          </a:p>
+          <a:p>
+            <a:pPr>
+              <a:spcAft>
+                <a:spcPts val="600"/>
+              </a:spcAft>
+            </a:pPr>
+            <a:r>
+              <a:rPr sz="1500">
+                <a:solidFill>
+                  <a:srgbClr val="F2EFE6"/>
+                </a:solidFill>
+                <a:latin typeface="Segoe UI"/>
+              </a:rPr>
+              <a:t>7. One Measure of Success — the safety and dignity of the citizen</a:t>
+            </a:r>
+          </a:p>
+        </p:txBody>
+      </p:sp>
+      <p:sp>
+        <p:nvSpPr>
+          <p:cNvPr id="6" name="TextBox 5"/>
+          <p:cNvSpPr txBox="1"/>
+          <p:nvPr/>
+        </p:nvSpPr>
+        <p:spPr>
+          <a:xfrm>
+            <a:off x="822960" y="5806440"/>
+            <a:ext cx="9509760" cy="685800"/>
+          </a:xfrm>
+          <a:prstGeom prst="rect">
+            <a:avLst/>
+          </a:prstGeom>
+          <a:noFill/>
+        </p:spPr>
+        <p:txBody>
+          <a:bodyPr wrap="square">
+            <a:spAutoFit/>
+          </a:bodyPr>
+          <a:lstStyle/>
+          <a:p>
+            <a:pPr algn="ctr"/>
+            <a:r>
+              <a:rPr sz="1500" b="1" i="0">
+                <a:solidFill>
+                  <a:srgbClr val="C9A24B"/>
+                </a:solidFill>
+                <a:latin typeface="Segoe UI"/>
+              </a:rPr>
+              <a:t>SAY: Ask the summit to adopt all seven, together, as one compact.</a:t>
+            </a:r>
+          </a:p>
+        </p:txBody>
+      </p:sp>
+    </p:spTree>
+  </p:cSld>
+  <p:clrMapOvr>
+    <a:masterClrMapping/>
+  </p:clrMapOvr>
+</p:sld>
+</file>
+
+<file path=ppt/slides/slide22.xml><?xml version="1.0" encoding="utf-8"?>
+<p:sld xmlns:a="http://schemas.openxmlformats.org/drawingml/2006/main" xmlns:p="http://schemas.openxmlformats.org/presentationml/2006/main" xmlns:r="http://schemas.openxmlformats.org/officeDocument/2006/relationships">
+  <p:cSld>
+    <p:bg>
+      <p:bgPr>
+        <a:solidFill>
+          <a:srgbClr val="0D1A13"/>
+        </a:solidFill>
+        <a:effectLst/>
+      </p:bgPr>
+    </p:bg>
+    <p:spTree>
+      <p:nvGrpSpPr>
+        <p:cNvPr id="1" name=""/>
+        <p:cNvGrpSpPr/>
+        <p:nvPr/>
+      </p:nvGrpSpPr>
+      <p:grpSpPr/>
+      <p:sp>
+        <p:nvSpPr>
+          <p:cNvPr id="2" name="TextBox 1"/>
+          <p:cNvSpPr txBox="1"/>
+          <p:nvPr/>
+        </p:nvSpPr>
+        <p:spPr>
+          <a:xfrm>
+            <a:off x="10634472" y="228600"/>
+            <a:ext cx="1371600" cy="457200"/>
+          </a:xfrm>
+          <a:prstGeom prst="rect">
+            <a:avLst/>
+          </a:prstGeom>
+          <a:noFill/>
+        </p:spPr>
+        <p:txBody>
+          <a:bodyPr wrap="square">
+            <a:spAutoFit/>
+          </a:bodyPr>
+          <a:lstStyle/>
+          <a:p>
+            <a:pPr algn="r"/>
+            <a:r>
+              <a:rPr sz="1200" b="0" i="0">
+                <a:solidFill>
+                  <a:srgbClr val="C9A24B"/>
+                </a:solidFill>
+                <a:latin typeface="Segoe UI"/>
+              </a:rPr>
+              <a:t>22 / 23</a:t>
+            </a:r>
+          </a:p>
+        </p:txBody>
+      </p:sp>
+      <p:sp>
+        <p:nvSpPr>
+          <p:cNvPr id="3" name="TextBox 2"/>
+          <p:cNvSpPr txBox="1"/>
+          <p:nvPr/>
+        </p:nvSpPr>
+        <p:spPr>
+          <a:xfrm>
+            <a:off x="822960" y="1051560"/>
+            <a:ext cx="9509760" cy="365760"/>
+          </a:xfrm>
+          <a:prstGeom prst="rect">
+            <a:avLst/>
+          </a:prstGeom>
+          <a:noFill/>
+        </p:spPr>
+        <p:txBody>
+          <a:bodyPr wrap="square">
+            <a:spAutoFit/>
+          </a:bodyPr>
+          <a:lstStyle/>
+          <a:p>
+            <a:pPr algn="ctr"/>
+            <a:r>
+              <a:rPr sz="1300" b="0" i="0">
+                <a:solidFill>
+                  <a:srgbClr val="9FBFA9"/>
+                </a:solidFill>
+                <a:latin typeface="Segoe UI"/>
+              </a:rPr>
+              <a:t>CLOSING</a:t>
+            </a:r>
+          </a:p>
+        </p:txBody>
+      </p:sp>
+      <p:sp>
+        <p:nvSpPr>
+          <p:cNvPr id="4" name="TextBox 3"/>
+          <p:cNvSpPr txBox="1"/>
+          <p:nvPr/>
+        </p:nvSpPr>
+        <p:spPr>
+          <a:xfrm>
+            <a:off x="822960" y="2011680"/>
+            <a:ext cx="9509760" cy="1463040"/>
+          </a:xfrm>
+          <a:prstGeom prst="rect">
+            <a:avLst/>
+          </a:prstGeom>
+          <a:noFill/>
+        </p:spPr>
+        <p:txBody>
+          <a:bodyPr wrap="square">
+            <a:spAutoFit/>
+          </a:bodyPr>
+          <a:lstStyle/>
+          <a:p>
+            <a:pPr algn="ctr"/>
+            <a:r>
+              <a:rPr sz="1900" b="0" i="1">
+                <a:solidFill>
+                  <a:srgbClr val="F2EFE6"/>
+                </a:solidFill>
+                <a:latin typeface="Segoe UI"/>
+              </a:rPr>
+              <a:t>"If every local government across the North-Central states is empowered, accountable and connected — we begin to build a regional security shield."</a:t>
+            </a:r>
+          </a:p>
+        </p:txBody>
+      </p:sp>
+      <p:sp>
+        <p:nvSpPr>
+          <p:cNvPr id="5" name="TextBox 4"/>
+          <p:cNvSpPr txBox="1"/>
+          <p:nvPr/>
+        </p:nvSpPr>
+        <p:spPr>
+          <a:xfrm>
+            <a:off x="822960" y="3657600"/>
+            <a:ext cx="9509760" cy="1188720"/>
+          </a:xfrm>
+          <a:prstGeom prst="rect">
+            <a:avLst/>
+          </a:prstGeom>
+          <a:noFill/>
+        </p:spPr>
+        <p:txBody>
+          <a:bodyPr wrap="square">
+            <a:spAutoFit/>
+          </a:bodyPr>
+          <a:lstStyle/>
+          <a:p>
+            <a:pPr algn="ctr"/>
+            <a:r>
+              <a:rPr sz="1800" b="1" i="0">
+                <a:solidFill>
+                  <a:srgbClr val="C9A24B"/>
+                </a:solidFill>
+                <a:latin typeface="Segoe UI"/>
+              </a:rPr>
+              <a:t>He simply wants to arrive alive. That is the standard by which we must judge ourselves. And it is not beyond the capacity of Nigeria.</a:t>
+            </a:r>
+          </a:p>
+        </p:txBody>
+      </p:sp>
+      <p:sp>
+        <p:nvSpPr>
+          <p:cNvPr id="6" name="TextBox 5"/>
+          <p:cNvSpPr txBox="1"/>
+          <p:nvPr/>
+        </p:nvSpPr>
+        <p:spPr>
+          <a:xfrm>
+            <a:off x="822960" y="6126480"/>
+            <a:ext cx="9509760" cy="320040"/>
+          </a:xfrm>
+          <a:prstGeom prst="rect">
+            <a:avLst/>
+          </a:prstGeom>
+          <a:noFill/>
+        </p:spPr>
+        <p:txBody>
+          <a:bodyPr wrap="square">
+            <a:spAutoFit/>
+          </a:bodyPr>
+          <a:lstStyle/>
+          <a:p>
+            <a:pPr algn="ctr"/>
+            <a:r>
+              <a:rPr sz="900" b="0" i="0">
+                <a:solidFill>
+                  <a:srgbClr val="9FBFA9"/>
+                </a:solidFill>
+                <a:latin typeface="Segoe UI"/>
+              </a:rPr>
+              <a:t>AVM MONDAY RIKU MORGAN (RTD) · NORTH-CENTRAL SECURITY SUMMIT · 2026</a:t>
+            </a:r>
+          </a:p>
+        </p:txBody>
+      </p:sp>
+    </p:spTree>
+  </p:cSld>
+  <p:clrMapOvr>
+    <a:masterClrMapping/>
+  </p:clrMapOvr>
+</p:sld>
+</file>
+
+<file path=ppt/slides/slide23.xml><?xml version="1.0" encoding="utf-8"?>
+<p:sld xmlns:a="http://schemas.openxmlformats.org/drawingml/2006/main" xmlns:p="http://schemas.openxmlformats.org/presentationml/2006/main" xmlns:r="http://schemas.openxmlformats.org/officeDocument/2006/relationships">
+  <p:cSld>
+    <p:bg>
+      <p:bgPr>
+        <a:solidFill>
+          <a:srgbClr val="0D1A13"/>
+        </a:solidFill>
+        <a:effectLst/>
+      </p:bgPr>
+    </p:bg>
+    <p:spTree>
+      <p:nvGrpSpPr>
+        <p:cNvPr id="1" name=""/>
+        <p:cNvGrpSpPr/>
+        <p:nvPr/>
+      </p:nvGrpSpPr>
+      <p:grpSpPr/>
+      <p:sp>
+        <p:nvSpPr>
+          <p:cNvPr id="2" name="TextBox 1"/>
+          <p:cNvSpPr txBox="1"/>
+          <p:nvPr/>
+        </p:nvSpPr>
+        <p:spPr>
+          <a:xfrm>
+            <a:off x="10634472" y="228600"/>
+            <a:ext cx="1371600" cy="457200"/>
+          </a:xfrm>
+          <a:prstGeom prst="rect">
+            <a:avLst/>
+          </a:prstGeom>
+          <a:noFill/>
+        </p:spPr>
+        <p:txBody>
+          <a:bodyPr wrap="square">
+            <a:spAutoFit/>
+          </a:bodyPr>
+          <a:lstStyle/>
+          <a:p>
+            <a:pPr algn="r"/>
+            <a:r>
+              <a:rPr sz="1200" b="0" i="0">
+                <a:solidFill>
+                  <a:srgbClr val="C9A24B"/>
+                </a:solidFill>
+                <a:latin typeface="Segoe UI"/>
+              </a:rPr>
+              <a:t>23 / 23</a:t>
             </a:r>
           </a:p>
         </p:txBody>
@@ -7947,7 +8316,7 @@
                 </a:solidFill>
                 <a:latin typeface="Segoe UI"/>
               </a:rPr>
-              <a:t>03 / 21</a:t>
+              <a:t>03 / 23</a:t>
             </a:r>
           </a:p>
         </p:txBody>
@@ -8579,8 +8948,8 @@
         </p:nvSpPr>
         <p:spPr>
           <a:xfrm>
-            <a:off x="10634472" y="228600"/>
-            <a:ext cx="1371600" cy="457200"/>
+            <a:off x="822960" y="1005840"/>
+            <a:ext cx="9509760" cy="365760"/>
           </a:xfrm>
           <a:prstGeom prst="rect">
             <a:avLst/>
@@ -8593,15 +8962,15 @@
           </a:bodyPr>
           <a:lstStyle/>
           <a:p>
-            <a:pPr algn="r"/>
-            <a:r>
-              <a:rPr sz="1200" b="0" i="0">
-                <a:solidFill>
-                  <a:srgbClr val="C9A24B"/>
-                </a:solidFill>
-                <a:latin typeface="Segoe UI"/>
-              </a:rPr>
-              <a:t>04 / 21</a:t>
+            <a:pPr algn="ctr"/>
+            <a:r>
+              <a:rPr sz="1300" b="0" i="0">
+                <a:solidFill>
+                  <a:srgbClr val="2FD8C9"/>
+                </a:solidFill>
+                <a:latin typeface="Segoe UI"/>
+              </a:rPr>
+              <a:t>GRAPHICAL REPRESENTATION · TABLE 1</a:t>
             </a:r>
           </a:p>
         </p:txBody>
@@ -8614,8 +8983,8 @@
         </p:nvSpPr>
         <p:spPr>
           <a:xfrm>
-            <a:off x="822960" y="1051560"/>
-            <a:ext cx="9509760" cy="365760"/>
+            <a:off x="640080" y="1371600"/>
+            <a:ext cx="9875520" cy="640080"/>
           </a:xfrm>
           <a:prstGeom prst="rect">
             <a:avLst/>
@@ -8630,27 +8999,51 @@
           <a:p>
             <a:pPr algn="ctr"/>
             <a:r>
-              <a:rPr sz="1300" b="0" i="0">
-                <a:solidFill>
-                  <a:srgbClr val="9FBFA9"/>
-                </a:solidFill>
-                <a:latin typeface="Segoe UI"/>
-              </a:rPr>
-              <a:t>REGIONAL CONTEXT</a:t>
-            </a:r>
-          </a:p>
-        </p:txBody>
-      </p:sp>
-      <p:sp>
-        <p:nvSpPr>
-          <p:cNvPr id="4" name="TextBox 3"/>
+              <a:rPr sz="2400" b="1" i="0">
+                <a:solidFill>
+                  <a:srgbClr val="2FD8C9"/>
+                </a:solidFill>
+                <a:latin typeface="Segoe UI"/>
+              </a:rPr>
+              <a:t>Severity Map: Kidnapping &amp; Banditry by State</a:t>
+            </a:r>
+          </a:p>
+        </p:txBody>
+      </p:sp>
+      <p:pic>
+        <p:nvPicPr>
+          <p:cNvPr id="4" name="Picture 3" descr="map_severity.png"/>
+          <p:cNvPicPr>
+            <a:picLocks noChangeAspect="1"/>
+          </p:cNvPicPr>
+          <p:nvPr/>
+        </p:nvPicPr>
+        <p:blipFill>
+          <a:blip r:embed="rId2"/>
+          <a:stretch>
+            <a:fillRect/>
+          </a:stretch>
+        </p:blipFill>
+        <p:spPr>
+          <a:xfrm>
+            <a:off x="2194560" y="1965960"/>
+            <a:ext cx="4025304" cy="3246120"/>
+          </a:xfrm>
+          <a:prstGeom prst="rect">
+            <a:avLst/>
+          </a:prstGeom>
+        </p:spPr>
+      </p:pic>
+      <p:sp>
+        <p:nvSpPr>
+          <p:cNvPr id="5" name="TextBox 4"/>
           <p:cNvSpPr txBox="1"/>
           <p:nvPr/>
         </p:nvSpPr>
         <p:spPr>
           <a:xfrm>
-            <a:off x="640080" y="1417320"/>
-            <a:ext cx="9875520" cy="914400"/>
+            <a:off x="822960" y="5257800"/>
+            <a:ext cx="9509760" cy="548640"/>
           </a:xfrm>
           <a:prstGeom prst="rect">
             <a:avLst/>
@@ -8665,27 +9058,27 @@
           <a:p>
             <a:pPr algn="ctr"/>
             <a:r>
-              <a:rPr sz="3200" b="1" i="0">
-                <a:solidFill>
-                  <a:srgbClr val="C9A24B"/>
-                </a:solidFill>
-                <a:latin typeface="Segoe UI"/>
-              </a:rPr>
-              <a:t>The North-Central Security Question</a:t>
-            </a:r>
-          </a:p>
-        </p:txBody>
-      </p:sp>
-      <p:sp>
-        <p:nvSpPr>
-          <p:cNvPr id="5" name="TextBox 4"/>
+              <a:rPr sz="1000" b="0" i="1">
+                <a:solidFill>
+                  <a:srgbClr val="2FD8C9"/>
+                </a:solidFill>
+                <a:latin typeface="Segoe UI"/>
+              </a:rPr>
+              <a:t>NOTE: Gradient = pale gold (lower) to deep red (higher), scaled to each state's share of the 1,304 recorded regional incidents. Non-NC states muted for context.</a:t>
+            </a:r>
+          </a:p>
+        </p:txBody>
+      </p:sp>
+      <p:sp>
+        <p:nvSpPr>
+          <p:cNvPr id="6" name="TextBox 5"/>
           <p:cNvSpPr txBox="1"/>
           <p:nvPr/>
         </p:nvSpPr>
         <p:spPr>
           <a:xfrm>
-            <a:off x="822960" y="2468880"/>
-            <a:ext cx="9509760" cy="2011680"/>
+            <a:off x="822960" y="5806440"/>
+            <a:ext cx="9509760" cy="502920"/>
           </a:xfrm>
           <a:prstGeom prst="rect">
             <a:avLst/>
@@ -8700,48 +9093,13 @@
           <a:p>
             <a:pPr algn="ctr"/>
             <a:r>
-              <a:rPr sz="1700" b="0" i="0">
-                <a:solidFill>
-                  <a:srgbClr val="F2EFE6"/>
-                </a:solidFill>
-                <a:latin typeface="Segoe UI"/>
-              </a:rPr>
-              <a:t>Benue, Kogi, Kwara, Nasarawa, Niger, Plateau, and the FCT form the bridge between north and south — our agricultural belts, forests, highways, energy infrastructure. Increasingly, they contain terrorism, banditry, kidnapping, farmer-herder conflict and rural criminality.</a:t>
-            </a:r>
-          </a:p>
-        </p:txBody>
-      </p:sp>
-      <p:sp>
-        <p:nvSpPr>
-          <p:cNvPr id="6" name="TextBox 5"/>
-          <p:cNvSpPr txBox="1"/>
-          <p:nvPr/>
-        </p:nvSpPr>
-        <p:spPr>
-          <a:xfrm>
-            <a:off x="822960" y="5806440"/>
-            <a:ext cx="9509760" cy="685800"/>
-          </a:xfrm>
-          <a:prstGeom prst="rect">
-            <a:avLst/>
-          </a:prstGeom>
-          <a:noFill/>
-        </p:spPr>
-        <p:txBody>
-          <a:bodyPr wrap="square">
-            <a:spAutoFit/>
-          </a:bodyPr>
-          <a:lstStyle/>
-          <a:p>
-            <a:pPr algn="ctr"/>
-            <a:r>
-              <a:rPr sz="1500" b="1" i="0">
+              <a:rPr sz="1300" b="1" i="0">
                 <a:solidFill>
                   <a:srgbClr val="C9A24B"/>
                 </a:solidFill>
                 <a:latin typeface="Segoe UI"/>
               </a:rPr>
-              <a:t>SAY: The enemy does not respect state boundaries. Why should our response?</a:t>
+              <a:t>SAY: Plateau and Niger carry the deepest red — that's where this crisis is heaviest right now.</a:t>
             </a:r>
           </a:p>
         </p:txBody>
@@ -8780,8 +9138,8 @@
         </p:nvSpPr>
         <p:spPr>
           <a:xfrm>
-            <a:off x="10634472" y="228600"/>
-            <a:ext cx="1371600" cy="457200"/>
+            <a:off x="822960" y="1005840"/>
+            <a:ext cx="9509760" cy="365760"/>
           </a:xfrm>
           <a:prstGeom prst="rect">
             <a:avLst/>
@@ -8794,15 +9152,15 @@
           </a:bodyPr>
           <a:lstStyle/>
           <a:p>
-            <a:pPr algn="r"/>
-            <a:r>
-              <a:rPr sz="1200" b="0" i="0">
-                <a:solidFill>
-                  <a:srgbClr val="C9A24B"/>
-                </a:solidFill>
-                <a:latin typeface="Segoe UI"/>
-              </a:rPr>
-              <a:t>05 / 21</a:t>
+            <a:pPr algn="ctr"/>
+            <a:r>
+              <a:rPr sz="1300" b="0" i="0">
+                <a:solidFill>
+                  <a:srgbClr val="2FD8C9"/>
+                </a:solidFill>
+                <a:latin typeface="Segoe UI"/>
+              </a:rPr>
+              <a:t>GRAPHICAL REPRESENTATION · TABLE 2</a:t>
             </a:r>
           </a:p>
         </p:txBody>
@@ -8815,8 +9173,8 @@
         </p:nvSpPr>
         <p:spPr>
           <a:xfrm>
-            <a:off x="822960" y="1051560"/>
-            <a:ext cx="9509760" cy="365760"/>
+            <a:off x="640080" y="1371600"/>
+            <a:ext cx="9875520" cy="640080"/>
           </a:xfrm>
           <a:prstGeom prst="rect">
             <a:avLst/>
@@ -8831,27 +9189,51 @@
           <a:p>
             <a:pPr algn="ctr"/>
             <a:r>
-              <a:rPr sz="1300" b="0" i="0">
-                <a:solidFill>
-                  <a:srgbClr val="9FBFA9"/>
-                </a:solidFill>
-                <a:latin typeface="Segoe UI"/>
-              </a:rPr>
-              <a:t>PLATEAU STATE · CONFIRMED, NAMED INCIDENTS</a:t>
-            </a:r>
-          </a:p>
-        </p:txBody>
-      </p:sp>
-      <p:sp>
-        <p:nvSpPr>
-          <p:cNvPr id="4" name="TextBox 3"/>
+              <a:rPr sz="2400" b="1" i="0">
+                <a:solidFill>
+                  <a:srgbClr val="2FD8C9"/>
+                </a:solidFill>
+                <a:latin typeface="Segoe UI"/>
+              </a:rPr>
+              <a:t>Economic Exposure Map: The Ransom Economy by State</a:t>
+            </a:r>
+          </a:p>
+        </p:txBody>
+      </p:sp>
+      <p:pic>
+        <p:nvPicPr>
+          <p:cNvPr id="4" name="Picture 3" descr="map_economy.png"/>
+          <p:cNvPicPr>
+            <a:picLocks noChangeAspect="1"/>
+          </p:cNvPicPr>
+          <p:nvPr/>
+        </p:nvPicPr>
+        <p:blipFill>
+          <a:blip r:embed="rId2"/>
+          <a:stretch>
+            <a:fillRect/>
+          </a:stretch>
+        </p:blipFill>
+        <p:spPr>
+          <a:xfrm>
+            <a:off x="2194560" y="1965960"/>
+            <a:ext cx="4025304" cy="3246120"/>
+          </a:xfrm>
+          <a:prstGeom prst="rect">
+            <a:avLst/>
+          </a:prstGeom>
+        </p:spPr>
+      </p:pic>
+      <p:sp>
+        <p:nvSpPr>
+          <p:cNvPr id="5" name="TextBox 4"/>
           <p:cNvSpPr txBox="1"/>
           <p:nvPr/>
         </p:nvSpPr>
         <p:spPr>
           <a:xfrm>
-            <a:off x="640080" y="1417320"/>
-            <a:ext cx="9875520" cy="914400"/>
+            <a:off x="822960" y="5257800"/>
+            <a:ext cx="9509760" cy="548640"/>
           </a:xfrm>
           <a:prstGeom prst="rect">
             <a:avLst/>
@@ -8866,235 +9248,17 @@
           <a:p>
             <a:pPr algn="ctr"/>
             <a:r>
-              <a:rPr sz="3200" b="1" i="0">
-                <a:solidFill>
-                  <a:srgbClr val="C9A24B"/>
-                </a:solidFill>
-                <a:latin typeface="Segoe UI"/>
-              </a:rPr>
-              <a:t>121 Killed in 10 Weeks</a:t>
-            </a:r>
-          </a:p>
-        </p:txBody>
-      </p:sp>
-      <p:graphicFrame>
-        <p:nvGraphicFramePr>
-          <p:cNvPr id="5" name="Table 4"/>
-          <p:cNvGraphicFramePr>
-            <a:graphicFrameLocks noGrp="1"/>
-          </p:cNvGraphicFramePr>
-          <p:nvPr/>
-        </p:nvGraphicFramePr>
-        <p:xfrm>
-          <a:off x="731520" y="2377440"/>
-          <a:ext cx="9692640" cy="1463040"/>
-        </p:xfrm>
-        <a:graphic>
-          <a:graphicData uri="http://schemas.openxmlformats.org/drawingml/2006/table">
-            <a:tbl>
-              <a:tblPr firstRow="1" bandRow="1">
-                <a:tableStyleId>{5C22544A-7EE6-4342-B048-85BDC9FD1C3A}</a:tableStyleId>
-              </a:tblPr>
-              <a:tblGrid>
-                <a:gridCol w="6461760"/>
-                <a:gridCol w="3230880"/>
-              </a:tblGrid>
-              <a:tr h="365760">
-                <a:tc>
-                  <a:txBody>
-                    <a:bodyPr/>
-                    <a:lstStyle/>
-                    <a:p>
-                      <a:pPr algn="ctr"/>
-                      <a:r>
-                        <a:rPr b="1" sz="1100">
-                          <a:solidFill>
-                            <a:srgbClr val="C9A24B"/>
-                          </a:solidFill>
-                          <a:latin typeface="Segoe UI"/>
-                        </a:rPr>
-                        <a:t>Period</a:t>
-                      </a:r>
-                    </a:p>
-                  </a:txBody>
-                  <a:tcPr>
-                    <a:solidFill>
-                      <a:srgbClr val="1B3A2B"/>
-                    </a:solidFill>
-                  </a:tcPr>
-                </a:tc>
-                <a:tc>
-                  <a:txBody>
-                    <a:bodyPr/>
-                    <a:lstStyle/>
-                    <a:p>
-                      <a:pPr algn="ctr"/>
-                      <a:r>
-                        <a:rPr b="1" sz="1100">
-                          <a:solidFill>
-                            <a:srgbClr val="C9A24B"/>
-                          </a:solidFill>
-                          <a:latin typeface="Segoe UI"/>
-                        </a:rPr>
-                        <a:t>Killed</a:t>
-                      </a:r>
-                    </a:p>
-                  </a:txBody>
-                  <a:tcPr>
-                    <a:solidFill>
-                      <a:srgbClr val="1B3A2B"/>
-                    </a:solidFill>
-                  </a:tcPr>
-                </a:tc>
-              </a:tr>
-              <a:tr h="365760">
-                <a:tc>
-                  <a:txBody>
-                    <a:bodyPr/>
-                    <a:lstStyle/>
-                    <a:p>
-                      <a:pPr algn="l"/>
-                      <a:r>
-                        <a:rPr sz="1000">
-                          <a:solidFill>
-                            <a:srgbClr val="F2EFE6"/>
-                          </a:solidFill>
-                          <a:latin typeface="Segoe UI"/>
-                        </a:rPr>
-                        <a:t>May 2026</a:t>
-                      </a:r>
-                    </a:p>
-                  </a:txBody>
-                  <a:tcPr>
-                    <a:solidFill>
-                      <a:srgbClr val="16241C"/>
-                    </a:solidFill>
-                  </a:tcPr>
-                </a:tc>
-                <a:tc>
-                  <a:txBody>
-                    <a:bodyPr/>
-                    <a:lstStyle/>
-                    <a:p>
-                      <a:pPr algn="l"/>
-                      <a:r>
-                        <a:rPr sz="1000">
-                          <a:solidFill>
-                            <a:srgbClr val="F2EFE6"/>
-                          </a:solidFill>
-                          <a:latin typeface="Segoe UI"/>
-                        </a:rPr>
-                        <a:t>62</a:t>
-                      </a:r>
-                    </a:p>
-                  </a:txBody>
-                  <a:tcPr>
-                    <a:solidFill>
-                      <a:srgbClr val="16241C"/>
-                    </a:solidFill>
-                  </a:tcPr>
-                </a:tc>
-              </a:tr>
-              <a:tr h="365760">
-                <a:tc>
-                  <a:txBody>
-                    <a:bodyPr/>
-                    <a:lstStyle/>
-                    <a:p>
-                      <a:pPr algn="l"/>
-                      <a:r>
-                        <a:rPr sz="1000">
-                          <a:solidFill>
-                            <a:srgbClr val="F2EFE6"/>
-                          </a:solidFill>
-                          <a:latin typeface="Segoe UI"/>
-                        </a:rPr>
-                        <a:t>June 2026</a:t>
-                      </a:r>
-                    </a:p>
-                  </a:txBody>
-                  <a:tcPr>
-                    <a:solidFill>
-                      <a:srgbClr val="16241C"/>
-                    </a:solidFill>
-                  </a:tcPr>
-                </a:tc>
-                <a:tc>
-                  <a:txBody>
-                    <a:bodyPr/>
-                    <a:lstStyle/>
-                    <a:p>
-                      <a:pPr algn="l"/>
-                      <a:r>
-                        <a:rPr sz="1000">
-                          <a:solidFill>
-                            <a:srgbClr val="F2EFE6"/>
-                          </a:solidFill>
-                          <a:latin typeface="Segoe UI"/>
-                        </a:rPr>
-                        <a:t>43</a:t>
-                      </a:r>
-                    </a:p>
-                  </a:txBody>
-                  <a:tcPr>
-                    <a:solidFill>
-                      <a:srgbClr val="16241C"/>
-                    </a:solidFill>
-                  </a:tcPr>
-                </a:tc>
-              </a:tr>
-              <a:tr h="365760">
-                <a:tc>
-                  <a:txBody>
-                    <a:bodyPr/>
-                    <a:lstStyle/>
-                    <a:p>
-                      <a:pPr algn="l"/>
-                      <a:r>
-                        <a:rPr sz="1000">
-                          <a:solidFill>
-                            <a:srgbClr val="F2EFE6"/>
-                          </a:solidFill>
-                          <a:latin typeface="Segoe UI"/>
-                        </a:rPr>
-                        <a:t>1-11 July 2026</a:t>
-                      </a:r>
-                    </a:p>
-                  </a:txBody>
-                  <a:tcPr>
-                    <a:solidFill>
-                      <a:srgbClr val="16241C"/>
-                    </a:solidFill>
-                  </a:tcPr>
-                </a:tc>
-                <a:tc>
-                  <a:txBody>
-                    <a:bodyPr/>
-                    <a:lstStyle/>
-                    <a:p>
-                      <a:pPr algn="l"/>
-                      <a:r>
-                        <a:rPr sz="1000">
-                          <a:solidFill>
-                            <a:srgbClr val="F2EFE6"/>
-                          </a:solidFill>
-                          <a:latin typeface="Segoe UI"/>
-                        </a:rPr>
-                        <a:t>16</a:t>
-                      </a:r>
-                    </a:p>
-                  </a:txBody>
-                  <a:tcPr>
-                    <a:solidFill>
-                      <a:srgbClr val="16241C"/>
-                    </a:solidFill>
-                  </a:tcPr>
-                </a:tc>
-              </a:tr>
-            </a:tbl>
-          </a:graphicData>
-        </a:graphic>
-      </p:graphicFrame>
+              <a:rPr sz="1000" b="0" i="1">
+                <a:solidFill>
+                  <a:srgbClr val="2FD8C9"/>
+                </a:solidFill>
+                <a:latin typeface="Segoe UI"/>
+              </a:rPr>
+              <a:t>NOTE: Modeled estimate: national ransom total (N7.78bn) is not broken down per state in source data. Figures are calculated proportionally to each state's incident share - illustrative, not independently reported.</a:t>
+            </a:r>
+          </a:p>
+        </p:txBody>
+      </p:sp>
       <p:sp>
         <p:nvSpPr>
           <p:cNvPr id="6" name="TextBox 5"/>
@@ -9104,7 +9268,7 @@
         <p:spPr>
           <a:xfrm>
             <a:off x="822960" y="5806440"/>
-            <a:ext cx="9509760" cy="685800"/>
+            <a:ext cx="9509760" cy="502920"/>
           </a:xfrm>
           <a:prstGeom prst="rect">
             <a:avLst/>
@@ -9119,13 +9283,13 @@
           <a:p>
             <a:pPr algn="ctr"/>
             <a:r>
-              <a:rPr sz="1500" b="1" i="0">
+              <a:rPr sz="1300" b="1" i="0">
                 <a:solidFill>
                   <a:srgbClr val="C9A24B"/>
                 </a:solidFill>
                 <a:latin typeface="Segoe UI"/>
               </a:rPr>
-              <a:t>SAY: 121 people. One state. Ten weeks. This is happening right now.</a:t>
+              <a:t>SAY: Same pattern, different lens — where the violence is worst, the ransom economy is deepest too.</a:t>
             </a:r>
           </a:p>
         </p:txBody>
@@ -9186,7 +9350,7 @@
                 </a:solidFill>
                 <a:latin typeface="Segoe UI"/>
               </a:rPr>
-              <a:t>06 / 21</a:t>
+              <a:t>06 / 23</a:t>
             </a:r>
           </a:p>
         </p:txBody>
@@ -9221,7 +9385,7 @@
                 </a:solidFill>
                 <a:latin typeface="Segoe UI"/>
               </a:rPr>
-              <a:t>NIGER STATE · BORGU, KPENYA/DEKARA · AUG 2026</a:t>
+              <a:t>REGIONAL CONTEXT</a:t>
             </a:r>
           </a:p>
         </p:txBody>
@@ -9256,287 +9420,21 @@
                 </a:solidFill>
                 <a:latin typeface="Segoe UI"/>
               </a:rPr>
-              <a:t>A Single Operation, Hundreds of Lives</a:t>
-            </a:r>
-          </a:p>
-        </p:txBody>
-      </p:sp>
-      <p:graphicFrame>
-        <p:nvGraphicFramePr>
-          <p:cNvPr id="5" name="Table 4"/>
-          <p:cNvGraphicFramePr>
-            <a:graphicFrameLocks noGrp="1"/>
-          </p:cNvGraphicFramePr>
-          <p:nvPr/>
-        </p:nvGraphicFramePr>
-        <p:xfrm>
-          <a:off x="731520" y="2377440"/>
-          <a:ext cx="9692640" cy="1828800"/>
-        </p:xfrm>
-        <a:graphic>
-          <a:graphicData uri="http://schemas.openxmlformats.org/drawingml/2006/table">
-            <a:tbl>
-              <a:tblPr firstRow="1" bandRow="1">
-                <a:tableStyleId>{5C22544A-7EE6-4342-B048-85BDC9FD1C3A}</a:tableStyleId>
-              </a:tblPr>
-              <a:tblGrid>
-                <a:gridCol w="6461760"/>
-                <a:gridCol w="3230880"/>
-              </a:tblGrid>
-              <a:tr h="365760">
-                <a:tc>
-                  <a:txBody>
-                    <a:bodyPr/>
-                    <a:lstStyle/>
-                    <a:p>
-                      <a:pPr algn="ctr"/>
-                      <a:r>
-                        <a:rPr b="1" sz="1100">
-                          <a:solidFill>
-                            <a:srgbClr val="C9A24B"/>
-                          </a:solidFill>
-                          <a:latin typeface="Segoe UI"/>
-                        </a:rPr>
-                        <a:t>Metric</a:t>
-                      </a:r>
-                    </a:p>
-                  </a:txBody>
-                  <a:tcPr>
-                    <a:solidFill>
-                      <a:srgbClr val="1B3A2B"/>
-                    </a:solidFill>
-                  </a:tcPr>
-                </a:tc>
-                <a:tc>
-                  <a:txBody>
-                    <a:bodyPr/>
-                    <a:lstStyle/>
-                    <a:p>
-                      <a:pPr algn="ctr"/>
-                      <a:r>
-                        <a:rPr b="1" sz="1100">
-                          <a:solidFill>
-                            <a:srgbClr val="C9A24B"/>
-                          </a:solidFill>
-                          <a:latin typeface="Segoe UI"/>
-                        </a:rPr>
-                        <a:t>Figure</a:t>
-                      </a:r>
-                    </a:p>
-                  </a:txBody>
-                  <a:tcPr>
-                    <a:solidFill>
-                      <a:srgbClr val="1B3A2B"/>
-                    </a:solidFill>
-                  </a:tcPr>
-                </a:tc>
-              </a:tr>
-              <a:tr h="365760">
-                <a:tc>
-                  <a:txBody>
-                    <a:bodyPr/>
-                    <a:lstStyle/>
-                    <a:p>
-                      <a:pPr algn="l"/>
-                      <a:r>
-                        <a:rPr sz="1000">
-                          <a:solidFill>
-                            <a:srgbClr val="F2EFE6"/>
-                          </a:solidFill>
-                          <a:latin typeface="Segoe UI"/>
-                        </a:rPr>
-                        <a:t>Confirmed Killed</a:t>
-                      </a:r>
-                    </a:p>
-                  </a:txBody>
-                  <a:tcPr>
-                    <a:solidFill>
-                      <a:srgbClr val="16241C"/>
-                    </a:solidFill>
-                  </a:tcPr>
-                </a:tc>
-                <a:tc>
-                  <a:txBody>
-                    <a:bodyPr/>
-                    <a:lstStyle/>
-                    <a:p>
-                      <a:pPr algn="l"/>
-                      <a:r>
-                        <a:rPr sz="1000">
-                          <a:solidFill>
-                            <a:srgbClr val="F2EFE6"/>
-                          </a:solidFill>
-                          <a:latin typeface="Segoe UI"/>
-                        </a:rPr>
-                        <a:t>30</a:t>
-                      </a:r>
-                    </a:p>
-                  </a:txBody>
-                  <a:tcPr>
-                    <a:solidFill>
-                      <a:srgbClr val="16241C"/>
-                    </a:solidFill>
-                  </a:tcPr>
-                </a:tc>
-              </a:tr>
-              <a:tr h="365760">
-                <a:tc>
-                  <a:txBody>
-                    <a:bodyPr/>
-                    <a:lstStyle/>
-                    <a:p>
-                      <a:pPr algn="l"/>
-                      <a:r>
-                        <a:rPr sz="1000">
-                          <a:solidFill>
-                            <a:srgbClr val="F2EFE6"/>
-                          </a:solidFill>
-                          <a:latin typeface="Segoe UI"/>
-                        </a:rPr>
-                        <a:t>Abducted (Confirmed)</a:t>
-                      </a:r>
-                    </a:p>
-                  </a:txBody>
-                  <a:tcPr>
-                    <a:solidFill>
-                      <a:srgbClr val="16241C"/>
-                    </a:solidFill>
-                  </a:tcPr>
-                </a:tc>
-                <a:tc>
-                  <a:txBody>
-                    <a:bodyPr/>
-                    <a:lstStyle/>
-                    <a:p>
-                      <a:pPr algn="l"/>
-                      <a:r>
-                        <a:rPr sz="1000">
-                          <a:solidFill>
-                            <a:srgbClr val="F2EFE6"/>
-                          </a:solidFill>
-                          <a:latin typeface="Segoe UI"/>
-                        </a:rPr>
-                        <a:t>60-80</a:t>
-                      </a:r>
-                    </a:p>
-                  </a:txBody>
-                  <a:tcPr>
-                    <a:solidFill>
-                      <a:srgbClr val="16241C"/>
-                    </a:solidFill>
-                  </a:tcPr>
-                </a:tc>
-              </a:tr>
-              <a:tr h="365760">
-                <a:tc>
-                  <a:txBody>
-                    <a:bodyPr/>
-                    <a:lstStyle/>
-                    <a:p>
-                      <a:pPr algn="l"/>
-                      <a:r>
-                        <a:rPr sz="1000">
-                          <a:solidFill>
-                            <a:srgbClr val="F2EFE6"/>
-                          </a:solidFill>
-                          <a:latin typeface="Segoe UI"/>
-                        </a:rPr>
-                        <a:t>Unverified (Video)</a:t>
-                      </a:r>
-                    </a:p>
-                  </a:txBody>
-                  <a:tcPr>
-                    <a:solidFill>
-                      <a:srgbClr val="16241C"/>
-                    </a:solidFill>
-                  </a:tcPr>
-                </a:tc>
-                <a:tc>
-                  <a:txBody>
-                    <a:bodyPr/>
-                    <a:lstStyle/>
-                    <a:p>
-                      <a:pPr algn="l"/>
-                      <a:r>
-                        <a:rPr sz="1000">
-                          <a:solidFill>
-                            <a:srgbClr val="F2EFE6"/>
-                          </a:solidFill>
-                          <a:latin typeface="Segoe UI"/>
-                        </a:rPr>
-                        <a:t>600</a:t>
-                      </a:r>
-                    </a:p>
-                  </a:txBody>
-                  <a:tcPr>
-                    <a:solidFill>
-                      <a:srgbClr val="16241C"/>
-                    </a:solidFill>
-                  </a:tcPr>
-                </a:tc>
-              </a:tr>
-              <a:tr h="365760">
-                <a:tc>
-                  <a:txBody>
-                    <a:bodyPr/>
-                    <a:lstStyle/>
-                    <a:p>
-                      <a:pPr algn="l"/>
-                      <a:r>
-                        <a:rPr sz="1000">
-                          <a:solidFill>
-                            <a:srgbClr val="F2EFE6"/>
-                          </a:solidFill>
-                          <a:latin typeface="Segoe UI"/>
-                        </a:rPr>
-                        <a:t>Fled to Benin Republic</a:t>
-                      </a:r>
-                    </a:p>
-                  </a:txBody>
-                  <a:tcPr>
-                    <a:solidFill>
-                      <a:srgbClr val="16241C"/>
-                    </a:solidFill>
-                  </a:tcPr>
-                </a:tc>
-                <a:tc>
-                  <a:txBody>
-                    <a:bodyPr/>
-                    <a:lstStyle/>
-                    <a:p>
-                      <a:pPr algn="l"/>
-                      <a:r>
-                        <a:rPr sz="1000">
-                          <a:solidFill>
-                            <a:srgbClr val="F2EFE6"/>
-                          </a:solidFill>
-                          <a:latin typeface="Segoe UI"/>
-                        </a:rPr>
-                        <a:t>~2,000</a:t>
-                      </a:r>
-                    </a:p>
-                  </a:txBody>
-                  <a:tcPr>
-                    <a:solidFill>
-                      <a:srgbClr val="16241C"/>
-                    </a:solidFill>
-                  </a:tcPr>
-                </a:tc>
-              </a:tr>
-            </a:tbl>
-          </a:graphicData>
-        </a:graphic>
-      </p:graphicFrame>
-      <p:sp>
-        <p:nvSpPr>
-          <p:cNvPr id="6" name="TextBox 5"/>
+              <a:t>The North-Central Security Question</a:t>
+            </a:r>
+          </a:p>
+        </p:txBody>
+      </p:sp>
+      <p:sp>
+        <p:nvSpPr>
+          <p:cNvPr id="5" name="TextBox 4"/>
           <p:cNvSpPr txBox="1"/>
           <p:nvPr/>
         </p:nvSpPr>
         <p:spPr>
           <a:xfrm>
-            <a:off x="822960" y="5806440"/>
-            <a:ext cx="9509760" cy="685800"/>
+            <a:off x="822960" y="2468880"/>
+            <a:ext cx="9509760" cy="2011680"/>
           </a:xfrm>
           <a:prstGeom prst="rect">
             <a:avLst/>
@@ -9551,13 +9449,48 @@
           <a:p>
             <a:pPr algn="ctr"/>
             <a:r>
+              <a:rPr sz="1700" b="0" i="0">
+                <a:solidFill>
+                  <a:srgbClr val="F2EFE6"/>
+                </a:solidFill>
+                <a:latin typeface="Segoe UI"/>
+              </a:rPr>
+              <a:t>Benue, Kogi, Kwara, Nasarawa, Niger, Plateau, and the FCT form the bridge between north and south — our agricultural belts, forests, highways, energy infrastructure. Increasingly, they contain terrorism, banditry, kidnapping, farmer-herder conflict and rural criminality.</a:t>
+            </a:r>
+          </a:p>
+        </p:txBody>
+      </p:sp>
+      <p:sp>
+        <p:nvSpPr>
+          <p:cNvPr id="6" name="TextBox 5"/>
+          <p:cNvSpPr txBox="1"/>
+          <p:nvPr/>
+        </p:nvSpPr>
+        <p:spPr>
+          <a:xfrm>
+            <a:off x="822960" y="5806440"/>
+            <a:ext cx="9509760" cy="685800"/>
+          </a:xfrm>
+          <a:prstGeom prst="rect">
+            <a:avLst/>
+          </a:prstGeom>
+          <a:noFill/>
+        </p:spPr>
+        <p:txBody>
+          <a:bodyPr wrap="square">
+            <a:spAutoFit/>
+          </a:bodyPr>
+          <a:lstStyle/>
+          <a:p>
+            <a:pPr algn="ctr"/>
+            <a:r>
               <a:rPr sz="1500" b="1" i="0">
                 <a:solidFill>
                   <a:srgbClr val="C9A24B"/>
                 </a:solidFill>
                 <a:latin typeface="Segoe UI"/>
               </a:rPr>
-              <a:t>SAY: One raid emptied entire villages — some fled the country to survive.</a:t>
+              <a:t>SAY: The enemy does not respect state boundaries. Why should our response?</a:t>
             </a:r>
           </a:p>
         </p:txBody>
@@ -9618,7 +9551,7 @@
                 </a:solidFill>
                 <a:latin typeface="Segoe UI"/>
               </a:rPr>
-              <a:t>07 / 21</a:t>
+              <a:t>07 / 23</a:t>
             </a:r>
           </a:p>
         </p:txBody>
@@ -9653,7 +9586,7 @@
                 </a:solidFill>
                 <a:latin typeface="Segoe UI"/>
               </a:rPr>
-              <a:t>FULL REGIONAL TOTALS · 7 NORTH-CENTRAL UNITS</a:t>
+              <a:t>PLATEAU STATE · CONFIRMED, NAMED INCIDENTS</a:t>
             </a:r>
           </a:p>
         </p:txBody>
@@ -9688,7 +9621,7 @@
                 </a:solidFill>
                 <a:latin typeface="Segoe UI"/>
               </a:rPr>
-              <a:t>Every State Carries a Share</a:t>
+              <a:t>121 Killed in 10 Weeks</a:t>
             </a:r>
           </a:p>
         </p:txBody>
@@ -9702,8 +9635,8 @@
           <p:nvPr/>
         </p:nvGraphicFramePr>
         <p:xfrm>
-          <a:off x="731520" y="2286000"/>
-          <a:ext cx="9692640" cy="2651760"/>
+          <a:off x="731520" y="2377440"/>
+          <a:ext cx="9692640" cy="1463040"/>
         </p:xfrm>
         <a:graphic>
           <a:graphicData uri="http://schemas.openxmlformats.org/drawingml/2006/table">
@@ -9715,7 +9648,7 @@
                 <a:gridCol w="6461760"/>
                 <a:gridCol w="3230880"/>
               </a:tblGrid>
-              <a:tr h="331470">
+              <a:tr h="365760">
                 <a:tc>
                   <a:txBody>
                     <a:bodyPr/>
@@ -9729,7 +9662,7 @@
                           </a:solidFill>
                           <a:latin typeface="Segoe UI"/>
                         </a:rPr>
-                        <a:t>State</a:t>
+                        <a:t>Period</a:t>
                       </a:r>
                     </a:p>
                   </a:txBody>
@@ -9752,7 +9685,7 @@
                           </a:solidFill>
                           <a:latin typeface="Segoe UI"/>
                         </a:rPr>
-                        <a:t>Total</a:t>
+                        <a:t>Killed</a:t>
                       </a:r>
                     </a:p>
                   </a:txBody>
@@ -9763,7 +9696,7 @@
                   </a:tcPr>
                 </a:tc>
               </a:tr>
-              <a:tr h="331470">
+              <a:tr h="365760">
                 <a:tc>
                   <a:txBody>
                     <a:bodyPr/>
@@ -9777,7 +9710,7 @@
                           </a:solidFill>
                           <a:latin typeface="Segoe UI"/>
                         </a:rPr>
-                        <a:t>Plateau</a:t>
+                        <a:t>May 2026</a:t>
                       </a:r>
                     </a:p>
                   </a:txBody>
@@ -9800,7 +9733,7 @@
                           </a:solidFill>
                           <a:latin typeface="Segoe UI"/>
                         </a:rPr>
-                        <a:t>430</a:t>
+                        <a:t>62</a:t>
                       </a:r>
                     </a:p>
                   </a:txBody>
@@ -9811,7 +9744,7 @@
                   </a:tcPr>
                 </a:tc>
               </a:tr>
-              <a:tr h="331470">
+              <a:tr h="365760">
                 <a:tc>
                   <a:txBody>
                     <a:bodyPr/>
@@ -9825,7 +9758,7 @@
                           </a:solidFill>
                           <a:latin typeface="Segoe UI"/>
                         </a:rPr>
-                        <a:t>Niger</a:t>
+                        <a:t>June 2026</a:t>
                       </a:r>
                     </a:p>
                   </a:txBody>
@@ -9848,7 +9781,7 @@
                           </a:solidFill>
                           <a:latin typeface="Segoe UI"/>
                         </a:rPr>
-                        <a:t>400</a:t>
+                        <a:t>43</a:t>
                       </a:r>
                     </a:p>
                   </a:txBody>
@@ -9859,7 +9792,7 @@
                   </a:tcPr>
                 </a:tc>
               </a:tr>
-              <a:tr h="331470">
+              <a:tr h="365760">
                 <a:tc>
                   <a:txBody>
                     <a:bodyPr/>
@@ -9873,7 +9806,7 @@
                           </a:solidFill>
                           <a:latin typeface="Segoe UI"/>
                         </a:rPr>
-                        <a:t>Benue</a:t>
+                        <a:t>1-11 July 2026</a:t>
                       </a:r>
                     </a:p>
                   </a:txBody>
@@ -9896,199 +9829,7 @@
                           </a:solidFill>
                           <a:latin typeface="Segoe UI"/>
                         </a:rPr>
-                        <a:t>330</a:t>
-                      </a:r>
-                    </a:p>
-                  </a:txBody>
-                  <a:tcPr>
-                    <a:solidFill>
-                      <a:srgbClr val="16241C"/>
-                    </a:solidFill>
-                  </a:tcPr>
-                </a:tc>
-              </a:tr>
-              <a:tr h="331470">
-                <a:tc>
-                  <a:txBody>
-                    <a:bodyPr/>
-                    <a:lstStyle/>
-                    <a:p>
-                      <a:pPr algn="l"/>
-                      <a:r>
-                        <a:rPr sz="1000">
-                          <a:solidFill>
-                            <a:srgbClr val="F2EFE6"/>
-                          </a:solidFill>
-                          <a:latin typeface="Segoe UI"/>
-                        </a:rPr>
-                        <a:t>Kwara</a:t>
-                      </a:r>
-                    </a:p>
-                  </a:txBody>
-                  <a:tcPr>
-                    <a:solidFill>
-                      <a:srgbClr val="16241C"/>
-                    </a:solidFill>
-                  </a:tcPr>
-                </a:tc>
-                <a:tc>
-                  <a:txBody>
-                    <a:bodyPr/>
-                    <a:lstStyle/>
-                    <a:p>
-                      <a:pPr algn="l"/>
-                      <a:r>
-                        <a:rPr sz="1000">
-                          <a:solidFill>
-                            <a:srgbClr val="F2EFE6"/>
-                          </a:solidFill>
-                          <a:latin typeface="Segoe UI"/>
-                        </a:rPr>
-                        <a:t>50</a:t>
-                      </a:r>
-                    </a:p>
-                  </a:txBody>
-                  <a:tcPr>
-                    <a:solidFill>
-                      <a:srgbClr val="16241C"/>
-                    </a:solidFill>
-                  </a:tcPr>
-                </a:tc>
-              </a:tr>
-              <a:tr h="331470">
-                <a:tc>
-                  <a:txBody>
-                    <a:bodyPr/>
-                    <a:lstStyle/>
-                    <a:p>
-                      <a:pPr algn="l"/>
-                      <a:r>
-                        <a:rPr sz="1000">
-                          <a:solidFill>
-                            <a:srgbClr val="F2EFE6"/>
-                          </a:solidFill>
-                          <a:latin typeface="Segoe UI"/>
-                        </a:rPr>
-                        <a:t>Kogi</a:t>
-                      </a:r>
-                    </a:p>
-                  </a:txBody>
-                  <a:tcPr>
-                    <a:solidFill>
-                      <a:srgbClr val="16241C"/>
-                    </a:solidFill>
-                  </a:tcPr>
-                </a:tc>
-                <a:tc>
-                  <a:txBody>
-                    <a:bodyPr/>
-                    <a:lstStyle/>
-                    <a:p>
-                      <a:pPr algn="l"/>
-                      <a:r>
-                        <a:rPr sz="1000">
-                          <a:solidFill>
-                            <a:srgbClr val="F2EFE6"/>
-                          </a:solidFill>
-                          <a:latin typeface="Segoe UI"/>
-                        </a:rPr>
-                        <a:t>40</a:t>
-                      </a:r>
-                    </a:p>
-                  </a:txBody>
-                  <a:tcPr>
-                    <a:solidFill>
-                      <a:srgbClr val="16241C"/>
-                    </a:solidFill>
-                  </a:tcPr>
-                </a:tc>
-              </a:tr>
-              <a:tr h="331470">
-                <a:tc>
-                  <a:txBody>
-                    <a:bodyPr/>
-                    <a:lstStyle/>
-                    <a:p>
-                      <a:pPr algn="l"/>
-                      <a:r>
-                        <a:rPr sz="1000">
-                          <a:solidFill>
-                            <a:srgbClr val="F2EFE6"/>
-                          </a:solidFill>
-                          <a:latin typeface="Segoe UI"/>
-                        </a:rPr>
-                        <a:t>Nasarawa</a:t>
-                      </a:r>
-                    </a:p>
-                  </a:txBody>
-                  <a:tcPr>
-                    <a:solidFill>
-                      <a:srgbClr val="16241C"/>
-                    </a:solidFill>
-                  </a:tcPr>
-                </a:tc>
-                <a:tc>
-                  <a:txBody>
-                    <a:bodyPr/>
-                    <a:lstStyle/>
-                    <a:p>
-                      <a:pPr algn="l"/>
-                      <a:r>
-                        <a:rPr sz="1000">
-                          <a:solidFill>
-                            <a:srgbClr val="F2EFE6"/>
-                          </a:solidFill>
-                          <a:latin typeface="Segoe UI"/>
-                        </a:rPr>
-                        <a:t>32</a:t>
-                      </a:r>
-                    </a:p>
-                  </a:txBody>
-                  <a:tcPr>
-                    <a:solidFill>
-                      <a:srgbClr val="16241C"/>
-                    </a:solidFill>
-                  </a:tcPr>
-                </a:tc>
-              </a:tr>
-              <a:tr h="331470">
-                <a:tc>
-                  <a:txBody>
-                    <a:bodyPr/>
-                    <a:lstStyle/>
-                    <a:p>
-                      <a:pPr algn="l"/>
-                      <a:r>
-                        <a:rPr sz="1000">
-                          <a:solidFill>
-                            <a:srgbClr val="F2EFE6"/>
-                          </a:solidFill>
-                          <a:latin typeface="Segoe UI"/>
-                        </a:rPr>
-                        <a:t>FCT</a:t>
-                      </a:r>
-                    </a:p>
-                  </a:txBody>
-                  <a:tcPr>
-                    <a:solidFill>
-                      <a:srgbClr val="16241C"/>
-                    </a:solidFill>
-                  </a:tcPr>
-                </a:tc>
-                <a:tc>
-                  <a:txBody>
-                    <a:bodyPr/>
-                    <a:lstStyle/>
-                    <a:p>
-                      <a:pPr algn="l"/>
-                      <a:r>
-                        <a:rPr sz="1000">
-                          <a:solidFill>
-                            <a:srgbClr val="F2EFE6"/>
-                          </a:solidFill>
-                          <a:latin typeface="Segoe UI"/>
-                        </a:rPr>
-                        <a:t>22</a:t>
+                        <a:t>16</a:t>
                       </a:r>
                     </a:p>
                   </a:txBody>
@@ -10133,7 +9874,7 @@
                 </a:solidFill>
                 <a:latin typeface="Segoe UI"/>
               </a:rPr>
-              <a:t>SAY: No state in this region is untouched — this is a regional emergency.</a:t>
+              <a:t>SAY: 121 people. One state. Ten weeks. This is happening right now.</a:t>
             </a:r>
           </a:p>
         </p:txBody>
@@ -10194,7 +9935,7 @@
                 </a:solidFill>
                 <a:latin typeface="Segoe UI"/>
               </a:rPr>
-              <a:t>08 / 21</a:t>
+              <a:t>08 / 23</a:t>
             </a:r>
           </a:p>
         </p:txBody>
@@ -10229,7 +9970,7 @@
                 </a:solidFill>
                 <a:latin typeface="Segoe UI"/>
               </a:rPr>
-              <a:t>UNDERSTANDING THE THREAT</a:t>
+              <a:t>NIGER STATE · BORGU, KPENYA/DEKARA · AUG 2026</a:t>
             </a:r>
           </a:p>
         </p:txBody>
@@ -10264,21 +10005,287 @@
                 </a:solidFill>
                 <a:latin typeface="Segoe UI"/>
               </a:rPr>
-              <a:t>The Ransom Economy Self-Funds</a:t>
-            </a:r>
-          </a:p>
-        </p:txBody>
-      </p:sp>
-      <p:sp>
-        <p:nvSpPr>
-          <p:cNvPr id="5" name="TextBox 4"/>
+              <a:t>A Single Operation, Hundreds of Lives</a:t>
+            </a:r>
+          </a:p>
+        </p:txBody>
+      </p:sp>
+      <p:graphicFrame>
+        <p:nvGraphicFramePr>
+          <p:cNvPr id="5" name="Table 4"/>
+          <p:cNvGraphicFramePr>
+            <a:graphicFrameLocks noGrp="1"/>
+          </p:cNvGraphicFramePr>
+          <p:nvPr/>
+        </p:nvGraphicFramePr>
+        <p:xfrm>
+          <a:off x="731520" y="2377440"/>
+          <a:ext cx="9692640" cy="1828800"/>
+        </p:xfrm>
+        <a:graphic>
+          <a:graphicData uri="http://schemas.openxmlformats.org/drawingml/2006/table">
+            <a:tbl>
+              <a:tblPr firstRow="1" bandRow="1">
+                <a:tableStyleId>{5C22544A-7EE6-4342-B048-85BDC9FD1C3A}</a:tableStyleId>
+              </a:tblPr>
+              <a:tblGrid>
+                <a:gridCol w="6461760"/>
+                <a:gridCol w="3230880"/>
+              </a:tblGrid>
+              <a:tr h="365760">
+                <a:tc>
+                  <a:txBody>
+                    <a:bodyPr/>
+                    <a:lstStyle/>
+                    <a:p>
+                      <a:pPr algn="ctr"/>
+                      <a:r>
+                        <a:rPr b="1" sz="1100">
+                          <a:solidFill>
+                            <a:srgbClr val="C9A24B"/>
+                          </a:solidFill>
+                          <a:latin typeface="Segoe UI"/>
+                        </a:rPr>
+                        <a:t>Metric</a:t>
+                      </a:r>
+                    </a:p>
+                  </a:txBody>
+                  <a:tcPr>
+                    <a:solidFill>
+                      <a:srgbClr val="1B3A2B"/>
+                    </a:solidFill>
+                  </a:tcPr>
+                </a:tc>
+                <a:tc>
+                  <a:txBody>
+                    <a:bodyPr/>
+                    <a:lstStyle/>
+                    <a:p>
+                      <a:pPr algn="ctr"/>
+                      <a:r>
+                        <a:rPr b="1" sz="1100">
+                          <a:solidFill>
+                            <a:srgbClr val="C9A24B"/>
+                          </a:solidFill>
+                          <a:latin typeface="Segoe UI"/>
+                        </a:rPr>
+                        <a:t>Figure</a:t>
+                      </a:r>
+                    </a:p>
+                  </a:txBody>
+                  <a:tcPr>
+                    <a:solidFill>
+                      <a:srgbClr val="1B3A2B"/>
+                    </a:solidFill>
+                  </a:tcPr>
+                </a:tc>
+              </a:tr>
+              <a:tr h="365760">
+                <a:tc>
+                  <a:txBody>
+                    <a:bodyPr/>
+                    <a:lstStyle/>
+                    <a:p>
+                      <a:pPr algn="l"/>
+                      <a:r>
+                        <a:rPr sz="1000">
+                          <a:solidFill>
+                            <a:srgbClr val="F2EFE6"/>
+                          </a:solidFill>
+                          <a:latin typeface="Segoe UI"/>
+                        </a:rPr>
+                        <a:t>Confirmed Killed</a:t>
+                      </a:r>
+                    </a:p>
+                  </a:txBody>
+                  <a:tcPr>
+                    <a:solidFill>
+                      <a:srgbClr val="16241C"/>
+                    </a:solidFill>
+                  </a:tcPr>
+                </a:tc>
+                <a:tc>
+                  <a:txBody>
+                    <a:bodyPr/>
+                    <a:lstStyle/>
+                    <a:p>
+                      <a:pPr algn="l"/>
+                      <a:r>
+                        <a:rPr sz="1000">
+                          <a:solidFill>
+                            <a:srgbClr val="F2EFE6"/>
+                          </a:solidFill>
+                          <a:latin typeface="Segoe UI"/>
+                        </a:rPr>
+                        <a:t>30</a:t>
+                      </a:r>
+                    </a:p>
+                  </a:txBody>
+                  <a:tcPr>
+                    <a:solidFill>
+                      <a:srgbClr val="16241C"/>
+                    </a:solidFill>
+                  </a:tcPr>
+                </a:tc>
+              </a:tr>
+              <a:tr h="365760">
+                <a:tc>
+                  <a:txBody>
+                    <a:bodyPr/>
+                    <a:lstStyle/>
+                    <a:p>
+                      <a:pPr algn="l"/>
+                      <a:r>
+                        <a:rPr sz="1000">
+                          <a:solidFill>
+                            <a:srgbClr val="F2EFE6"/>
+                          </a:solidFill>
+                          <a:latin typeface="Segoe UI"/>
+                        </a:rPr>
+                        <a:t>Abducted (Confirmed)</a:t>
+                      </a:r>
+                    </a:p>
+                  </a:txBody>
+                  <a:tcPr>
+                    <a:solidFill>
+                      <a:srgbClr val="16241C"/>
+                    </a:solidFill>
+                  </a:tcPr>
+                </a:tc>
+                <a:tc>
+                  <a:txBody>
+                    <a:bodyPr/>
+                    <a:lstStyle/>
+                    <a:p>
+                      <a:pPr algn="l"/>
+                      <a:r>
+                        <a:rPr sz="1000">
+                          <a:solidFill>
+                            <a:srgbClr val="F2EFE6"/>
+                          </a:solidFill>
+                          <a:latin typeface="Segoe UI"/>
+                        </a:rPr>
+                        <a:t>60-80</a:t>
+                      </a:r>
+                    </a:p>
+                  </a:txBody>
+                  <a:tcPr>
+                    <a:solidFill>
+                      <a:srgbClr val="16241C"/>
+                    </a:solidFill>
+                  </a:tcPr>
+                </a:tc>
+              </a:tr>
+              <a:tr h="365760">
+                <a:tc>
+                  <a:txBody>
+                    <a:bodyPr/>
+                    <a:lstStyle/>
+                    <a:p>
+                      <a:pPr algn="l"/>
+                      <a:r>
+                        <a:rPr sz="1000">
+                          <a:solidFill>
+                            <a:srgbClr val="F2EFE6"/>
+                          </a:solidFill>
+                          <a:latin typeface="Segoe UI"/>
+                        </a:rPr>
+                        <a:t>Unverified (Video)</a:t>
+                      </a:r>
+                    </a:p>
+                  </a:txBody>
+                  <a:tcPr>
+                    <a:solidFill>
+                      <a:srgbClr val="16241C"/>
+                    </a:solidFill>
+                  </a:tcPr>
+                </a:tc>
+                <a:tc>
+                  <a:txBody>
+                    <a:bodyPr/>
+                    <a:lstStyle/>
+                    <a:p>
+                      <a:pPr algn="l"/>
+                      <a:r>
+                        <a:rPr sz="1000">
+                          <a:solidFill>
+                            <a:srgbClr val="F2EFE6"/>
+                          </a:solidFill>
+                          <a:latin typeface="Segoe UI"/>
+                        </a:rPr>
+                        <a:t>600</a:t>
+                      </a:r>
+                    </a:p>
+                  </a:txBody>
+                  <a:tcPr>
+                    <a:solidFill>
+                      <a:srgbClr val="16241C"/>
+                    </a:solidFill>
+                  </a:tcPr>
+                </a:tc>
+              </a:tr>
+              <a:tr h="365760">
+                <a:tc>
+                  <a:txBody>
+                    <a:bodyPr/>
+                    <a:lstStyle/>
+                    <a:p>
+                      <a:pPr algn="l"/>
+                      <a:r>
+                        <a:rPr sz="1000">
+                          <a:solidFill>
+                            <a:srgbClr val="F2EFE6"/>
+                          </a:solidFill>
+                          <a:latin typeface="Segoe UI"/>
+                        </a:rPr>
+                        <a:t>Fled to Benin Republic</a:t>
+                      </a:r>
+                    </a:p>
+                  </a:txBody>
+                  <a:tcPr>
+                    <a:solidFill>
+                      <a:srgbClr val="16241C"/>
+                    </a:solidFill>
+                  </a:tcPr>
+                </a:tc>
+                <a:tc>
+                  <a:txBody>
+                    <a:bodyPr/>
+                    <a:lstStyle/>
+                    <a:p>
+                      <a:pPr algn="l"/>
+                      <a:r>
+                        <a:rPr sz="1000">
+                          <a:solidFill>
+                            <a:srgbClr val="F2EFE6"/>
+                          </a:solidFill>
+                          <a:latin typeface="Segoe UI"/>
+                        </a:rPr>
+                        <a:t>~2,000</a:t>
+                      </a:r>
+                    </a:p>
+                  </a:txBody>
+                  <a:tcPr>
+                    <a:solidFill>
+                      <a:srgbClr val="16241C"/>
+                    </a:solidFill>
+                  </a:tcPr>
+                </a:tc>
+              </a:tr>
+            </a:tbl>
+          </a:graphicData>
+        </a:graphic>
+      </p:graphicFrame>
+      <p:sp>
+        <p:nvSpPr>
+          <p:cNvPr id="6" name="TextBox 5"/>
           <p:cNvSpPr txBox="1"/>
           <p:nvPr/>
         </p:nvSpPr>
         <p:spPr>
           <a:xfrm>
-            <a:off x="822960" y="2651760"/>
-            <a:ext cx="9509760" cy="1371600"/>
+            <a:off x="822960" y="5806440"/>
+            <a:ext cx="9509760" cy="685800"/>
           </a:xfrm>
           <a:prstGeom prst="rect">
             <a:avLst/>
@@ -10293,48 +10300,13 @@
           <a:p>
             <a:pPr algn="ctr"/>
             <a:r>
-              <a:rPr sz="1800" b="1" i="0">
-                <a:solidFill>
-                  <a:srgbClr val="B23A3A"/>
-                </a:solidFill>
-                <a:latin typeface="Segoe UI"/>
-              </a:rPr>
-              <a:t>1. Abduct → 2. Hold → 3. Collect (₦7.78bn/12mo) → 4. Reinvest (weapons, transport, recruits) → 5. Repeat, stronger</a:t>
-            </a:r>
-          </a:p>
-        </p:txBody>
-      </p:sp>
-      <p:sp>
-        <p:nvSpPr>
-          <p:cNvPr id="6" name="TextBox 5"/>
-          <p:cNvSpPr txBox="1"/>
-          <p:nvPr/>
-        </p:nvSpPr>
-        <p:spPr>
-          <a:xfrm>
-            <a:off x="822960" y="5806440"/>
-            <a:ext cx="9509760" cy="685800"/>
-          </a:xfrm>
-          <a:prstGeom prst="rect">
-            <a:avLst/>
-          </a:prstGeom>
-          <a:noFill/>
-        </p:spPr>
-        <p:txBody>
-          <a:bodyPr wrap="square">
-            <a:spAutoFit/>
-          </a:bodyPr>
-          <a:lstStyle/>
-          <a:p>
-            <a:pPr algn="ctr"/>
-            <a:r>
               <a:rPr sz="1500" b="1" i="0">
                 <a:solidFill>
                   <a:srgbClr val="C9A24B"/>
                 </a:solidFill>
                 <a:latin typeface="Segoe UI"/>
               </a:rPr>
-              <a:t>SAY: Every naira paid in ransom funds the next attack. It's a business model.</a:t>
+              <a:t>SAY: One raid emptied entire villages — some fled the country to survive.</a:t>
             </a:r>
           </a:p>
         </p:txBody>
@@ -10395,7 +10367,7 @@
                 </a:solidFill>
                 <a:latin typeface="Segoe UI"/>
               </a:rPr>
-              <a:t>09 / 21</a:t>
+              <a:t>09 / 23</a:t>
             </a:r>
           </a:p>
         </p:txBody>
@@ -10408,8 +10380,8 @@
         </p:nvSpPr>
         <p:spPr>
           <a:xfrm>
-            <a:off x="640080" y="2011680"/>
-            <a:ext cx="9875520" cy="914400"/>
+            <a:off x="822960" y="1051560"/>
+            <a:ext cx="9509760" cy="365760"/>
           </a:xfrm>
           <a:prstGeom prst="rect">
             <a:avLst/>
@@ -10424,13 +10396,13 @@
           <a:p>
             <a:pPr algn="ctr"/>
             <a:r>
-              <a:rPr sz="3000" b="1" i="0">
-                <a:solidFill>
-                  <a:srgbClr val="B23A3A"/>
-                </a:solidFill>
-                <a:latin typeface="Segoe UI"/>
-              </a:rPr>
-              <a:t>THIS IS A DEVELOPMENT EMERGENCY</a:t>
+              <a:rPr sz="1300" b="0" i="0">
+                <a:solidFill>
+                  <a:srgbClr val="9FBFA9"/>
+                </a:solidFill>
+                <a:latin typeface="Segoe UI"/>
+              </a:rPr>
+              <a:t>FULL REGIONAL TOTALS · 7 NORTH-CENTRAL UNITS</a:t>
             </a:r>
           </a:p>
         </p:txBody>
@@ -10443,8 +10415,8 @@
         </p:nvSpPr>
         <p:spPr>
           <a:xfrm>
-            <a:off x="822960" y="3017520"/>
-            <a:ext cx="9509760" cy="1371600"/>
+            <a:off x="640080" y="1417320"/>
+            <a:ext cx="9875520" cy="914400"/>
           </a:xfrm>
           <a:prstGeom prst="rect">
             <a:avLst/>
@@ -10459,20 +10431,430 @@
           <a:p>
             <a:pPr algn="ctr"/>
             <a:r>
-              <a:rPr sz="1800" b="0" i="1">
-                <a:solidFill>
-                  <a:srgbClr val="F2EFE6"/>
-                </a:solidFill>
-                <a:latin typeface="Segoe UI"/>
-              </a:rPr>
-              <a:t>Not merely a law-and-order problem. Lost harvests. Interrupted schooling. A generation growing up distrustful of the state.</a:t>
-            </a:r>
-          </a:p>
-        </p:txBody>
-      </p:sp>
-      <p:sp>
-        <p:nvSpPr>
-          <p:cNvPr id="5" name="TextBox 4"/>
+              <a:rPr sz="3200" b="1" i="0">
+                <a:solidFill>
+                  <a:srgbClr val="C9A24B"/>
+                </a:solidFill>
+                <a:latin typeface="Segoe UI"/>
+              </a:rPr>
+              <a:t>Every State Carries a Share</a:t>
+            </a:r>
+          </a:p>
+        </p:txBody>
+      </p:sp>
+      <p:graphicFrame>
+        <p:nvGraphicFramePr>
+          <p:cNvPr id="5" name="Table 4"/>
+          <p:cNvGraphicFramePr>
+            <a:graphicFrameLocks noGrp="1"/>
+          </p:cNvGraphicFramePr>
+          <p:nvPr/>
+        </p:nvGraphicFramePr>
+        <p:xfrm>
+          <a:off x="731520" y="2286000"/>
+          <a:ext cx="9692640" cy="2651760"/>
+        </p:xfrm>
+        <a:graphic>
+          <a:graphicData uri="http://schemas.openxmlformats.org/drawingml/2006/table">
+            <a:tbl>
+              <a:tblPr firstRow="1" bandRow="1">
+                <a:tableStyleId>{5C22544A-7EE6-4342-B048-85BDC9FD1C3A}</a:tableStyleId>
+              </a:tblPr>
+              <a:tblGrid>
+                <a:gridCol w="6461760"/>
+                <a:gridCol w="3230880"/>
+              </a:tblGrid>
+              <a:tr h="331470">
+                <a:tc>
+                  <a:txBody>
+                    <a:bodyPr/>
+                    <a:lstStyle/>
+                    <a:p>
+                      <a:pPr algn="ctr"/>
+                      <a:r>
+                        <a:rPr b="1" sz="1100">
+                          <a:solidFill>
+                            <a:srgbClr val="C9A24B"/>
+                          </a:solidFill>
+                          <a:latin typeface="Segoe UI"/>
+                        </a:rPr>
+                        <a:t>State</a:t>
+                      </a:r>
+                    </a:p>
+                  </a:txBody>
+                  <a:tcPr>
+                    <a:solidFill>
+                      <a:srgbClr val="1B3A2B"/>
+                    </a:solidFill>
+                  </a:tcPr>
+                </a:tc>
+                <a:tc>
+                  <a:txBody>
+                    <a:bodyPr/>
+                    <a:lstStyle/>
+                    <a:p>
+                      <a:pPr algn="ctr"/>
+                      <a:r>
+                        <a:rPr b="1" sz="1100">
+                          <a:solidFill>
+                            <a:srgbClr val="C9A24B"/>
+                          </a:solidFill>
+                          <a:latin typeface="Segoe UI"/>
+                        </a:rPr>
+                        <a:t>Total</a:t>
+                      </a:r>
+                    </a:p>
+                  </a:txBody>
+                  <a:tcPr>
+                    <a:solidFill>
+                      <a:srgbClr val="1B3A2B"/>
+                    </a:solidFill>
+                  </a:tcPr>
+                </a:tc>
+              </a:tr>
+              <a:tr h="331470">
+                <a:tc>
+                  <a:txBody>
+                    <a:bodyPr/>
+                    <a:lstStyle/>
+                    <a:p>
+                      <a:pPr algn="l"/>
+                      <a:r>
+                        <a:rPr sz="1000">
+                          <a:solidFill>
+                            <a:srgbClr val="F2EFE6"/>
+                          </a:solidFill>
+                          <a:latin typeface="Segoe UI"/>
+                        </a:rPr>
+                        <a:t>Plateau</a:t>
+                      </a:r>
+                    </a:p>
+                  </a:txBody>
+                  <a:tcPr>
+                    <a:solidFill>
+                      <a:srgbClr val="16241C"/>
+                    </a:solidFill>
+                  </a:tcPr>
+                </a:tc>
+                <a:tc>
+                  <a:txBody>
+                    <a:bodyPr/>
+                    <a:lstStyle/>
+                    <a:p>
+                      <a:pPr algn="l"/>
+                      <a:r>
+                        <a:rPr sz="1000">
+                          <a:solidFill>
+                            <a:srgbClr val="F2EFE6"/>
+                          </a:solidFill>
+                          <a:latin typeface="Segoe UI"/>
+                        </a:rPr>
+                        <a:t>430</a:t>
+                      </a:r>
+                    </a:p>
+                  </a:txBody>
+                  <a:tcPr>
+                    <a:solidFill>
+                      <a:srgbClr val="16241C"/>
+                    </a:solidFill>
+                  </a:tcPr>
+                </a:tc>
+              </a:tr>
+              <a:tr h="331470">
+                <a:tc>
+                  <a:txBody>
+                    <a:bodyPr/>
+                    <a:lstStyle/>
+                    <a:p>
+                      <a:pPr algn="l"/>
+                      <a:r>
+                        <a:rPr sz="1000">
+                          <a:solidFill>
+                            <a:srgbClr val="F2EFE6"/>
+                          </a:solidFill>
+                          <a:latin typeface="Segoe UI"/>
+                        </a:rPr>
+                        <a:t>Niger</a:t>
+                      </a:r>
+                    </a:p>
+                  </a:txBody>
+                  <a:tcPr>
+                    <a:solidFill>
+                      <a:srgbClr val="16241C"/>
+                    </a:solidFill>
+                  </a:tcPr>
+                </a:tc>
+                <a:tc>
+                  <a:txBody>
+                    <a:bodyPr/>
+                    <a:lstStyle/>
+                    <a:p>
+                      <a:pPr algn="l"/>
+                      <a:r>
+                        <a:rPr sz="1000">
+                          <a:solidFill>
+                            <a:srgbClr val="F2EFE6"/>
+                          </a:solidFill>
+                          <a:latin typeface="Segoe UI"/>
+                        </a:rPr>
+                        <a:t>400</a:t>
+                      </a:r>
+                    </a:p>
+                  </a:txBody>
+                  <a:tcPr>
+                    <a:solidFill>
+                      <a:srgbClr val="16241C"/>
+                    </a:solidFill>
+                  </a:tcPr>
+                </a:tc>
+              </a:tr>
+              <a:tr h="331470">
+                <a:tc>
+                  <a:txBody>
+                    <a:bodyPr/>
+                    <a:lstStyle/>
+                    <a:p>
+                      <a:pPr algn="l"/>
+                      <a:r>
+                        <a:rPr sz="1000">
+                          <a:solidFill>
+                            <a:srgbClr val="F2EFE6"/>
+                          </a:solidFill>
+                          <a:latin typeface="Segoe UI"/>
+                        </a:rPr>
+                        <a:t>Benue</a:t>
+                      </a:r>
+                    </a:p>
+                  </a:txBody>
+                  <a:tcPr>
+                    <a:solidFill>
+                      <a:srgbClr val="16241C"/>
+                    </a:solidFill>
+                  </a:tcPr>
+                </a:tc>
+                <a:tc>
+                  <a:txBody>
+                    <a:bodyPr/>
+                    <a:lstStyle/>
+                    <a:p>
+                      <a:pPr algn="l"/>
+                      <a:r>
+                        <a:rPr sz="1000">
+                          <a:solidFill>
+                            <a:srgbClr val="F2EFE6"/>
+                          </a:solidFill>
+                          <a:latin typeface="Segoe UI"/>
+                        </a:rPr>
+                        <a:t>330</a:t>
+                      </a:r>
+                    </a:p>
+                  </a:txBody>
+                  <a:tcPr>
+                    <a:solidFill>
+                      <a:srgbClr val="16241C"/>
+                    </a:solidFill>
+                  </a:tcPr>
+                </a:tc>
+              </a:tr>
+              <a:tr h="331470">
+                <a:tc>
+                  <a:txBody>
+                    <a:bodyPr/>
+                    <a:lstStyle/>
+                    <a:p>
+                      <a:pPr algn="l"/>
+                      <a:r>
+                        <a:rPr sz="1000">
+                          <a:solidFill>
+                            <a:srgbClr val="F2EFE6"/>
+                          </a:solidFill>
+                          <a:latin typeface="Segoe UI"/>
+                        </a:rPr>
+                        <a:t>Kwara</a:t>
+                      </a:r>
+                    </a:p>
+                  </a:txBody>
+                  <a:tcPr>
+                    <a:solidFill>
+                      <a:srgbClr val="16241C"/>
+                    </a:solidFill>
+                  </a:tcPr>
+                </a:tc>
+                <a:tc>
+                  <a:txBody>
+                    <a:bodyPr/>
+                    <a:lstStyle/>
+                    <a:p>
+                      <a:pPr algn="l"/>
+                      <a:r>
+                        <a:rPr sz="1000">
+                          <a:solidFill>
+                            <a:srgbClr val="F2EFE6"/>
+                          </a:solidFill>
+                          <a:latin typeface="Segoe UI"/>
+                        </a:rPr>
+                        <a:t>50</a:t>
+                      </a:r>
+                    </a:p>
+                  </a:txBody>
+                  <a:tcPr>
+                    <a:solidFill>
+                      <a:srgbClr val="16241C"/>
+                    </a:solidFill>
+                  </a:tcPr>
+                </a:tc>
+              </a:tr>
+              <a:tr h="331470">
+                <a:tc>
+                  <a:txBody>
+                    <a:bodyPr/>
+                    <a:lstStyle/>
+                    <a:p>
+                      <a:pPr algn="l"/>
+                      <a:r>
+                        <a:rPr sz="1000">
+                          <a:solidFill>
+                            <a:srgbClr val="F2EFE6"/>
+                          </a:solidFill>
+                          <a:latin typeface="Segoe UI"/>
+                        </a:rPr>
+                        <a:t>Kogi</a:t>
+                      </a:r>
+                    </a:p>
+                  </a:txBody>
+                  <a:tcPr>
+                    <a:solidFill>
+                      <a:srgbClr val="16241C"/>
+                    </a:solidFill>
+                  </a:tcPr>
+                </a:tc>
+                <a:tc>
+                  <a:txBody>
+                    <a:bodyPr/>
+                    <a:lstStyle/>
+                    <a:p>
+                      <a:pPr algn="l"/>
+                      <a:r>
+                        <a:rPr sz="1000">
+                          <a:solidFill>
+                            <a:srgbClr val="F2EFE6"/>
+                          </a:solidFill>
+                          <a:latin typeface="Segoe UI"/>
+                        </a:rPr>
+                        <a:t>40</a:t>
+                      </a:r>
+                    </a:p>
+                  </a:txBody>
+                  <a:tcPr>
+                    <a:solidFill>
+                      <a:srgbClr val="16241C"/>
+                    </a:solidFill>
+                  </a:tcPr>
+                </a:tc>
+              </a:tr>
+              <a:tr h="331470">
+                <a:tc>
+                  <a:txBody>
+                    <a:bodyPr/>
+                    <a:lstStyle/>
+                    <a:p>
+                      <a:pPr algn="l"/>
+                      <a:r>
+                        <a:rPr sz="1000">
+                          <a:solidFill>
+                            <a:srgbClr val="F2EFE6"/>
+                          </a:solidFill>
+                          <a:latin typeface="Segoe UI"/>
+                        </a:rPr>
+                        <a:t>Nasarawa</a:t>
+                      </a:r>
+                    </a:p>
+                  </a:txBody>
+                  <a:tcPr>
+                    <a:solidFill>
+                      <a:srgbClr val="16241C"/>
+                    </a:solidFill>
+                  </a:tcPr>
+                </a:tc>
+                <a:tc>
+                  <a:txBody>
+                    <a:bodyPr/>
+                    <a:lstStyle/>
+                    <a:p>
+                      <a:pPr algn="l"/>
+                      <a:r>
+                        <a:rPr sz="1000">
+                          <a:solidFill>
+                            <a:srgbClr val="F2EFE6"/>
+                          </a:solidFill>
+                          <a:latin typeface="Segoe UI"/>
+                        </a:rPr>
+                        <a:t>32</a:t>
+                      </a:r>
+                    </a:p>
+                  </a:txBody>
+                  <a:tcPr>
+                    <a:solidFill>
+                      <a:srgbClr val="16241C"/>
+                    </a:solidFill>
+                  </a:tcPr>
+                </a:tc>
+              </a:tr>
+              <a:tr h="331470">
+                <a:tc>
+                  <a:txBody>
+                    <a:bodyPr/>
+                    <a:lstStyle/>
+                    <a:p>
+                      <a:pPr algn="l"/>
+                      <a:r>
+                        <a:rPr sz="1000">
+                          <a:solidFill>
+                            <a:srgbClr val="F2EFE6"/>
+                          </a:solidFill>
+                          <a:latin typeface="Segoe UI"/>
+                        </a:rPr>
+                        <a:t>FCT</a:t>
+                      </a:r>
+                    </a:p>
+                  </a:txBody>
+                  <a:tcPr>
+                    <a:solidFill>
+                      <a:srgbClr val="16241C"/>
+                    </a:solidFill>
+                  </a:tcPr>
+                </a:tc>
+                <a:tc>
+                  <a:txBody>
+                    <a:bodyPr/>
+                    <a:lstStyle/>
+                    <a:p>
+                      <a:pPr algn="l"/>
+                      <a:r>
+                        <a:rPr sz="1000">
+                          <a:solidFill>
+                            <a:srgbClr val="F2EFE6"/>
+                          </a:solidFill>
+                          <a:latin typeface="Segoe UI"/>
+                        </a:rPr>
+                        <a:t>22</a:t>
+                      </a:r>
+                    </a:p>
+                  </a:txBody>
+                  <a:tcPr>
+                    <a:solidFill>
+                      <a:srgbClr val="16241C"/>
+                    </a:solidFill>
+                  </a:tcPr>
+                </a:tc>
+              </a:tr>
+            </a:tbl>
+          </a:graphicData>
+        </a:graphic>
+      </p:graphicFrame>
+      <p:sp>
+        <p:nvSpPr>
+          <p:cNvPr id="6" name="TextBox 5"/>
           <p:cNvSpPr txBox="1"/>
           <p:nvPr/>
         </p:nvSpPr>
@@ -10500,7 +10882,7 @@
                 </a:solidFill>
                 <a:latin typeface="Segoe UI"/>
               </a:rPr>
-              <a:t>SAY: Say it plainly: we are losing a generation, not just a security statistic.</a:t>
+              <a:t>SAY: No state in this region is untouched — this is a regional emergency.</a:t>
             </a:r>
           </a:p>
         </p:txBody>

--- a/NORTH_CENTRAL_SECURITY_20SLIDE_FAILSAFE.pptx
+++ b/NORTH_CENTRAL_SECURITY_20SLIDE_FAILSAFE.pptx
@@ -25,6 +25,7 @@
     <p:sldId id="271" r:id="rId22"/>
     <p:sldId id="272" r:id="rId23"/>
     <p:sldId id="273" r:id="rId24"/>
+    <p:sldId id="279" r:id="rId30"/>
     <p:sldId id="274" r:id="rId25"/>
     <p:sldId id="275" r:id="rId26"/>
     <p:sldId id="276" r:id="rId27"/>
@@ -3148,7 +3149,7 @@
                 </a:solidFill>
                 <a:latin typeface="Segoe UI"/>
               </a:rPr>
-              <a:t>01 / 23</a:t>
+              <a:t>01 / 24</a:t>
             </a:r>
           </a:p>
         </p:txBody>
@@ -3384,7 +3385,7 @@
                 </a:solidFill>
                 <a:latin typeface="Segoe UI"/>
               </a:rPr>
-              <a:t>10 / 23</a:t>
+              <a:t>10 / 24</a:t>
             </a:r>
           </a:p>
         </p:txBody>
@@ -3585,7 +3586,7 @@
                 </a:solidFill>
                 <a:latin typeface="Segoe UI"/>
               </a:rPr>
-              <a:t>11 / 23</a:t>
+              <a:t>11 / 24</a:t>
             </a:r>
           </a:p>
         </p:txBody>
@@ -3751,7 +3752,7 @@
                 </a:solidFill>
                 <a:latin typeface="Segoe UI"/>
               </a:rPr>
-              <a:t>12 / 23</a:t>
+              <a:t>12 / 24</a:t>
             </a:r>
           </a:p>
         </p:txBody>
@@ -4231,7 +4232,7 @@
                 </a:solidFill>
                 <a:latin typeface="Segoe UI"/>
               </a:rPr>
-              <a:t>13 / 23</a:t>
+              <a:t>13 / 24</a:t>
             </a:r>
           </a:p>
         </p:txBody>
@@ -4467,7 +4468,7 @@
                 </a:solidFill>
                 <a:latin typeface="Segoe UI"/>
               </a:rPr>
-              <a:t>14 / 23</a:t>
+              <a:t>14 / 24</a:t>
             </a:r>
           </a:p>
         </p:txBody>
@@ -4703,7 +4704,7 @@
                 </a:solidFill>
                 <a:latin typeface="Segoe UI"/>
               </a:rPr>
-              <a:t>15 / 23</a:t>
+              <a:t>15 / 24</a:t>
             </a:r>
           </a:p>
         </p:txBody>
@@ -4904,7 +4905,7 @@
                 </a:solidFill>
                 <a:latin typeface="Segoe UI"/>
               </a:rPr>
-              <a:t>16 / 23</a:t>
+              <a:t>16 / 24</a:t>
             </a:r>
           </a:p>
         </p:txBody>
@@ -5105,7 +5106,7 @@
                 </a:solidFill>
                 <a:latin typeface="Segoe UI"/>
               </a:rPr>
-              <a:t>17 / 23</a:t>
+              <a:t>17 / 24</a:t>
             </a:r>
           </a:p>
         </p:txBody>
@@ -5306,7 +5307,7 @@
                 </a:solidFill>
                 <a:latin typeface="Segoe UI"/>
               </a:rPr>
-              <a:t>18 / 23</a:t>
+              <a:t>18 / 24</a:t>
             </a:r>
           </a:p>
         </p:txBody>
@@ -5507,7 +5508,7 @@
                 </a:solidFill>
                 <a:latin typeface="Segoe UI"/>
               </a:rPr>
-              <a:t>19 / 23</a:t>
+              <a:t>19 / 24</a:t>
             </a:r>
           </a:p>
         </p:txBody>
@@ -5708,7 +5709,7 @@
                 </a:solidFill>
                 <a:latin typeface="Segoe UI"/>
               </a:rPr>
-              <a:t>02 / 23</a:t>
+              <a:t>02 / 24</a:t>
             </a:r>
           </a:p>
         </p:txBody>
@@ -6757,7 +6758,7 @@
                 </a:solidFill>
                 <a:latin typeface="Segoe UI"/>
               </a:rPr>
-              <a:t>20 / 23</a:t>
+              <a:t>20 / 24</a:t>
             </a:r>
           </a:p>
         </p:txBody>
@@ -7283,269 +7284,309 @@
         </p:nvSpPr>
         <p:spPr>
           <a:xfrm>
-            <a:off x="10634472" y="228600"/>
-            <a:ext cx="1371600" cy="457200"/>
-          </a:xfrm>
-          <a:prstGeom prst="rect">
-            <a:avLst/>
-          </a:prstGeom>
-          <a:noFill/>
-        </p:spPr>
-        <p:txBody>
-          <a:bodyPr wrap="square">
-            <a:spAutoFit/>
-          </a:bodyPr>
-          <a:lstStyle/>
-          <a:p>
-            <a:pPr algn="r"/>
-            <a:r>
-              <a:rPr sz="1200" b="0" i="0">
+            <a:off x="640080" y="457200"/>
+            <a:ext cx="9966960" cy="320040"/>
+          </a:xfrm>
+          <a:prstGeom prst="rect">
+            <a:avLst/>
+          </a:prstGeom>
+          <a:noFill/>
+        </p:spPr>
+        <p:txBody>
+          <a:bodyPr wrap="square">
+            <a:spAutoFit/>
+          </a:bodyPr>
+          <a:lstStyle/>
+          <a:p>
+            <a:pPr algn="l"/>
+            <a:r>
+              <a:rPr sz="1300" b="0" i="0">
+                <a:solidFill>
+                  <a:srgbClr val="2FD8C9"/>
+                </a:solidFill>
+                <a:latin typeface="Segoe UI"/>
+              </a:rPr>
+              <a:t>NEW SECURITY ARCHITECTURE · REGIONAL FRAMEWORK</a:t>
+            </a:r>
+          </a:p>
+        </p:txBody>
+      </p:sp>
+      <p:sp>
+        <p:nvSpPr>
+          <p:cNvPr id="3" name="TextBox 2"/>
+          <p:cNvSpPr txBox="1"/>
+          <p:nvPr/>
+        </p:nvSpPr>
+        <p:spPr>
+          <a:xfrm>
+            <a:off x="640080" y="777240"/>
+            <a:ext cx="9966960" cy="548640"/>
+          </a:xfrm>
+          <a:prstGeom prst="rect">
+            <a:avLst/>
+          </a:prstGeom>
+          <a:noFill/>
+        </p:spPr>
+        <p:txBody>
+          <a:bodyPr wrap="square">
+            <a:spAutoFit/>
+          </a:bodyPr>
+          <a:lstStyle/>
+          <a:p>
+            <a:pPr algn="l"/>
+            <a:r>
+              <a:rPr sz="2300" b="1" i="0">
+                <a:solidFill>
+                  <a:srgbClr val="2FD8C9"/>
+                </a:solidFill>
+                <a:latin typeface="Segoe UI"/>
+              </a:rPr>
+              <a:t>Five Pillars of the Regional Security Architecture</a:t>
+            </a:r>
+          </a:p>
+        </p:txBody>
+      </p:sp>
+      <p:sp>
+        <p:nvSpPr>
+          <p:cNvPr id="4" name="TextBox 3"/>
+          <p:cNvSpPr txBox="1"/>
+          <p:nvPr/>
+        </p:nvSpPr>
+        <p:spPr>
+          <a:xfrm>
+            <a:off x="640080" y="1417320"/>
+            <a:ext cx="9966960" cy="658368"/>
+          </a:xfrm>
+          <a:prstGeom prst="rect">
+            <a:avLst/>
+          </a:prstGeom>
+          <a:noFill/>
+        </p:spPr>
+        <p:txBody>
+          <a:bodyPr wrap="square">
+            <a:spAutoFit/>
+          </a:bodyPr>
+          <a:lstStyle/>
+          <a:p>
+            <a:pPr algn="l"/>
+            <a:r>
+              <a:rPr sz="1300" b="0" i="0">
+                <a:solidFill>
+                  <a:srgbClr val="F2EFE6"/>
+                </a:solidFill>
+                <a:latin typeface="Segoe UI"/>
+              </a:rPr>
+              <a:t>1. Strategic Coordination — a North Central Regional Security Council bringing together the states, the Federal Government, security agencies, traditional institutions and other critical stakeholders.</a:t>
+            </a:r>
+          </a:p>
+        </p:txBody>
+      </p:sp>
+      <p:sp>
+        <p:nvSpPr>
+          <p:cNvPr id="5" name="TextBox 4"/>
+          <p:cNvSpPr txBox="1"/>
+          <p:nvPr/>
+        </p:nvSpPr>
+        <p:spPr>
+          <a:xfrm>
+            <a:off x="640080" y="2103120"/>
+            <a:ext cx="9966960" cy="658368"/>
+          </a:xfrm>
+          <a:prstGeom prst="rect">
+            <a:avLst/>
+          </a:prstGeom>
+          <a:noFill/>
+        </p:spPr>
+        <p:txBody>
+          <a:bodyPr wrap="square">
+            <a:spAutoFit/>
+          </a:bodyPr>
+          <a:lstStyle/>
+          <a:p>
+            <a:pPr algn="l"/>
+            <a:r>
+              <a:rPr sz="1300" b="0" i="0">
+                <a:solidFill>
+                  <a:srgbClr val="F2EFE6"/>
+                </a:solidFill>
+                <a:latin typeface="Segoe UI"/>
+              </a:rPr>
+              <a:t>2. Intelligence &amp; Early Warning — a Regional Intelligence and Security Fusion Centre, linked to every state and Local Government, so threats are identified and addressed before they become crises.</a:t>
+            </a:r>
+          </a:p>
+        </p:txBody>
+      </p:sp>
+      <p:sp>
+        <p:nvSpPr>
+          <p:cNvPr id="6" name="TextBox 5"/>
+          <p:cNvSpPr txBox="1"/>
+          <p:nvPr/>
+        </p:nvSpPr>
+        <p:spPr>
+          <a:xfrm>
+            <a:off x="640080" y="2788920"/>
+            <a:ext cx="9966960" cy="658368"/>
+          </a:xfrm>
+          <a:prstGeom prst="rect">
+            <a:avLst/>
+          </a:prstGeom>
+          <a:noFill/>
+        </p:spPr>
+        <p:txBody>
+          <a:bodyPr wrap="square">
+            <a:spAutoFit/>
+          </a:bodyPr>
+          <a:lstStyle/>
+          <a:p>
+            <a:pPr algn="l"/>
+            <a:r>
+              <a:rPr sz="1300" b="0" i="0">
+                <a:solidFill>
+                  <a:srgbClr val="F2EFE6"/>
+                </a:solidFill>
+                <a:latin typeface="Segoe UI"/>
+              </a:rPr>
+              <a:t>3. Community Resilience — the Local Government and the community as the foundation of early warning, conflict prevention and public confidence.</a:t>
+            </a:r>
+          </a:p>
+        </p:txBody>
+      </p:sp>
+      <p:sp>
+        <p:nvSpPr>
+          <p:cNvPr id="7" name="TextBox 6"/>
+          <p:cNvSpPr txBox="1"/>
+          <p:nvPr/>
+        </p:nvSpPr>
+        <p:spPr>
+          <a:xfrm>
+            <a:off x="640080" y="3474720"/>
+            <a:ext cx="9966960" cy="658368"/>
+          </a:xfrm>
+          <a:prstGeom prst="rect">
+            <a:avLst/>
+          </a:prstGeom>
+          <a:noFill/>
+        </p:spPr>
+        <p:txBody>
+          <a:bodyPr wrap="square">
+            <a:spAutoFit/>
+          </a:bodyPr>
+          <a:lstStyle/>
+          <a:p>
+            <a:pPr algn="l"/>
+            <a:r>
+              <a:rPr sz="1300" b="0" i="0">
+                <a:solidFill>
+                  <a:srgbClr val="F2EFE6"/>
+                </a:solidFill>
+                <a:latin typeface="Segoe UI"/>
+              </a:rPr>
+              <a:t>4. Technology &amp; Infrastructure Protection — intelligence, communications, surveillance, forensics and emergency response integrated into the region's development system; security by design in every major project.</a:t>
+            </a:r>
+          </a:p>
+        </p:txBody>
+      </p:sp>
+      <p:sp>
+        <p:nvSpPr>
+          <p:cNvPr id="8" name="TextBox 7"/>
+          <p:cNvSpPr txBox="1"/>
+          <p:nvPr/>
+        </p:nvSpPr>
+        <p:spPr>
+          <a:xfrm>
+            <a:off x="640080" y="4160520"/>
+            <a:ext cx="9966960" cy="658368"/>
+          </a:xfrm>
+          <a:prstGeom prst="rect">
+            <a:avLst/>
+          </a:prstGeom>
+          <a:noFill/>
+        </p:spPr>
+        <p:txBody>
+          <a:bodyPr wrap="square">
+            <a:spAutoFit/>
+          </a:bodyPr>
+          <a:lstStyle/>
+          <a:p>
+            <a:pPr algn="l"/>
+            <a:r>
+              <a:rPr sz="1300" b="0" i="0">
+                <a:solidFill>
+                  <a:srgbClr val="F2EFE6"/>
+                </a:solidFill>
+                <a:latin typeface="Segoe UI"/>
+              </a:rPr>
+              <a:t>5. Sustainable Financing &amp; Human Capacity — a North Central Security Endowment Fund, and mobilisation of the region's vast pool of experienced military, intelligence, police, technical and professional personnel.</a:t>
+            </a:r>
+          </a:p>
+        </p:txBody>
+      </p:sp>
+      <p:sp>
+        <p:nvSpPr>
+          <p:cNvPr id="9" name="TextBox 8"/>
+          <p:cNvSpPr txBox="1"/>
+          <p:nvPr/>
+        </p:nvSpPr>
+        <p:spPr>
+          <a:xfrm>
+            <a:off x="640080" y="4892040"/>
+            <a:ext cx="9966960" cy="822960"/>
+          </a:xfrm>
+          <a:prstGeom prst="rect">
+            <a:avLst/>
+          </a:prstGeom>
+          <a:noFill/>
+        </p:spPr>
+        <p:txBody>
+          <a:bodyPr wrap="square">
+            <a:spAutoFit/>
+          </a:bodyPr>
+          <a:lstStyle/>
+          <a:p>
+            <a:pPr algn="l"/>
+            <a:r>
+              <a:rPr sz="1400" b="1" i="1">
                 <a:solidFill>
                   <a:srgbClr val="C9A24B"/>
                 </a:solidFill>
                 <a:latin typeface="Segoe UI"/>
               </a:rPr>
-              <a:t>21 / 23</a:t>
-            </a:r>
-          </a:p>
-        </p:txBody>
-      </p:sp>
-      <p:sp>
-        <p:nvSpPr>
-          <p:cNvPr id="3" name="TextBox 2"/>
-          <p:cNvSpPr txBox="1"/>
-          <p:nvPr/>
-        </p:nvSpPr>
-        <p:spPr>
-          <a:xfrm>
-            <a:off x="822960" y="1051560"/>
-            <a:ext cx="9509760" cy="365760"/>
-          </a:xfrm>
-          <a:prstGeom prst="rect">
-            <a:avLst/>
-          </a:prstGeom>
-          <a:noFill/>
-        </p:spPr>
-        <p:txBody>
-          <a:bodyPr wrap="square">
-            <a:spAutoFit/>
-          </a:bodyPr>
-          <a:lstStyle/>
-          <a:p>
-            <a:pPr algn="ctr"/>
-            <a:r>
-              <a:rPr sz="1300" b="0" i="0">
-                <a:solidFill>
-                  <a:srgbClr val="9FBFA9"/>
-                </a:solidFill>
-                <a:latin typeface="Segoe UI"/>
-              </a:rPr>
-              <a:t>THE NORTH-CENTRAL SECURITY COMPACT</a:t>
-            </a:r>
-          </a:p>
-        </p:txBody>
-      </p:sp>
-      <p:sp>
-        <p:nvSpPr>
-          <p:cNvPr id="4" name="TextBox 3"/>
-          <p:cNvSpPr txBox="1"/>
-          <p:nvPr/>
-        </p:nvSpPr>
-        <p:spPr>
-          <a:xfrm>
-            <a:off x="640080" y="1417320"/>
-            <a:ext cx="9875520" cy="914400"/>
-          </a:xfrm>
-          <a:prstGeom prst="rect">
-            <a:avLst/>
-          </a:prstGeom>
-          <a:noFill/>
-        </p:spPr>
-        <p:txBody>
-          <a:bodyPr wrap="square">
-            <a:spAutoFit/>
-          </a:bodyPr>
-          <a:lstStyle/>
-          <a:p>
-            <a:pPr algn="ctr"/>
-            <a:r>
-              <a:rPr sz="2800" b="1" i="0">
+              <a:t>Our ambition should be very clear: a North Central where farmers can farm, businesses can invest, children can go to school, communities can live in peace, infrastructure can function and development can continue without fear or disruption.</a:t>
+            </a:r>
+          </a:p>
+        </p:txBody>
+      </p:sp>
+      <p:sp>
+        <p:nvSpPr>
+          <p:cNvPr id="10" name="TextBox 9"/>
+          <p:cNvSpPr txBox="1"/>
+          <p:nvPr/>
+        </p:nvSpPr>
+        <p:spPr>
+          <a:xfrm>
+            <a:off x="640080" y="5989320"/>
+            <a:ext cx="9966960" cy="502920"/>
+          </a:xfrm>
+          <a:prstGeom prst="rect">
+            <a:avLst/>
+          </a:prstGeom>
+          <a:noFill/>
+        </p:spPr>
+        <p:txBody>
+          <a:bodyPr wrap="square">
+            <a:spAutoFit/>
+          </a:bodyPr>
+          <a:lstStyle/>
+          <a:p>
+            <a:pPr algn="l"/>
+            <a:r>
+              <a:rPr sz="1200" b="1" i="0">
                 <a:solidFill>
                   <a:srgbClr val="C9A24B"/>
                 </a:solidFill>
                 <a:latin typeface="Segoe UI"/>
               </a:rPr>
-              <a:t>Seven Commitments</a:t>
-            </a:r>
-          </a:p>
-        </p:txBody>
-      </p:sp>
-      <p:sp>
-        <p:nvSpPr>
-          <p:cNvPr id="5" name="TextBox 4"/>
-          <p:cNvSpPr txBox="1"/>
-          <p:nvPr/>
-        </p:nvSpPr>
-        <p:spPr>
-          <a:xfrm>
-            <a:off x="822960" y="2286000"/>
-            <a:ext cx="9509760" cy="3291840"/>
-          </a:xfrm>
-          <a:prstGeom prst="rect">
-            <a:avLst/>
-          </a:prstGeom>
-          <a:noFill/>
-        </p:spPr>
-        <p:txBody>
-          <a:bodyPr wrap="square">
-            <a:spAutoFit/>
-          </a:bodyPr>
-          <a:lstStyle/>
-          <a:p>
-            <a:pPr>
-              <a:spcAft>
-                <a:spcPts val="600"/>
-              </a:spcAft>
-            </a:pPr>
-            <a:r>
-              <a:rPr sz="1500">
-                <a:solidFill>
-                  <a:srgbClr val="F2EFE6"/>
-                </a:solidFill>
-                <a:latin typeface="Segoe UI"/>
-              </a:rPr>
-              <a:t>1. One Threat Picture — we share intelligence</a:t>
-            </a:r>
-          </a:p>
-          <a:p>
-            <a:pPr>
-              <a:spcAft>
-                <a:spcPts val="600"/>
-              </a:spcAft>
-            </a:pPr>
-            <a:r>
-              <a:rPr sz="1500">
-                <a:solidFill>
-                  <a:srgbClr val="F2EFE6"/>
-                </a:solidFill>
-                <a:latin typeface="Segoe UI"/>
-              </a:rPr>
-              <a:t>2. One Early-Warning System — we listen to communities</a:t>
-            </a:r>
-          </a:p>
-          <a:p>
-            <a:pPr>
-              <a:spcAft>
-                <a:spcPts val="600"/>
-              </a:spcAft>
-            </a:pPr>
-            <a:r>
-              <a:rPr sz="1500">
-                <a:solidFill>
-                  <a:srgbClr val="F2EFE6"/>
-                </a:solidFill>
-                <a:latin typeface="Segoe UI"/>
-              </a:rPr>
-              <a:t>3. One Rapid-Response Philosophy — before massacres, not after</a:t>
-            </a:r>
-          </a:p>
-          <a:p>
-            <a:pPr>
-              <a:spcAft>
-                <a:spcPts val="600"/>
-              </a:spcAft>
-            </a:pPr>
-            <a:r>
-              <a:rPr sz="1500">
-                <a:solidFill>
-                  <a:srgbClr val="F2EFE6"/>
-                </a:solidFill>
-                <a:latin typeface="Segoe UI"/>
-              </a:rPr>
-              <a:t>4. One Professional Standard — discipline, law, dignity</a:t>
-            </a:r>
-          </a:p>
-          <a:p>
-            <a:pPr>
-              <a:spcAft>
-                <a:spcPts val="600"/>
-              </a:spcAft>
-            </a:pPr>
-            <a:r>
-              <a:rPr sz="1500">
-                <a:solidFill>
-                  <a:srgbClr val="F2EFE6"/>
-                </a:solidFill>
-                <a:latin typeface="Segoe UI"/>
-              </a:rPr>
-              <a:t>5. One Regional Approach — no state-border cover</a:t>
-            </a:r>
-          </a:p>
-          <a:p>
-            <a:pPr>
-              <a:spcAft>
-                <a:spcPts val="600"/>
-              </a:spcAft>
-            </a:pPr>
-            <a:r>
-              <a:rPr sz="1500">
-                <a:solidFill>
-                  <a:srgbClr val="F2EFE6"/>
-                </a:solidFill>
-                <a:latin typeface="Segoe UI"/>
-              </a:rPr>
-              <a:t>6. One Development Agenda — secure and rebuild together</a:t>
-            </a:r>
-          </a:p>
-          <a:p>
-            <a:pPr>
-              <a:spcAft>
-                <a:spcPts val="600"/>
-              </a:spcAft>
-            </a:pPr>
-            <a:r>
-              <a:rPr sz="1500">
-                <a:solidFill>
-                  <a:srgbClr val="F2EFE6"/>
-                </a:solidFill>
-                <a:latin typeface="Segoe UI"/>
-              </a:rPr>
-              <a:t>7. One Measure of Success — the safety and dignity of the citizen</a:t>
-            </a:r>
-          </a:p>
-        </p:txBody>
-      </p:sp>
-      <p:sp>
-        <p:nvSpPr>
-          <p:cNvPr id="6" name="TextBox 5"/>
-          <p:cNvSpPr txBox="1"/>
-          <p:nvPr/>
-        </p:nvSpPr>
-        <p:spPr>
-          <a:xfrm>
-            <a:off x="822960" y="5806440"/>
-            <a:ext cx="9509760" cy="685800"/>
-          </a:xfrm>
-          <a:prstGeom prst="rect">
-            <a:avLst/>
-          </a:prstGeom>
-          <a:noFill/>
-        </p:spPr>
-        <p:txBody>
-          <a:bodyPr wrap="square">
-            <a:spAutoFit/>
-          </a:bodyPr>
-          <a:lstStyle/>
-          <a:p>
-            <a:pPr algn="ctr"/>
-            <a:r>
-              <a:rPr sz="1500" b="1" i="0">
-                <a:solidFill>
-                  <a:srgbClr val="C9A24B"/>
-                </a:solidFill>
-                <a:latin typeface="Segoe UI"/>
-              </a:rPr>
-              <a:t>SAY: Ask the summit to adopt all seven, together, as one compact.</a:t>
+              <a:t>SAY: Five pillars, one architecture — coordination, intelligence, community, technology, and the financing and people to sustain all four.</a:t>
             </a:r>
           </a:p>
         </p:txBody>
@@ -7606,7 +7647,7 @@
                 </a:solidFill>
                 <a:latin typeface="Segoe UI"/>
               </a:rPr>
-              <a:t>22 / 23</a:t>
+              <a:t>22 / 24</a:t>
             </a:r>
           </a:p>
         </p:txBody>
@@ -7641,7 +7682,7 @@
                 </a:solidFill>
                 <a:latin typeface="Segoe UI"/>
               </a:rPr>
-              <a:t>CLOSING</a:t>
+              <a:t>THE NORTH-CENTRAL SECURITY COMPACT</a:t>
             </a:r>
           </a:p>
         </p:txBody>
@@ -7654,8 +7695,8 @@
         </p:nvSpPr>
         <p:spPr>
           <a:xfrm>
-            <a:off x="822960" y="2011680"/>
-            <a:ext cx="9509760" cy="1463040"/>
+            <a:off x="640080" y="1417320"/>
+            <a:ext cx="9875520" cy="914400"/>
           </a:xfrm>
           <a:prstGeom prst="rect">
             <a:avLst/>
@@ -7670,27 +7711,162 @@
           <a:p>
             <a:pPr algn="ctr"/>
             <a:r>
-              <a:rPr sz="1900" b="0" i="1">
+              <a:rPr sz="2800" b="1" i="0">
+                <a:solidFill>
+                  <a:srgbClr val="C9A24B"/>
+                </a:solidFill>
+                <a:latin typeface="Segoe UI"/>
+              </a:rPr>
+              <a:t>Seven Commitments</a:t>
+            </a:r>
+          </a:p>
+        </p:txBody>
+      </p:sp>
+      <p:sp>
+        <p:nvSpPr>
+          <p:cNvPr id="5" name="TextBox 4"/>
+          <p:cNvSpPr txBox="1"/>
+          <p:nvPr/>
+        </p:nvSpPr>
+        <p:spPr>
+          <a:xfrm>
+            <a:off x="822960" y="2286000"/>
+            <a:ext cx="9509760" cy="3291840"/>
+          </a:xfrm>
+          <a:prstGeom prst="rect">
+            <a:avLst/>
+          </a:prstGeom>
+          <a:noFill/>
+        </p:spPr>
+        <p:txBody>
+          <a:bodyPr wrap="square">
+            <a:spAutoFit/>
+          </a:bodyPr>
+          <a:lstStyle/>
+          <a:p>
+            <a:pPr>
+              <a:spcAft>
+                <a:spcPts val="600"/>
+              </a:spcAft>
+            </a:pPr>
+            <a:r>
+              <a:rPr sz="1500">
                 <a:solidFill>
                   <a:srgbClr val="F2EFE6"/>
                 </a:solidFill>
                 <a:latin typeface="Segoe UI"/>
               </a:rPr>
-              <a:t>"If every local government across the North-Central states is empowered, accountable and connected — we begin to build a regional security shield."</a:t>
-            </a:r>
-          </a:p>
-        </p:txBody>
-      </p:sp>
-      <p:sp>
-        <p:nvSpPr>
-          <p:cNvPr id="5" name="TextBox 4"/>
-          <p:cNvSpPr txBox="1"/>
-          <p:nvPr/>
-        </p:nvSpPr>
-        <p:spPr>
-          <a:xfrm>
-            <a:off x="822960" y="3657600"/>
-            <a:ext cx="9509760" cy="1188720"/>
+              <a:t>1. One Threat Picture — we share intelligence</a:t>
+            </a:r>
+          </a:p>
+          <a:p>
+            <a:pPr>
+              <a:spcAft>
+                <a:spcPts val="600"/>
+              </a:spcAft>
+            </a:pPr>
+            <a:r>
+              <a:rPr sz="1500">
+                <a:solidFill>
+                  <a:srgbClr val="F2EFE6"/>
+                </a:solidFill>
+                <a:latin typeface="Segoe UI"/>
+              </a:rPr>
+              <a:t>2. One Early-Warning System — we listen to communities</a:t>
+            </a:r>
+          </a:p>
+          <a:p>
+            <a:pPr>
+              <a:spcAft>
+                <a:spcPts val="600"/>
+              </a:spcAft>
+            </a:pPr>
+            <a:r>
+              <a:rPr sz="1500">
+                <a:solidFill>
+                  <a:srgbClr val="F2EFE6"/>
+                </a:solidFill>
+                <a:latin typeface="Segoe UI"/>
+              </a:rPr>
+              <a:t>3. One Rapid-Response Philosophy — before massacres, not after</a:t>
+            </a:r>
+          </a:p>
+          <a:p>
+            <a:pPr>
+              <a:spcAft>
+                <a:spcPts val="600"/>
+              </a:spcAft>
+            </a:pPr>
+            <a:r>
+              <a:rPr sz="1500">
+                <a:solidFill>
+                  <a:srgbClr val="F2EFE6"/>
+                </a:solidFill>
+                <a:latin typeface="Segoe UI"/>
+              </a:rPr>
+              <a:t>4. One Professional Standard — discipline, law, dignity</a:t>
+            </a:r>
+          </a:p>
+          <a:p>
+            <a:pPr>
+              <a:spcAft>
+                <a:spcPts val="600"/>
+              </a:spcAft>
+            </a:pPr>
+            <a:r>
+              <a:rPr sz="1500">
+                <a:solidFill>
+                  <a:srgbClr val="F2EFE6"/>
+                </a:solidFill>
+                <a:latin typeface="Segoe UI"/>
+              </a:rPr>
+              <a:t>5. One Regional Approach — no state-border cover</a:t>
+            </a:r>
+          </a:p>
+          <a:p>
+            <a:pPr>
+              <a:spcAft>
+                <a:spcPts val="600"/>
+              </a:spcAft>
+            </a:pPr>
+            <a:r>
+              <a:rPr sz="1500">
+                <a:solidFill>
+                  <a:srgbClr val="F2EFE6"/>
+                </a:solidFill>
+                <a:latin typeface="Segoe UI"/>
+              </a:rPr>
+              <a:t>6. One Development Agenda — secure and rebuild together</a:t>
+            </a:r>
+          </a:p>
+          <a:p>
+            <a:pPr>
+              <a:spcAft>
+                <a:spcPts val="600"/>
+              </a:spcAft>
+            </a:pPr>
+            <a:r>
+              <a:rPr sz="1500">
+                <a:solidFill>
+                  <a:srgbClr val="F2EFE6"/>
+                </a:solidFill>
+                <a:latin typeface="Segoe UI"/>
+              </a:rPr>
+              <a:t>7. One Measure of Success — the safety and dignity of the citizen</a:t>
+            </a:r>
+          </a:p>
+        </p:txBody>
+      </p:sp>
+      <p:sp>
+        <p:nvSpPr>
+          <p:cNvPr id="6" name="TextBox 5"/>
+          <p:cNvSpPr txBox="1"/>
+          <p:nvPr/>
+        </p:nvSpPr>
+        <p:spPr>
+          <a:xfrm>
+            <a:off x="822960" y="5806440"/>
+            <a:ext cx="9509760" cy="685800"/>
           </a:xfrm>
           <a:prstGeom prst="rect">
             <a:avLst/>
@@ -7705,48 +7881,13 @@
           <a:p>
             <a:pPr algn="ctr"/>
             <a:r>
-              <a:rPr sz="1800" b="1" i="0">
+              <a:rPr sz="1500" b="1" i="0">
                 <a:solidFill>
                   <a:srgbClr val="C9A24B"/>
                 </a:solidFill>
                 <a:latin typeface="Segoe UI"/>
               </a:rPr>
-              <a:t>He simply wants to arrive alive. That is the standard by which we must judge ourselves. And it is not beyond the capacity of Nigeria.</a:t>
-            </a:r>
-          </a:p>
-        </p:txBody>
-      </p:sp>
-      <p:sp>
-        <p:nvSpPr>
-          <p:cNvPr id="6" name="TextBox 5"/>
-          <p:cNvSpPr txBox="1"/>
-          <p:nvPr/>
-        </p:nvSpPr>
-        <p:spPr>
-          <a:xfrm>
-            <a:off x="822960" y="6126480"/>
-            <a:ext cx="9509760" cy="320040"/>
-          </a:xfrm>
-          <a:prstGeom prst="rect">
-            <a:avLst/>
-          </a:prstGeom>
-          <a:noFill/>
-        </p:spPr>
-        <p:txBody>
-          <a:bodyPr wrap="square">
-            <a:spAutoFit/>
-          </a:bodyPr>
-          <a:lstStyle/>
-          <a:p>
-            <a:pPr algn="ctr"/>
-            <a:r>
-              <a:rPr sz="900" b="0" i="0">
-                <a:solidFill>
-                  <a:srgbClr val="9FBFA9"/>
-                </a:solidFill>
-                <a:latin typeface="Segoe UI"/>
-              </a:rPr>
-              <a:t>AVM MONDAY RIKU MORGAN (RTD) · NORTH-CENTRAL SECURITY SUMMIT · 2026</a:t>
+              <a:t>SAY: Ask the summit to adopt all seven, together, as one compact.</a:t>
             </a:r>
           </a:p>
         </p:txBody>
@@ -7807,7 +7948,208 @@
                 </a:solidFill>
                 <a:latin typeface="Segoe UI"/>
               </a:rPr>
-              <a:t>23 / 23</a:t>
+              <a:t>23 / 24</a:t>
+            </a:r>
+          </a:p>
+        </p:txBody>
+      </p:sp>
+      <p:sp>
+        <p:nvSpPr>
+          <p:cNvPr id="3" name="TextBox 2"/>
+          <p:cNvSpPr txBox="1"/>
+          <p:nvPr/>
+        </p:nvSpPr>
+        <p:spPr>
+          <a:xfrm>
+            <a:off x="822960" y="1051560"/>
+            <a:ext cx="9509760" cy="365760"/>
+          </a:xfrm>
+          <a:prstGeom prst="rect">
+            <a:avLst/>
+          </a:prstGeom>
+          <a:noFill/>
+        </p:spPr>
+        <p:txBody>
+          <a:bodyPr wrap="square">
+            <a:spAutoFit/>
+          </a:bodyPr>
+          <a:lstStyle/>
+          <a:p>
+            <a:pPr algn="ctr"/>
+            <a:r>
+              <a:rPr sz="1300" b="0" i="0">
+                <a:solidFill>
+                  <a:srgbClr val="9FBFA9"/>
+                </a:solidFill>
+                <a:latin typeface="Segoe UI"/>
+              </a:rPr>
+              <a:t>CLOSING</a:t>
+            </a:r>
+          </a:p>
+        </p:txBody>
+      </p:sp>
+      <p:sp>
+        <p:nvSpPr>
+          <p:cNvPr id="4" name="TextBox 3"/>
+          <p:cNvSpPr txBox="1"/>
+          <p:nvPr/>
+        </p:nvSpPr>
+        <p:spPr>
+          <a:xfrm>
+            <a:off x="822960" y="2011680"/>
+            <a:ext cx="9509760" cy="1463040"/>
+          </a:xfrm>
+          <a:prstGeom prst="rect">
+            <a:avLst/>
+          </a:prstGeom>
+          <a:noFill/>
+        </p:spPr>
+        <p:txBody>
+          <a:bodyPr wrap="square">
+            <a:spAutoFit/>
+          </a:bodyPr>
+          <a:lstStyle/>
+          <a:p>
+            <a:pPr algn="ctr"/>
+            <a:r>
+              <a:rPr sz="1900" b="0" i="1">
+                <a:solidFill>
+                  <a:srgbClr val="F2EFE6"/>
+                </a:solidFill>
+                <a:latin typeface="Segoe UI"/>
+              </a:rPr>
+              <a:t>"If every local government across the North-Central states is empowered, accountable and connected — we begin to build a regional security shield."</a:t>
+            </a:r>
+          </a:p>
+        </p:txBody>
+      </p:sp>
+      <p:sp>
+        <p:nvSpPr>
+          <p:cNvPr id="5" name="TextBox 4"/>
+          <p:cNvSpPr txBox="1"/>
+          <p:nvPr/>
+        </p:nvSpPr>
+        <p:spPr>
+          <a:xfrm>
+            <a:off x="822960" y="3657600"/>
+            <a:ext cx="9509760" cy="1188720"/>
+          </a:xfrm>
+          <a:prstGeom prst="rect">
+            <a:avLst/>
+          </a:prstGeom>
+          <a:noFill/>
+        </p:spPr>
+        <p:txBody>
+          <a:bodyPr wrap="square">
+            <a:spAutoFit/>
+          </a:bodyPr>
+          <a:lstStyle/>
+          <a:p>
+            <a:pPr algn="ctr"/>
+            <a:r>
+              <a:rPr sz="1800" b="1" i="0">
+                <a:solidFill>
+                  <a:srgbClr val="C9A24B"/>
+                </a:solidFill>
+                <a:latin typeface="Segoe UI"/>
+              </a:rPr>
+              <a:t>He simply wants to arrive alive. That is the standard by which we must judge ourselves. And it is not beyond the capacity of Nigeria.</a:t>
+            </a:r>
+          </a:p>
+        </p:txBody>
+      </p:sp>
+      <p:sp>
+        <p:nvSpPr>
+          <p:cNvPr id="6" name="TextBox 5"/>
+          <p:cNvSpPr txBox="1"/>
+          <p:nvPr/>
+        </p:nvSpPr>
+        <p:spPr>
+          <a:xfrm>
+            <a:off x="822960" y="6126480"/>
+            <a:ext cx="9509760" cy="320040"/>
+          </a:xfrm>
+          <a:prstGeom prst="rect">
+            <a:avLst/>
+          </a:prstGeom>
+          <a:noFill/>
+        </p:spPr>
+        <p:txBody>
+          <a:bodyPr wrap="square">
+            <a:spAutoFit/>
+          </a:bodyPr>
+          <a:lstStyle/>
+          <a:p>
+            <a:pPr algn="ctr"/>
+            <a:r>
+              <a:rPr sz="900" b="0" i="0">
+                <a:solidFill>
+                  <a:srgbClr val="9FBFA9"/>
+                </a:solidFill>
+                <a:latin typeface="Segoe UI"/>
+              </a:rPr>
+              <a:t>AVM MONDAY RIKU MORGAN (RTD) · NORTH-CENTRAL SECURITY SUMMIT · 2026</a:t>
+            </a:r>
+          </a:p>
+        </p:txBody>
+      </p:sp>
+    </p:spTree>
+  </p:cSld>
+  <p:clrMapOvr>
+    <a:masterClrMapping/>
+  </p:clrMapOvr>
+</p:sld>
+</file>
+
+<file path=ppt/slides/slide24.xml><?xml version="1.0" encoding="utf-8"?>
+<p:sld xmlns:a="http://schemas.openxmlformats.org/drawingml/2006/main" xmlns:p="http://schemas.openxmlformats.org/presentationml/2006/main" xmlns:r="http://schemas.openxmlformats.org/officeDocument/2006/relationships">
+  <p:cSld>
+    <p:bg>
+      <p:bgPr>
+        <a:solidFill>
+          <a:srgbClr val="0D1A13"/>
+        </a:solidFill>
+        <a:effectLst/>
+      </p:bgPr>
+    </p:bg>
+    <p:spTree>
+      <p:nvGrpSpPr>
+        <p:cNvPr id="1" name=""/>
+        <p:cNvGrpSpPr/>
+        <p:nvPr/>
+      </p:nvGrpSpPr>
+      <p:grpSpPr/>
+      <p:sp>
+        <p:nvSpPr>
+          <p:cNvPr id="2" name="TextBox 1"/>
+          <p:cNvSpPr txBox="1"/>
+          <p:nvPr/>
+        </p:nvSpPr>
+        <p:spPr>
+          <a:xfrm>
+            <a:off x="10634472" y="228600"/>
+            <a:ext cx="1371600" cy="457200"/>
+          </a:xfrm>
+          <a:prstGeom prst="rect">
+            <a:avLst/>
+          </a:prstGeom>
+          <a:noFill/>
+        </p:spPr>
+        <p:txBody>
+          <a:bodyPr wrap="square">
+            <a:spAutoFit/>
+          </a:bodyPr>
+          <a:lstStyle/>
+          <a:p>
+            <a:pPr algn="r"/>
+            <a:r>
+              <a:rPr sz="1200" b="0" i="0">
+                <a:solidFill>
+                  <a:srgbClr val="C9A24B"/>
+                </a:solidFill>
+                <a:latin typeface="Segoe UI"/>
+              </a:rPr>
+              <a:t>24 / 24</a:t>
             </a:r>
           </a:p>
         </p:txBody>
@@ -8316,7 +8658,7 @@
                 </a:solidFill>
                 <a:latin typeface="Segoe UI"/>
               </a:rPr>
-              <a:t>03 / 23</a:t>
+              <a:t>03 / 24</a:t>
             </a:r>
           </a:p>
         </p:txBody>
@@ -9350,7 +9692,7 @@
                 </a:solidFill>
                 <a:latin typeface="Segoe UI"/>
               </a:rPr>
-              <a:t>06 / 23</a:t>
+              <a:t>06 / 24</a:t>
             </a:r>
           </a:p>
         </p:txBody>
@@ -9551,7 +9893,7 @@
                 </a:solidFill>
                 <a:latin typeface="Segoe UI"/>
               </a:rPr>
-              <a:t>07 / 23</a:t>
+              <a:t>07 / 24</a:t>
             </a:r>
           </a:p>
         </p:txBody>
@@ -9935,7 +10277,7 @@
                 </a:solidFill>
                 <a:latin typeface="Segoe UI"/>
               </a:rPr>
-              <a:t>08 / 23</a:t>
+              <a:t>08 / 24</a:t>
             </a:r>
           </a:p>
         </p:txBody>
@@ -10367,7 +10709,7 @@
                 </a:solidFill>
                 <a:latin typeface="Segoe UI"/>
               </a:rPr>
-              <a:t>09 / 23</a:t>
+              <a:t>09 / 24</a:t>
             </a:r>
           </a:p>
         </p:txBody>
